--- a/Deutsch_11/Kafka_Brief_an_den_Vater/Praesentation_Kafka_Brief_an_den_Vater.pptx
+++ b/Deutsch_11/Kafka_Brief_an_den_Vater/Praesentation_Kafka_Brief_an_den_Vater.pptx
@@ -16,9 +16,11 @@
     <p:sldId id="264" r:id="rId10"/>
     <p:sldId id="265" r:id="rId11"/>
     <p:sldId id="266" r:id="rId12"/>
+    <p:sldId id="267" r:id="rId13"/>
+    <p:sldId id="268" r:id="rId14"/>
   </p:sldIdLst>
   <p:notesMasterIdLst>
-    <p:notesMasterId r:id="rId13"/>
+    <p:notesMasterId r:id="rId15"/>
   </p:notesMasterIdLst>
   <p:sldSz cx="12192000" cy="6858000"/>
   <p:notesSz cx="6858000" cy="12192000"/>
@@ -512,7 +514,7 @@
           <a:p>
             <a:r>
               <a:rPr lang="en-US" dirty="0"/>
-              <a:t>Briefanfang vorlesen, die Klasse liest mit. Impulsfrage stellen, zwei, drei Vermutungen sammeln. Dann die These an die Tafel: „Kafkas ‚Furcht‘ gründet auf Kommunikationsproblemen.“ Überleitung zum Diktat: „Bevor wir das prüfen, brauchen wir den Hintergrund – den schreibt ihr jetzt mit.“</a:t>
+              <a:t>Briefanfang vorlesen, die Klasse liest mit. Dann weiter zur Impulsfrage.</a:t>
             </a:r>
             <a:endParaRPr lang="en-US" dirty="0"/>
           </a:p>
@@ -600,7 +602,7 @@
           <a:p>
             <a:r>
               <a:rPr lang="en-US" dirty="0"/>
-              <a:t>Optional, frühestens nach 5 Minuten Schreibzeit zeigen. Nur Einleitung und erster Satz zu A – den Rest schreiben die Schülerinnen und Schüler selbst.</a:t>
+              <a:t>Erst fragen: „Bestätigen A und C die These?“ Diese Folie nur zeigen, wenn die Gegenstimme nicht von selbst kommt. Ergebnis: Die These trägt, braucht aber eine Ergänzung (Machtgefälle).</a:t>
             </a:r>
             <a:endParaRPr lang="en-US" dirty="0"/>
           </a:p>
@@ -688,7 +690,7 @@
           <a:p>
             <a:r>
               <a:rPr lang="en-US" dirty="0"/>
-              <a:t>Ein, zwei Einleitungen vorlesen lassen, dann Ausblick auf die Übungsklausur (Tischregeln, S. 5).</a:t>
+              <a:t>Timer 15 Minuten. Wer nach 5 Minuten keinen Anfang hat: nächste Folie (Musteranfang). Wer nicht fertig wird, schreibt zu Beginn der nächsten Stunde weiter – keine Hausaufgabe.</a:t>
             </a:r>
             <a:endParaRPr lang="en-US" dirty="0"/>
           </a:p>
@@ -712,6 +714,182 @@
             <a:fld id="{F7021451-1387-4CA6-816F-3879F97B5CBC}" type="slidenum">
               <a:rPr lang="en-US"/>
               <a:t>11</a:t>
+            </a:fld>
+            <a:endParaRPr lang="en-US"/>
+          </a:p>
+        </p:txBody>
+      </p:sp>
+    </p:spTree>
+    <p:extLst>
+      <p:ext uri="{BB962C8B-B14F-4D97-AF65-F5344CB8AC3E}">
+        <p14:creationId xmlns:p14="http://schemas.microsoft.com/office/powerpoint/2010/main" val="1024086991"/>
+      </p:ext>
+    </p:extLst>
+  </p:cSld>
+  <p:clrMapOvr>
+    <a:masterClrMapping/>
+  </p:clrMapOvr>
+</p:notes>
+</file>
+
+<file path=ppt/notesSlides/notesSlide12.xml><?xml version="1.0" encoding="utf-8"?>
+<p:notes xmlns:a="http://schemas.openxmlformats.org/drawingml/2006/main" xmlns:r="http://schemas.openxmlformats.org/officeDocument/2006/relationships" xmlns:p="http://schemas.openxmlformats.org/presentationml/2006/main">
+  <p:cSld>
+    <p:spTree>
+      <p:nvGrpSpPr>
+        <p:cNvPr id="1" name=""/>
+        <p:cNvGrpSpPr/>
+        <p:nvPr/>
+      </p:nvGrpSpPr>
+      <p:grpSpPr>
+        <a:xfrm>
+          <a:off x="0" y="0"/>
+          <a:ext cx="0" cy="0"/>
+          <a:chOff x="0" y="0"/>
+          <a:chExt cx="0" cy="0"/>
+        </a:xfrm>
+      </p:grpSpPr>
+      <p:sp>
+        <p:nvSpPr>
+          <p:cNvPr id="2" name="Slide Image Placeholder 1"/>
+          <p:cNvSpPr>
+            <a:spLocks noGrp="1" noRot="1" noChangeAspect="1"/>
+          </p:cNvSpPr>
+          <p:nvPr>
+            <p:ph type="sldImg"/>
+          </p:nvPr>
+        </p:nvSpPr>
+        <p:spPr/>
+      </p:sp>
+      <p:sp>
+        <p:nvSpPr>
+          <p:cNvPr id="3" name="Notes Placeholder 2"/>
+          <p:cNvSpPr>
+            <a:spLocks noGrp="1"/>
+          </p:cNvSpPr>
+          <p:nvPr>
+            <p:ph type="body" idx="1"/>
+          </p:nvPr>
+        </p:nvSpPr>
+        <p:spPr/>
+        <p:txBody>
+          <a:bodyPr/>
+          <a:lstStyle/>
+          <a:p>
+            <a:r>
+              <a:rPr lang="en-US" dirty="0"/>
+              <a:t>Optional, frühestens nach 5 Minuten Schreibzeit zeigen. Nur Einleitung und erster Satz zu A – den Rest schreiben die Schülerinnen und Schüler selbst.</a:t>
+            </a:r>
+            <a:endParaRPr lang="en-US" dirty="0"/>
+          </a:p>
+        </p:txBody>
+      </p:sp>
+      <p:sp>
+        <p:nvSpPr>
+          <p:cNvPr id="4" name="Slide Number Placeholder 3"/>
+          <p:cNvSpPr>
+            <a:spLocks noGrp="1"/>
+          </p:cNvSpPr>
+          <p:nvPr>
+            <p:ph type="sldNum" sz="quarter" idx="10"/>
+          </p:nvPr>
+        </p:nvSpPr>
+        <p:spPr/>
+        <p:txBody>
+          <a:bodyPr/>
+          <a:lstStyle/>
+          <a:p>
+            <a:fld id="{F7021451-1387-4CA6-816F-3879F97B5CBC}" type="slidenum">
+              <a:rPr lang="en-US"/>
+              <a:t>12</a:t>
+            </a:fld>
+            <a:endParaRPr lang="en-US"/>
+          </a:p>
+        </p:txBody>
+      </p:sp>
+    </p:spTree>
+    <p:extLst>
+      <p:ext uri="{BB962C8B-B14F-4D97-AF65-F5344CB8AC3E}">
+        <p14:creationId xmlns:p14="http://schemas.microsoft.com/office/powerpoint/2010/main" val="1024086991"/>
+      </p:ext>
+    </p:extLst>
+  </p:cSld>
+  <p:clrMapOvr>
+    <a:masterClrMapping/>
+  </p:clrMapOvr>
+</p:notes>
+</file>
+
+<file path=ppt/notesSlides/notesSlide13.xml><?xml version="1.0" encoding="utf-8"?>
+<p:notes xmlns:a="http://schemas.openxmlformats.org/drawingml/2006/main" xmlns:r="http://schemas.openxmlformats.org/officeDocument/2006/relationships" xmlns:p="http://schemas.openxmlformats.org/presentationml/2006/main">
+  <p:cSld>
+    <p:spTree>
+      <p:nvGrpSpPr>
+        <p:cNvPr id="1" name=""/>
+        <p:cNvGrpSpPr/>
+        <p:nvPr/>
+      </p:nvGrpSpPr>
+      <p:grpSpPr>
+        <a:xfrm>
+          <a:off x="0" y="0"/>
+          <a:ext cx="0" cy="0"/>
+          <a:chOff x="0" y="0"/>
+          <a:chExt cx="0" cy="0"/>
+        </a:xfrm>
+      </p:grpSpPr>
+      <p:sp>
+        <p:nvSpPr>
+          <p:cNvPr id="2" name="Slide Image Placeholder 1"/>
+          <p:cNvSpPr>
+            <a:spLocks noGrp="1" noRot="1" noChangeAspect="1"/>
+          </p:cNvSpPr>
+          <p:nvPr>
+            <p:ph type="sldImg"/>
+          </p:nvPr>
+        </p:nvSpPr>
+        <p:spPr/>
+      </p:sp>
+      <p:sp>
+        <p:nvSpPr>
+          <p:cNvPr id="3" name="Notes Placeholder 2"/>
+          <p:cNvSpPr>
+            <a:spLocks noGrp="1"/>
+          </p:cNvSpPr>
+          <p:nvPr>
+            <p:ph type="body" idx="1"/>
+          </p:nvPr>
+        </p:nvSpPr>
+        <p:spPr/>
+        <p:txBody>
+          <a:bodyPr/>
+          <a:lstStyle/>
+          <a:p>
+            <a:r>
+              <a:rPr lang="en-US" dirty="0"/>
+              <a:t>Ein, zwei Einleitungen vorlesen lassen, dann Ausblick auf die Übungsklausur (Tischregeln, S. 5).</a:t>
+            </a:r>
+            <a:endParaRPr lang="en-US" dirty="0"/>
+          </a:p>
+        </p:txBody>
+      </p:sp>
+      <p:sp>
+        <p:nvSpPr>
+          <p:cNvPr id="4" name="Slide Number Placeholder 3"/>
+          <p:cNvSpPr>
+            <a:spLocks noGrp="1"/>
+          </p:cNvSpPr>
+          <p:nvPr>
+            <p:ph type="sldNum" sz="quarter" idx="10"/>
+          </p:nvPr>
+        </p:nvSpPr>
+        <p:spPr/>
+        <p:txBody>
+          <a:bodyPr/>
+          <a:lstStyle/>
+          <a:p>
+            <a:fld id="{F7021451-1387-4CA6-816F-3879F97B5CBC}" type="slidenum">
+              <a:rPr lang="en-US"/>
+              <a:t>13</a:t>
             </a:fld>
             <a:endParaRPr lang="en-US"/>
           </a:p>
@@ -776,7 +954,7 @@
           <a:p>
             <a:r>
               <a:rPr lang="en-US" dirty="0"/>
-              <a:t>Text stehen lassen, bis alle verglichen haben. Keine Besprechung – nur Selbstkontrolle.</a:t>
+              <a:t>Zwei, drei Vermutungen sammeln. Dann die These an die Tafel: „Kafkas ‚Furcht‘ gründet auf Kommunikationsproblemen.“ Überleitung: „Bevor wir das prüfen, brauchen wir den Hintergrund – den schreibt ihr jetzt mit.“</a:t>
             </a:r>
             <a:endParaRPr lang="en-US" dirty="0"/>
           </a:p>
@@ -864,7 +1042,7 @@
           <a:p>
             <a:r>
               <a:rPr lang="en-US" dirty="0"/>
-              <a:t>Text stehen lassen, bis alle verglichen haben. Keine Besprechung – nur Selbstkontrolle.</a:t>
+              <a:t>Diese Folie steht während des Diktats. Diktieren nach der Vorlesefassung. Danach weiter zur Lösungsfolie.</a:t>
             </a:r>
             <a:endParaRPr lang="en-US" dirty="0"/>
           </a:p>
@@ -952,7 +1130,7 @@
           <a:p>
             <a:r>
               <a:rPr lang="en-US" dirty="0"/>
-              <a:t>Kurz zeigen. Danach den Fahrplan an die Tafel und das Arbeitsblatt austeilen.</a:t>
+              <a:t>Text stehen lassen, bis alle verglichen haben. Keine Besprechung – nur Selbstkontrolle.</a:t>
             </a:r>
             <a:endParaRPr lang="en-US" dirty="0"/>
           </a:p>
@@ -1040,7 +1218,7 @@
           <a:p>
             <a:r>
               <a:rPr lang="en-US" dirty="0"/>
-              <a:t>Erst 3 Minuten still lesen lassen. Dann im Gespräch Zeile für Zeile die Matrix entwickeln (Impulse im Tafelscript). Stellen am Whiteboard markieren, über die gerade gesprochen wird.</a:t>
+              <a:t>Text stehen lassen, bis alle verglichen haben. Keine Besprechung – nur Selbstkontrolle.</a:t>
             </a:r>
             <a:endParaRPr lang="en-US" dirty="0"/>
           </a:p>
@@ -1128,7 +1306,7 @@
           <a:p>
             <a:r>
               <a:rPr lang="en-US" dirty="0"/>
-              <a:t>Timer 13 Minuten. Herumgehen, zwei gute Zeilen für das Zusammentragen vormerken.</a:t>
+              <a:t>Kurz zeigen. Danach den Fahrplan an die Tafel und das Arbeitsblatt austeilen.</a:t>
             </a:r>
             <a:endParaRPr lang="en-US" dirty="0"/>
           </a:p>
@@ -1216,7 +1394,7 @@
           <a:p>
             <a:r>
               <a:rPr lang="en-US" dirty="0"/>
-              <a:t>Beim Zusammentragen stehen lassen, damit alle die genannten Zeilen finden. Matrix C an der Tafel ergänzen.</a:t>
+              <a:t>Erst 3 Minuten still lesen lassen. Dann im Gespräch Zeile für Zeile die Matrix entwickeln (Impulse im Tafelscript). Stellen am Whiteboard markieren, über die gerade gesprochen wird.</a:t>
             </a:r>
             <a:endParaRPr lang="en-US" dirty="0"/>
           </a:p>
@@ -1304,7 +1482,7 @@
           <a:p>
             <a:r>
               <a:rPr lang="en-US" dirty="0"/>
-              <a:t>Erst fragen: „Bestätigen A und C die These?“ Diese Folie nur zeigen, wenn die Gegenstimme nicht von selbst kommt. Ergebnis: Die These trägt, braucht aber eine Ergänzung (Machtgefälle).</a:t>
+              <a:t>Timer 13 Minuten. Herumgehen, zwei gute Zeilen für das Zusammentragen vormerken.</a:t>
             </a:r>
             <a:endParaRPr lang="en-US" dirty="0"/>
           </a:p>
@@ -1392,7 +1570,7 @@
           <a:p>
             <a:r>
               <a:rPr lang="en-US" dirty="0"/>
-              <a:t>Timer 15 Minuten. Wer nach 5 Minuten keinen Anfang hat: nächste Folie (Musteranfang). Wer nicht fertig wird, schreibt zu Beginn der nächsten Stunde weiter – keine Hausaufgabe.</a:t>
+              <a:t>Beim Zusammentragen stehen lassen, damit alle die genannten Zeilen finden. Matrix C an der Tafel ergänzen.</a:t>
             </a:r>
             <a:endParaRPr lang="en-US" dirty="0"/>
           </a:p>
@@ -1747,7 +1925,7 @@
     <p:bg>
       <p:bgPr>
         <a:solidFill>
-          <a:srgbClr val="1E2761"/>
+          <a:srgbClr val="FFFFFF"/>
         </a:solidFill>
       </p:bgPr>
     </p:bg>
@@ -1773,14 +1951,14 @@
         </p:nvSpPr>
         <p:spPr>
           <a:xfrm>
-            <a:off x="9692640" y="-1463040"/>
-            <a:ext cx="4206240" cy="4206240"/>
-          </a:xfrm>
-          <a:prstGeom prst="ellipse">
+            <a:off x="0" y="0"/>
+            <a:ext cx="12191695" cy="960120"/>
+          </a:xfrm>
+          <a:prstGeom prst="roundRect">
             <a:avLst/>
           </a:prstGeom>
           <a:solidFill>
-            <a:srgbClr val="24306E"/>
+            <a:srgbClr val="1E2761"/>
           </a:solidFill>
           <a:ln/>
         </p:spPr>
@@ -1793,8 +1971,8 @@
         </p:nvSpPr>
         <p:spPr>
           <a:xfrm>
-            <a:off x="822960" y="731520"/>
-            <a:ext cx="9144000" cy="365760"/>
+            <a:off x="457200" y="109728"/>
+            <a:ext cx="8686800" cy="274320"/>
           </a:xfrm>
           <a:prstGeom prst="rect">
             <a:avLst/>
@@ -1810,7 +1988,7 @@
               <a:buNone/>
             </a:pPr>
             <a:r>
-              <a:rPr lang="en-US" sz="1500" b="1" spc="200" kern="0" dirty="0">
+              <a:rPr lang="en-US" sz="1300" b="1" spc="200" kern="0" dirty="0">
                 <a:solidFill>
                   <a:srgbClr val="CADCFC"/>
                 </a:solidFill>
@@ -1820,7 +1998,7 @@
               </a:rPr>
               <a:t>FRANZ KAFKA · „BRIEF AN DEN VATER“ · 1919</a:t>
             </a:r>
-            <a:endParaRPr lang="en-US" sz="1500" dirty="0"/>
+            <a:endParaRPr lang="en-US" sz="1300" dirty="0"/>
           </a:p>
         </p:txBody>
       </p:sp>
@@ -1832,8 +2010,8 @@
         </p:nvSpPr>
         <p:spPr>
           <a:xfrm>
-            <a:off x="822960" y="1371600"/>
-            <a:ext cx="10424160" cy="2926080"/>
+            <a:off x="457200" y="384048"/>
+            <a:ext cx="9418320" cy="530352"/>
           </a:xfrm>
           <a:prstGeom prst="rect">
             <a:avLst/>
@@ -1846,67 +2024,90 @@
           <a:lstStyle/>
           <a:p>
             <a:pPr indent="0" marL="0">
+              <a:buNone/>
+            </a:pPr>
+            <a:r>
+              <a:rPr lang="en-US" sz="2700" b="1" dirty="0">
+                <a:solidFill>
+                  <a:srgbClr val="FFFFFF"/>
+                </a:solidFill>
+                <a:latin typeface="Cambria" pitchFamily="34" charset="0"/>
+                <a:ea typeface="Cambria" pitchFamily="34" charset="-122"/>
+                <a:cs typeface="Cambria" pitchFamily="34" charset="-120"/>
+              </a:rPr>
+              <a:t>Der Anfang des Briefs</a:t>
+            </a:r>
+            <a:endParaRPr lang="en-US" sz="2700" dirty="0"/>
+          </a:p>
+        </p:txBody>
+      </p:sp>
+      <p:sp>
+        <p:nvSpPr>
+          <p:cNvPr id="5" name="Text 3"/>
+          <p:cNvSpPr txBox="1"/>
+          <p:nvPr/>
+        </p:nvSpPr>
+        <p:spPr>
+          <a:xfrm>
+            <a:off x="640080" y="1280160"/>
+            <a:ext cx="10881360" cy="4937760"/>
+          </a:xfrm>
+          <a:prstGeom prst="rect">
+            <a:avLst/>
+          </a:prstGeom>
+          <a:noFill/>
+          <a:ln/>
+        </p:spPr>
+        <p:txBody>
+          <a:bodyPr wrap="square" lIns="0" tIns="0" rIns="0" bIns="0" rtlCol="0" anchor="t"/>
+          <a:lstStyle/>
+          <a:p>
+            <a:pPr indent="0" marL="0">
+              <a:lnSpc>
+                <a:spcPct val="125000"/>
+              </a:lnSpc>
               <a:spcAft>
                 <a:spcPts val="800"/>
               </a:spcAft>
               <a:buNone/>
             </a:pPr>
             <a:r>
-              <a:rPr lang="en-US" sz="3000" i="1" dirty="0">
-                <a:solidFill>
-                  <a:srgbClr val="FFFFFF"/>
+              <a:rPr lang="en-US" sz="2500" dirty="0">
+                <a:solidFill>
+                  <a:srgbClr val="1E2761"/>
                 </a:solidFill>
                 <a:latin typeface="Cambria" pitchFamily="34" charset="0"/>
                 <a:ea typeface="Cambria" pitchFamily="34" charset="-122"/>
                 <a:cs typeface="Cambria" pitchFamily="34" charset="-120"/>
               </a:rPr>
-              <a:t>„Liebster Vater,</a:t>
-            </a:r>
-            <a:endParaRPr lang="en-US" sz="3000" dirty="0"/>
-          </a:p>
-          <a:p>
-            <a:pPr indent="0" marL="0">
+              <a:t>Liebster Vater,</a:t>
+            </a:r>
+            <a:endParaRPr lang="en-US" sz="2500" dirty="0"/>
+          </a:p>
+          <a:p>
+            <a:pPr indent="0" marL="0">
+              <a:lnSpc>
+                <a:spcPct val="125000"/>
+              </a:lnSpc>
               <a:spcAft>
                 <a:spcPts val="800"/>
               </a:spcAft>
               <a:buNone/>
             </a:pPr>
             <a:r>
-              <a:rPr lang="en-US" sz="3000" i="1" dirty="0">
-                <a:solidFill>
-                  <a:srgbClr val="FFFFFF"/>
+              <a:rPr lang="en-US" sz="2500" dirty="0">
+                <a:solidFill>
+                  <a:srgbClr val="1E2761"/>
                 </a:solidFill>
                 <a:latin typeface="Cambria" pitchFamily="34" charset="0"/>
                 <a:ea typeface="Cambria" pitchFamily="34" charset="-122"/>
                 <a:cs typeface="Cambria" pitchFamily="34" charset="-120"/>
               </a:rPr>
-              <a:t>Du hast mich letzthin einmal gefragt, warum ich behaupte, ich hätte Furcht vor Dir. Ich wußte Dir, wie gewöhnlich, nichts zu antworten, zum Teil eben aus der Furcht, die ich vor Dir habe …“</a:t>
-            </a:r>
-            <a:endParaRPr lang="en-US" sz="3000" dirty="0"/>
-          </a:p>
-        </p:txBody>
-      </p:sp>
-      <p:sp>
-        <p:nvSpPr>
-          <p:cNvPr id="5" name="Shape 3"/>
-          <p:cNvSpPr/>
-          <p:nvPr/>
-        </p:nvSpPr>
-        <p:spPr>
-          <a:xfrm>
-            <a:off x="822960" y="4800600"/>
-            <a:ext cx="10515600" cy="1005840"/>
-          </a:xfrm>
-          <a:prstGeom prst="roundRect">
-            <a:avLst>
-              <a:gd name="adj" fmla="val 7273"/>
-            </a:avLst>
-          </a:prstGeom>
-          <a:solidFill>
-            <a:srgbClr val="D9534F"/>
-          </a:solidFill>
-          <a:ln/>
-        </p:spPr>
+              <a:t>Du hast mich letzthin einmal gefragt, warum ich behaupte, ich hätte Furcht vor Dir. Ich wußte Dir, wie gewöhnlich, nichts zu antworten, zum Teil eben aus der Furcht, die ich vor Dir habe, zum Teil deshalb, weil zur Begründung dieser Furcht zu viele Einzelheiten gehören, als daß ich sie im Reden halbwegs zusammenhalten könnte. Und wenn ich hier versuche, Dir schriftlich zu antworten, so wird es doch nur sehr unvollständig sein, weil auch im Schreiben die Furcht und ihre Folgen mich Dir gegenüber behindern und weil die Größe des Stoffs über mein Gedächtnis und meinen Verstand weit hinausgeht.</a:t>
+            </a:r>
+            <a:endParaRPr lang="en-US" sz="2500" dirty="0"/>
+          </a:p>
+        </p:txBody>
       </p:sp>
       <p:sp>
         <p:nvSpPr>
@@ -1916,34 +2117,34 @@
         </p:nvSpPr>
         <p:spPr>
           <a:xfrm>
-            <a:off x="1097280" y="4800600"/>
-            <a:ext cx="10058400" cy="1005840"/>
-          </a:xfrm>
-          <a:prstGeom prst="rect">
-            <a:avLst/>
-          </a:prstGeom>
-          <a:noFill/>
-          <a:ln/>
-        </p:spPr>
-        <p:txBody>
-          <a:bodyPr wrap="square" lIns="0" tIns="0" rIns="0" bIns="0" rtlCol="0" anchor="ctr"/>
-          <a:lstStyle/>
-          <a:p>
-            <a:pPr indent="0" marL="0">
-              <a:buNone/>
-            </a:pPr>
-            <a:r>
-              <a:rPr lang="en-US" sz="2600" b="1" dirty="0">
-                <a:solidFill>
-                  <a:srgbClr val="FFFFFF"/>
-                </a:solidFill>
-                <a:latin typeface="Cambria" pitchFamily="34" charset="0"/>
-                <a:ea typeface="Cambria" pitchFamily="34" charset="-122"/>
-                <a:cs typeface="Cambria" pitchFamily="34" charset="-120"/>
-              </a:rPr>
-              <a:t>Wovor hat ein 36-Jähriger Furcht – und warum schreibt er, statt zu reden?</a:t>
-            </a:r>
-            <a:endParaRPr lang="en-US" sz="2600" dirty="0"/>
+            <a:off x="10241280" y="6263640"/>
+            <a:ext cx="1371600" cy="320040"/>
+          </a:xfrm>
+          <a:prstGeom prst="rect">
+            <a:avLst/>
+          </a:prstGeom>
+          <a:noFill/>
+          <a:ln/>
+        </p:spPr>
+        <p:txBody>
+          <a:bodyPr wrap="square" lIns="0" tIns="0" rIns="0" bIns="0" rtlCol="0" anchor="t"/>
+          <a:lstStyle/>
+          <a:p>
+            <a:pPr algn="r" indent="0" marL="0">
+              <a:buNone/>
+            </a:pPr>
+            <a:r>
+              <a:rPr lang="en-US" sz="1400" dirty="0">
+                <a:solidFill>
+                  <a:srgbClr val="5B6B8C"/>
+                </a:solidFill>
+                <a:latin typeface="Calibri" pitchFamily="34" charset="0"/>
+                <a:ea typeface="Calibri" pitchFamily="34" charset="-122"/>
+                <a:cs typeface="Calibri" pitchFamily="34" charset="-120"/>
+              </a:rPr>
+              <a:t>S. 2</a:t>
+            </a:r>
+            <a:endParaRPr lang="en-US" sz="1400" dirty="0"/>
           </a:p>
         </p:txBody>
       </p:sp>
@@ -2032,7 +2233,7 @@
                 <a:ea typeface="Calibri" pitchFamily="34" charset="-122"/>
                 <a:cs typeface="Calibri" pitchFamily="34" charset="-120"/>
               </a:rPr>
-              <a:t>HILFE ZUM START</a:t>
+              <a:t>THESE PRÜFEN</a:t>
             </a:r>
             <a:endParaRPr lang="en-US" sz="1300" dirty="0"/>
           </a:p>
@@ -2071,7 +2272,7 @@
                 <a:ea typeface="Cambria" pitchFamily="34" charset="-122"/>
                 <a:cs typeface="Cambria" pitchFamily="34" charset="-120"/>
               </a:rPr>
-              <a:t>So könnte dein Text beginnen</a:t>
+              <a:t>Stimmt die These?</a:t>
             </a:r>
             <a:endParaRPr lang="en-US" sz="2700" dirty="0"/>
           </a:p>
@@ -2086,15 +2287,15 @@
         <p:spPr>
           <a:xfrm>
             <a:off x="548640" y="1280160"/>
-            <a:ext cx="11064240" cy="5120640"/>
+            <a:ext cx="11064240" cy="914400"/>
           </a:xfrm>
           <a:prstGeom prst="roundRect">
             <a:avLst>
-              <a:gd name="adj" fmla="val 1429"/>
+              <a:gd name="adj" fmla="val 8000"/>
             </a:avLst>
           </a:prstGeom>
           <a:solidFill>
-            <a:srgbClr val="F4F7FD"/>
+            <a:srgbClr val="EAF0FA"/>
           </a:solidFill>
           <a:ln/>
         </p:spPr>
@@ -2107,27 +2308,24 @@
         </p:nvSpPr>
         <p:spPr>
           <a:xfrm>
-            <a:off x="868680" y="1463040"/>
-            <a:ext cx="10424160" cy="4754880"/>
-          </a:xfrm>
-          <a:prstGeom prst="rect">
-            <a:avLst/>
-          </a:prstGeom>
-          <a:noFill/>
-          <a:ln/>
-        </p:spPr>
-        <p:txBody>
-          <a:bodyPr wrap="square" lIns="0" tIns="0" rIns="0" bIns="0" rtlCol="0" anchor="t"/>
-          <a:lstStyle/>
-          <a:p>
-            <a:pPr indent="0" marL="0">
-              <a:lnSpc>
-                <a:spcPct val="120000"/>
-              </a:lnSpc>
-              <a:buNone/>
-            </a:pPr>
-            <a:r>
-              <a:rPr lang="en-US" sz="2100" dirty="0">
+            <a:off x="822960" y="1280160"/>
+            <a:ext cx="10607040" cy="914400"/>
+          </a:xfrm>
+          <a:prstGeom prst="rect">
+            <a:avLst/>
+          </a:prstGeom>
+          <a:noFill/>
+          <a:ln/>
+        </p:spPr>
+        <p:txBody>
+          <a:bodyPr wrap="square" lIns="0" tIns="0" rIns="0" bIns="0" rtlCol="0" anchor="ctr"/>
+          <a:lstStyle/>
+          <a:p>
+            <a:pPr indent="0" marL="0">
+              <a:buNone/>
+            </a:pPr>
+            <a:r>
+              <a:rPr lang="en-US" sz="2300" b="1" dirty="0">
                 <a:solidFill>
                   <a:srgbClr val="1E2761"/>
                 </a:solidFill>
@@ -2135,19 +2333,99 @@
                 <a:ea typeface="Cambria" pitchFamily="34" charset="-122"/>
                 <a:cs typeface="Cambria" pitchFamily="34" charset="-120"/>
               </a:rPr>
-              <a:t>In seinem „Brief an den Vater“ (1919) versucht Franz Kafka, seinem Vater zu erklären, warum er Furcht vor ihm hat. In den beiden Abschnitten beschreibt er, wie der Vater mit ihm gesprochen hat: durch Redeverbote (A) und durch Ironie (C).</a:t>
-            </a:r>
-            <a:endParaRPr lang="en-US" sz="2100" dirty="0"/>
-          </a:p>
-          <a:p>
-            <a:pPr indent="0" marL="0">
-              <a:lnSpc>
-                <a:spcPct val="120000"/>
-              </a:lnSpc>
-              <a:buNone/>
-            </a:pPr>
-            <a:r>
-              <a:rPr lang="en-US" sz="1000" dirty="0">
+              <a:t>These: Kafkas „Furcht“ gründet auf Kommunikationsproblemen.</a:t>
+            </a:r>
+            <a:endParaRPr lang="en-US" sz="2300" dirty="0"/>
+          </a:p>
+        </p:txBody>
+      </p:sp>
+      <p:sp>
+        <p:nvSpPr>
+          <p:cNvPr id="7" name="Text 5"/>
+          <p:cNvSpPr txBox="1"/>
+          <p:nvPr/>
+        </p:nvSpPr>
+        <p:spPr>
+          <a:xfrm>
+            <a:off x="548640" y="2514600"/>
+            <a:ext cx="10972800" cy="411480"/>
+          </a:xfrm>
+          <a:prstGeom prst="rect">
+            <a:avLst/>
+          </a:prstGeom>
+          <a:noFill/>
+          <a:ln/>
+        </p:spPr>
+        <p:txBody>
+          <a:bodyPr wrap="square" lIns="0" tIns="0" rIns="0" bIns="0" rtlCol="0" anchor="t"/>
+          <a:lstStyle/>
+          <a:p>
+            <a:pPr indent="0" marL="0">
+              <a:buNone/>
+            </a:pPr>
+            <a:r>
+              <a:rPr lang="en-US" sz="2000" b="1" dirty="0">
+                <a:solidFill>
+                  <a:srgbClr val="5B6B8C"/>
+                </a:solidFill>
+                <a:latin typeface="Calibri" pitchFamily="34" charset="0"/>
+                <a:ea typeface="Calibri" pitchFamily="34" charset="-122"/>
+                <a:cs typeface="Calibri" pitchFamily="34" charset="-120"/>
+              </a:rPr>
+              <a:t>Kafka schreibt aber auch:</a:t>
+            </a:r>
+            <a:endParaRPr lang="en-US" sz="2000" dirty="0"/>
+          </a:p>
+        </p:txBody>
+      </p:sp>
+      <p:sp>
+        <p:nvSpPr>
+          <p:cNvPr id="8" name="Shape 6"/>
+          <p:cNvSpPr/>
+          <p:nvPr/>
+        </p:nvSpPr>
+        <p:spPr>
+          <a:xfrm>
+            <a:off x="548640" y="3017520"/>
+            <a:ext cx="11064240" cy="1417320"/>
+          </a:xfrm>
+          <a:prstGeom prst="roundRect">
+            <a:avLst>
+              <a:gd name="adj" fmla="val 5161"/>
+            </a:avLst>
+          </a:prstGeom>
+          <a:solidFill>
+            <a:srgbClr val="FBECEB"/>
+          </a:solidFill>
+          <a:ln/>
+        </p:spPr>
+      </p:sp>
+      <p:sp>
+        <p:nvSpPr>
+          <p:cNvPr id="9" name="Text 7"/>
+          <p:cNvSpPr txBox="1"/>
+          <p:nvPr/>
+        </p:nvSpPr>
+        <p:spPr>
+          <a:xfrm>
+            <a:off x="822960" y="3127248"/>
+            <a:ext cx="9418320" cy="1188720"/>
+          </a:xfrm>
+          <a:prstGeom prst="rect">
+            <a:avLst/>
+          </a:prstGeom>
+          <a:noFill/>
+          <a:ln/>
+        </p:spPr>
+        <p:txBody>
+          <a:bodyPr wrap="square" lIns="0" tIns="0" rIns="0" bIns="0" rtlCol="0" anchor="ctr"/>
+          <a:lstStyle/>
+          <a:p>
+            <a:pPr indent="0" marL="0">
+              <a:buNone/>
+            </a:pPr>
+            <a:r>
+              <a:rPr lang="en-US" sz="2100" i="1" dirty="0">
                 <a:solidFill>
                   <a:srgbClr val="1E2761"/>
                 </a:solidFill>
@@ -2155,19 +2433,99 @@
                 <a:ea typeface="Cambria" pitchFamily="34" charset="-122"/>
                 <a:cs typeface="Cambria" pitchFamily="34" charset="-120"/>
               </a:rPr>
-              <a:t> </a:t>
+              <a:t>„Wieder hüte ich mich zu behaupten, daß ich nur durch Dich so wurde; Du verstärktest nur, was war, aber Du verstärktest es sehr …“</a:t>
             </a:r>
             <a:endParaRPr lang="en-US" sz="2100" dirty="0"/>
           </a:p>
-          <a:p>
-            <a:pPr indent="0" marL="0">
-              <a:lnSpc>
-                <a:spcPct val="120000"/>
-              </a:lnSpc>
-              <a:buNone/>
-            </a:pPr>
-            <a:r>
-              <a:rPr lang="en-US" sz="2100" dirty="0">
+        </p:txBody>
+      </p:sp>
+      <p:sp>
+        <p:nvSpPr>
+          <p:cNvPr id="10" name="Text 8"/>
+          <p:cNvSpPr txBox="1"/>
+          <p:nvPr/>
+        </p:nvSpPr>
+        <p:spPr>
+          <a:xfrm>
+            <a:off x="10241280" y="3127248"/>
+            <a:ext cx="1188720" cy="1188720"/>
+          </a:xfrm>
+          <a:prstGeom prst="rect">
+            <a:avLst/>
+          </a:prstGeom>
+          <a:noFill/>
+          <a:ln/>
+        </p:spPr>
+        <p:txBody>
+          <a:bodyPr wrap="square" lIns="0" tIns="0" rIns="0" bIns="0" rtlCol="0" anchor="ctr"/>
+          <a:lstStyle/>
+          <a:p>
+            <a:pPr algn="r" indent="0" marL="0">
+              <a:buNone/>
+            </a:pPr>
+            <a:r>
+              <a:rPr lang="en-US" sz="1600" b="1" dirty="0">
+                <a:solidFill>
+                  <a:srgbClr val="D9534F"/>
+                </a:solidFill>
+                <a:latin typeface="Calibri" pitchFamily="34" charset="0"/>
+                <a:ea typeface="Calibri" pitchFamily="34" charset="-122"/>
+                <a:cs typeface="Calibri" pitchFamily="34" charset="-120"/>
+              </a:rPr>
+              <a:t>S. 6</a:t>
+            </a:r>
+            <a:endParaRPr lang="en-US" sz="1600" dirty="0"/>
+          </a:p>
+        </p:txBody>
+      </p:sp>
+      <p:sp>
+        <p:nvSpPr>
+          <p:cNvPr id="11" name="Shape 9"/>
+          <p:cNvSpPr/>
+          <p:nvPr/>
+        </p:nvSpPr>
+        <p:spPr>
+          <a:xfrm>
+            <a:off x="548640" y="4617720"/>
+            <a:ext cx="11064240" cy="1417320"/>
+          </a:xfrm>
+          <a:prstGeom prst="roundRect">
+            <a:avLst>
+              <a:gd name="adj" fmla="val 5161"/>
+            </a:avLst>
+          </a:prstGeom>
+          <a:solidFill>
+            <a:srgbClr val="FBECEB"/>
+          </a:solidFill>
+          <a:ln/>
+        </p:spPr>
+      </p:sp>
+      <p:sp>
+        <p:nvSpPr>
+          <p:cNvPr id="12" name="Text 10"/>
+          <p:cNvSpPr txBox="1"/>
+          <p:nvPr/>
+        </p:nvSpPr>
+        <p:spPr>
+          <a:xfrm>
+            <a:off x="822960" y="4727448"/>
+            <a:ext cx="9418320" cy="1188720"/>
+          </a:xfrm>
+          <a:prstGeom prst="rect">
+            <a:avLst/>
+          </a:prstGeom>
+          <a:noFill/>
+          <a:ln/>
+        </p:spPr>
+        <p:txBody>
+          <a:bodyPr wrap="square" lIns="0" tIns="0" rIns="0" bIns="0" rtlCol="0" anchor="ctr"/>
+          <a:lstStyle/>
+          <a:p>
+            <a:pPr indent="0" marL="0">
+              <a:buNone/>
+            </a:pPr>
+            <a:r>
+              <a:rPr lang="en-US" sz="2100" i="1" dirty="0">
                 <a:solidFill>
                   <a:srgbClr val="1E2761"/>
                 </a:solidFill>
@@ -2175,9 +2533,48 @@
                 <a:ea typeface="Cambria" pitchFamily="34" charset="-122"/>
                 <a:cs typeface="Cambria" pitchFamily="34" charset="-120"/>
               </a:rPr>
-              <a:t>Indem der Vater jede Widerrede verbietet, sendet er kaum eine Sachinformation, sondern einen Appell – „Schweig!“ – und vor allem eine Beziehungsbotschaft: Er allein bestimmt. Seine Drohung „kein Wort der Widerrede!“ (A, Z. 5) unterstreicht er nonverbal mit der „erhobene[n] Hand“ (Z. 5). …</a:t>
+              <a:t>„… während es nur selbstverständliche Folge Deiner Stärke und meiner Schwäche war.“</a:t>
             </a:r>
             <a:endParaRPr lang="en-US" sz="2100" dirty="0"/>
+          </a:p>
+        </p:txBody>
+      </p:sp>
+      <p:sp>
+        <p:nvSpPr>
+          <p:cNvPr id="13" name="Text 11"/>
+          <p:cNvSpPr txBox="1"/>
+          <p:nvPr/>
+        </p:nvSpPr>
+        <p:spPr>
+          <a:xfrm>
+            <a:off x="10241280" y="4727448"/>
+            <a:ext cx="1188720" cy="1188720"/>
+          </a:xfrm>
+          <a:prstGeom prst="rect">
+            <a:avLst/>
+          </a:prstGeom>
+          <a:noFill/>
+          <a:ln/>
+        </p:spPr>
+        <p:txBody>
+          <a:bodyPr wrap="square" lIns="0" tIns="0" rIns="0" bIns="0" rtlCol="0" anchor="ctr"/>
+          <a:lstStyle/>
+          <a:p>
+            <a:pPr algn="r" indent="0" marL="0">
+              <a:buNone/>
+            </a:pPr>
+            <a:r>
+              <a:rPr lang="en-US" sz="1600" b="1" dirty="0">
+                <a:solidFill>
+                  <a:srgbClr val="D9534F"/>
+                </a:solidFill>
+                <a:latin typeface="Calibri" pitchFamily="34" charset="0"/>
+                <a:ea typeface="Calibri" pitchFamily="34" charset="-122"/>
+                <a:cs typeface="Calibri" pitchFamily="34" charset="-120"/>
+              </a:rPr>
+              <a:t>A, Z. 16</a:t>
+            </a:r>
+            <a:endParaRPr lang="en-US" sz="1600" dirty="0"/>
           </a:p>
         </p:txBody>
       </p:sp>
@@ -2192,6 +2589,873 @@
 <file path=ppt/slides/slide11.xml><?xml version="1.0" encoding="utf-8"?>
 <p:sld xmlns:a="http://schemas.openxmlformats.org/drawingml/2006/main" xmlns:r="http://schemas.openxmlformats.org/officeDocument/2006/relationships" xmlns:p="http://schemas.openxmlformats.org/presentationml/2006/main">
   <p:cSld name="Slide 11">
+    <p:bg>
+      <p:bgPr>
+        <a:solidFill>
+          <a:srgbClr val="FFFFFF"/>
+        </a:solidFill>
+      </p:bgPr>
+    </p:bg>
+    <p:spTree>
+      <p:nvGrpSpPr>
+        <p:cNvPr id="1" name=""/>
+        <p:cNvGrpSpPr/>
+        <p:nvPr/>
+      </p:nvGrpSpPr>
+      <p:grpSpPr>
+        <a:xfrm>
+          <a:off x="0" y="0"/>
+          <a:ext cx="0" cy="0"/>
+          <a:chOff x="0" y="0"/>
+          <a:chExt cx="0" cy="0"/>
+        </a:xfrm>
+      </p:grpSpPr>
+      <p:sp>
+        <p:nvSpPr>
+          <p:cNvPr id="2" name="Shape 0"/>
+          <p:cNvSpPr/>
+          <p:nvPr/>
+        </p:nvSpPr>
+        <p:spPr>
+          <a:xfrm>
+            <a:off x="0" y="0"/>
+            <a:ext cx="12191695" cy="960120"/>
+          </a:xfrm>
+          <a:prstGeom prst="roundRect">
+            <a:avLst/>
+          </a:prstGeom>
+          <a:solidFill>
+            <a:srgbClr val="1E2761"/>
+          </a:solidFill>
+          <a:ln/>
+        </p:spPr>
+      </p:sp>
+      <p:sp>
+        <p:nvSpPr>
+          <p:cNvPr id="3" name="Text 1"/>
+          <p:cNvSpPr txBox="1"/>
+          <p:nvPr/>
+        </p:nvSpPr>
+        <p:spPr>
+          <a:xfrm>
+            <a:off x="457200" y="109728"/>
+            <a:ext cx="8686800" cy="274320"/>
+          </a:xfrm>
+          <a:prstGeom prst="rect">
+            <a:avLst/>
+          </a:prstGeom>
+          <a:noFill/>
+          <a:ln/>
+        </p:spPr>
+        <p:txBody>
+          <a:bodyPr wrap="square" lIns="0" tIns="0" rIns="0" bIns="0" rtlCol="0" anchor="t"/>
+          <a:lstStyle/>
+          <a:p>
+            <a:pPr indent="0" marL="0">
+              <a:buNone/>
+            </a:pPr>
+            <a:r>
+              <a:rPr lang="en-US" sz="1300" b="1" spc="200" kern="0" dirty="0">
+                <a:solidFill>
+                  <a:srgbClr val="CADCFC"/>
+                </a:solidFill>
+                <a:latin typeface="Calibri" pitchFamily="34" charset="0"/>
+                <a:ea typeface="Calibri" pitchFamily="34" charset="-122"/>
+                <a:cs typeface="Calibri" pitchFamily="34" charset="-120"/>
+              </a:rPr>
+              <a:t>AUFTRAG 2 · ALLEIN</a:t>
+            </a:r>
+            <a:endParaRPr lang="en-US" sz="1300" dirty="0"/>
+          </a:p>
+        </p:txBody>
+      </p:sp>
+      <p:sp>
+        <p:nvSpPr>
+          <p:cNvPr id="4" name="Text 2"/>
+          <p:cNvSpPr txBox="1"/>
+          <p:nvPr/>
+        </p:nvSpPr>
+        <p:spPr>
+          <a:xfrm>
+            <a:off x="457200" y="384048"/>
+            <a:ext cx="9418320" cy="530352"/>
+          </a:xfrm>
+          <a:prstGeom prst="rect">
+            <a:avLst/>
+          </a:prstGeom>
+          <a:noFill/>
+          <a:ln/>
+        </p:spPr>
+        <p:txBody>
+          <a:bodyPr wrap="square" lIns="0" tIns="0" rIns="0" bIns="0" rtlCol="0" anchor="t"/>
+          <a:lstStyle/>
+          <a:p>
+            <a:pPr indent="0" marL="0">
+              <a:buNone/>
+            </a:pPr>
+            <a:r>
+              <a:rPr lang="en-US" sz="2700" b="1" dirty="0">
+                <a:solidFill>
+                  <a:srgbClr val="FFFFFF"/>
+                </a:solidFill>
+                <a:latin typeface="Cambria" pitchFamily="34" charset="0"/>
+                <a:ea typeface="Cambria" pitchFamily="34" charset="-122"/>
+                <a:cs typeface="Cambria" pitchFamily="34" charset="-120"/>
+              </a:rPr>
+              <a:t>Vom Tafelbild zum Fließtext</a:t>
+            </a:r>
+            <a:endParaRPr lang="en-US" sz="2700" dirty="0"/>
+          </a:p>
+        </p:txBody>
+      </p:sp>
+      <p:sp>
+        <p:nvSpPr>
+          <p:cNvPr id="5" name="Shape 3"/>
+          <p:cNvSpPr/>
+          <p:nvPr/>
+        </p:nvSpPr>
+        <p:spPr>
+          <a:xfrm>
+            <a:off x="10058400" y="164592"/>
+            <a:ext cx="1737360" cy="640080"/>
+          </a:xfrm>
+          <a:prstGeom prst="roundRect">
+            <a:avLst>
+              <a:gd name="adj" fmla="val 17143"/>
+            </a:avLst>
+          </a:prstGeom>
+          <a:solidFill>
+            <a:srgbClr val="D9534F"/>
+          </a:solidFill>
+          <a:ln/>
+        </p:spPr>
+      </p:sp>
+      <p:sp>
+        <p:nvSpPr>
+          <p:cNvPr id="6" name="Text 4"/>
+          <p:cNvSpPr txBox="1"/>
+          <p:nvPr/>
+        </p:nvSpPr>
+        <p:spPr>
+          <a:xfrm>
+            <a:off x="10058400" y="164592"/>
+            <a:ext cx="1737360" cy="640080"/>
+          </a:xfrm>
+          <a:prstGeom prst="rect">
+            <a:avLst/>
+          </a:prstGeom>
+          <a:noFill/>
+          <a:ln/>
+        </p:spPr>
+        <p:txBody>
+          <a:bodyPr wrap="square" lIns="0" tIns="0" rIns="0" bIns="0" rtlCol="0" anchor="ctr"/>
+          <a:lstStyle/>
+          <a:p>
+            <a:pPr algn="ctr" indent="0" marL="0">
+              <a:buNone/>
+            </a:pPr>
+            <a:r>
+              <a:rPr lang="en-US" sz="2000" b="1" dirty="0">
+                <a:solidFill>
+                  <a:srgbClr val="FFFFFF"/>
+                </a:solidFill>
+                <a:latin typeface="Calibri" pitchFamily="34" charset="0"/>
+                <a:ea typeface="Calibri" pitchFamily="34" charset="-122"/>
+                <a:cs typeface="Calibri" pitchFamily="34" charset="-120"/>
+              </a:rPr>
+              <a:t>15 Min.</a:t>
+            </a:r>
+            <a:endParaRPr lang="en-US" sz="2000" dirty="0"/>
+          </a:p>
+        </p:txBody>
+      </p:sp>
+      <p:sp>
+        <p:nvSpPr>
+          <p:cNvPr id="7" name="Text 5"/>
+          <p:cNvSpPr txBox="1"/>
+          <p:nvPr/>
+        </p:nvSpPr>
+        <p:spPr>
+          <a:xfrm>
+            <a:off x="548640" y="1234440"/>
+            <a:ext cx="10972800" cy="685800"/>
+          </a:xfrm>
+          <a:prstGeom prst="rect">
+            <a:avLst/>
+          </a:prstGeom>
+          <a:noFill/>
+          <a:ln/>
+        </p:spPr>
+        <p:txBody>
+          <a:bodyPr wrap="square" lIns="0" tIns="0" rIns="0" bIns="0" rtlCol="0" anchor="t"/>
+          <a:lstStyle/>
+          <a:p>
+            <a:pPr indent="0" marL="0">
+              <a:buNone/>
+            </a:pPr>
+            <a:r>
+              <a:rPr lang="en-US" sz="2100" dirty="0">
+                <a:solidFill>
+                  <a:srgbClr val="1E2761"/>
+                </a:solidFill>
+                <a:latin typeface="Calibri" pitchFamily="34" charset="0"/>
+                <a:ea typeface="Calibri" pitchFamily="34" charset="-122"/>
+                <a:cs typeface="Calibri" pitchFamily="34" charset="-120"/>
+              </a:rPr>
+              <a:t>Schreibe deine Analyse von A und C als zusammenhängenden Text in deinen Hefter – so wie in der Klausur.</a:t>
+            </a:r>
+            <a:endParaRPr lang="en-US" sz="2100" dirty="0"/>
+          </a:p>
+        </p:txBody>
+      </p:sp>
+      <p:sp>
+        <p:nvSpPr>
+          <p:cNvPr id="8" name="Shape 6"/>
+          <p:cNvSpPr/>
+          <p:nvPr/>
+        </p:nvSpPr>
+        <p:spPr>
+          <a:xfrm>
+            <a:off x="548640" y="2194560"/>
+            <a:ext cx="2011680" cy="402336"/>
+          </a:xfrm>
+          <a:prstGeom prst="roundRect">
+            <a:avLst>
+              <a:gd name="adj" fmla="val 50000"/>
+            </a:avLst>
+          </a:prstGeom>
+          <a:solidFill>
+            <a:srgbClr val="1E2761"/>
+          </a:solidFill>
+          <a:ln/>
+        </p:spPr>
+      </p:sp>
+      <p:sp>
+        <p:nvSpPr>
+          <p:cNvPr id="9" name="Text 7"/>
+          <p:cNvSpPr txBox="1"/>
+          <p:nvPr/>
+        </p:nvSpPr>
+        <p:spPr>
+          <a:xfrm>
+            <a:off x="548640" y="2194560"/>
+            <a:ext cx="2011680" cy="402336"/>
+          </a:xfrm>
+          <a:prstGeom prst="rect">
+            <a:avLst/>
+          </a:prstGeom>
+          <a:noFill/>
+          <a:ln/>
+        </p:spPr>
+        <p:txBody>
+          <a:bodyPr wrap="square" lIns="0" tIns="0" rIns="0" bIns="0" rtlCol="0" anchor="ctr"/>
+          <a:lstStyle/>
+          <a:p>
+            <a:pPr algn="ctr" indent="0" marL="0">
+              <a:buNone/>
+            </a:pPr>
+            <a:r>
+              <a:rPr lang="en-US" sz="1600" b="1" dirty="0">
+                <a:solidFill>
+                  <a:srgbClr val="FFFFFF"/>
+                </a:solidFill>
+                <a:latin typeface="Calibri" pitchFamily="34" charset="0"/>
+                <a:ea typeface="Calibri" pitchFamily="34" charset="-122"/>
+                <a:cs typeface="Calibri" pitchFamily="34" charset="-120"/>
+              </a:rPr>
+              <a:t>Einleitung</a:t>
+            </a:r>
+            <a:endParaRPr lang="en-US" sz="1600" dirty="0"/>
+          </a:p>
+        </p:txBody>
+      </p:sp>
+      <p:sp>
+        <p:nvSpPr>
+          <p:cNvPr id="10" name="Text 8"/>
+          <p:cNvSpPr txBox="1"/>
+          <p:nvPr/>
+        </p:nvSpPr>
+        <p:spPr>
+          <a:xfrm>
+            <a:off x="2788920" y="2103120"/>
+            <a:ext cx="8778240" cy="594360"/>
+          </a:xfrm>
+          <a:prstGeom prst="rect">
+            <a:avLst/>
+          </a:prstGeom>
+          <a:noFill/>
+          <a:ln/>
+        </p:spPr>
+        <p:txBody>
+          <a:bodyPr wrap="square" lIns="0" tIns="0" rIns="0" bIns="0" rtlCol="0" anchor="ctr"/>
+          <a:lstStyle/>
+          <a:p>
+            <a:pPr indent="0" marL="0">
+              <a:buNone/>
+            </a:pPr>
+            <a:r>
+              <a:rPr lang="en-US" sz="1900" dirty="0">
+                <a:solidFill>
+                  <a:srgbClr val="1E2761"/>
+                </a:solidFill>
+                <a:latin typeface="Calibri" pitchFamily="34" charset="0"/>
+                <a:ea typeface="Calibri" pitchFamily="34" charset="-122"/>
+                <a:cs typeface="Calibri" pitchFamily="34" charset="-120"/>
+              </a:rPr>
+              <a:t>Wer schreibt an wen, wann, worüber?</a:t>
+            </a:r>
+            <a:endParaRPr lang="en-US" sz="1900" dirty="0"/>
+          </a:p>
+        </p:txBody>
+      </p:sp>
+      <p:sp>
+        <p:nvSpPr>
+          <p:cNvPr id="11" name="Shape 9"/>
+          <p:cNvSpPr/>
+          <p:nvPr/>
+        </p:nvSpPr>
+        <p:spPr>
+          <a:xfrm>
+            <a:off x="548640" y="2926080"/>
+            <a:ext cx="2011680" cy="402336"/>
+          </a:xfrm>
+          <a:prstGeom prst="roundRect">
+            <a:avLst>
+              <a:gd name="adj" fmla="val 50000"/>
+            </a:avLst>
+          </a:prstGeom>
+          <a:solidFill>
+            <a:srgbClr val="1E2761"/>
+          </a:solidFill>
+          <a:ln/>
+        </p:spPr>
+      </p:sp>
+      <p:sp>
+        <p:nvSpPr>
+          <p:cNvPr id="12" name="Text 10"/>
+          <p:cNvSpPr txBox="1"/>
+          <p:nvPr/>
+        </p:nvSpPr>
+        <p:spPr>
+          <a:xfrm>
+            <a:off x="548640" y="2926080"/>
+            <a:ext cx="2011680" cy="402336"/>
+          </a:xfrm>
+          <a:prstGeom prst="rect">
+            <a:avLst/>
+          </a:prstGeom>
+          <a:noFill/>
+          <a:ln/>
+        </p:spPr>
+        <p:txBody>
+          <a:bodyPr wrap="square" lIns="0" tIns="0" rIns="0" bIns="0" rtlCol="0" anchor="ctr"/>
+          <a:lstStyle/>
+          <a:p>
+            <a:pPr algn="ctr" indent="0" marL="0">
+              <a:buNone/>
+            </a:pPr>
+            <a:r>
+              <a:rPr lang="en-US" sz="1600" b="1" dirty="0">
+                <a:solidFill>
+                  <a:srgbClr val="FFFFFF"/>
+                </a:solidFill>
+                <a:latin typeface="Calibri" pitchFamily="34" charset="0"/>
+                <a:ea typeface="Calibri" pitchFamily="34" charset="-122"/>
+                <a:cs typeface="Calibri" pitchFamily="34" charset="-120"/>
+              </a:rPr>
+              <a:t>Hauptteil</a:t>
+            </a:r>
+            <a:endParaRPr lang="en-US" sz="1600" dirty="0"/>
+          </a:p>
+        </p:txBody>
+      </p:sp>
+      <p:sp>
+        <p:nvSpPr>
+          <p:cNvPr id="13" name="Text 11"/>
+          <p:cNvSpPr txBox="1"/>
+          <p:nvPr/>
+        </p:nvSpPr>
+        <p:spPr>
+          <a:xfrm>
+            <a:off x="2788920" y="2834640"/>
+            <a:ext cx="8778240" cy="594360"/>
+          </a:xfrm>
+          <a:prstGeom prst="rect">
+            <a:avLst/>
+          </a:prstGeom>
+          <a:noFill/>
+          <a:ln/>
+        </p:spPr>
+        <p:txBody>
+          <a:bodyPr wrap="square" lIns="0" tIns="0" rIns="0" bIns="0" rtlCol="0" anchor="ctr"/>
+          <a:lstStyle/>
+          <a:p>
+            <a:pPr indent="0" marL="0">
+              <a:buNone/>
+            </a:pPr>
+            <a:r>
+              <a:rPr lang="en-US" sz="1900" dirty="0">
+                <a:solidFill>
+                  <a:srgbClr val="1E2761"/>
+                </a:solidFill>
+                <a:latin typeface="Calibri" pitchFamily="34" charset="0"/>
+                <a:ea typeface="Calibri" pitchFamily="34" charset="-122"/>
+                <a:cs typeface="Calibri" pitchFamily="34" charset="-120"/>
+              </a:rPr>
+              <a:t>je Zeile der Matrix: Behauptung → Beleg (Zitat + Z.) → Erklärung · erst A, dann C</a:t>
+            </a:r>
+            <a:endParaRPr lang="en-US" sz="1900" dirty="0"/>
+          </a:p>
+        </p:txBody>
+      </p:sp>
+      <p:sp>
+        <p:nvSpPr>
+          <p:cNvPr id="14" name="Shape 12"/>
+          <p:cNvSpPr/>
+          <p:nvPr/>
+        </p:nvSpPr>
+        <p:spPr>
+          <a:xfrm>
+            <a:off x="548640" y="3657600"/>
+            <a:ext cx="2011680" cy="402336"/>
+          </a:xfrm>
+          <a:prstGeom prst="roundRect">
+            <a:avLst>
+              <a:gd name="adj" fmla="val 50000"/>
+            </a:avLst>
+          </a:prstGeom>
+          <a:solidFill>
+            <a:srgbClr val="1E2761"/>
+          </a:solidFill>
+          <a:ln/>
+        </p:spPr>
+      </p:sp>
+      <p:sp>
+        <p:nvSpPr>
+          <p:cNvPr id="15" name="Text 13"/>
+          <p:cNvSpPr txBox="1"/>
+          <p:nvPr/>
+        </p:nvSpPr>
+        <p:spPr>
+          <a:xfrm>
+            <a:off x="548640" y="3657600"/>
+            <a:ext cx="2011680" cy="402336"/>
+          </a:xfrm>
+          <a:prstGeom prst="rect">
+            <a:avLst/>
+          </a:prstGeom>
+          <a:noFill/>
+          <a:ln/>
+        </p:spPr>
+        <p:txBody>
+          <a:bodyPr wrap="square" lIns="0" tIns="0" rIns="0" bIns="0" rtlCol="0" anchor="ctr"/>
+          <a:lstStyle/>
+          <a:p>
+            <a:pPr algn="ctr" indent="0" marL="0">
+              <a:buNone/>
+            </a:pPr>
+            <a:r>
+              <a:rPr lang="en-US" sz="1600" b="1" dirty="0">
+                <a:solidFill>
+                  <a:srgbClr val="FFFFFF"/>
+                </a:solidFill>
+                <a:latin typeface="Calibri" pitchFamily="34" charset="0"/>
+                <a:ea typeface="Calibri" pitchFamily="34" charset="-122"/>
+                <a:cs typeface="Calibri" pitchFamily="34" charset="-120"/>
+              </a:rPr>
+              <a:t>Schluss</a:t>
+            </a:r>
+            <a:endParaRPr lang="en-US" sz="1600" dirty="0"/>
+          </a:p>
+        </p:txBody>
+      </p:sp>
+      <p:sp>
+        <p:nvSpPr>
+          <p:cNvPr id="16" name="Text 14"/>
+          <p:cNvSpPr txBox="1"/>
+          <p:nvPr/>
+        </p:nvSpPr>
+        <p:spPr>
+          <a:xfrm>
+            <a:off x="2788920" y="3566160"/>
+            <a:ext cx="8778240" cy="594360"/>
+          </a:xfrm>
+          <a:prstGeom prst="rect">
+            <a:avLst/>
+          </a:prstGeom>
+          <a:noFill/>
+          <a:ln/>
+        </p:spPr>
+        <p:txBody>
+          <a:bodyPr wrap="square" lIns="0" tIns="0" rIns="0" bIns="0" rtlCol="0" anchor="ctr"/>
+          <a:lstStyle/>
+          <a:p>
+            <a:pPr indent="0" marL="0">
+              <a:buNone/>
+            </a:pPr>
+            <a:r>
+              <a:rPr lang="en-US" sz="1900" dirty="0">
+                <a:solidFill>
+                  <a:srgbClr val="1E2761"/>
+                </a:solidFill>
+                <a:latin typeface="Calibri" pitchFamily="34" charset="0"/>
+                <a:ea typeface="Calibri" pitchFamily="34" charset="-122"/>
+                <a:cs typeface="Calibri" pitchFamily="34" charset="-120"/>
+              </a:rPr>
+              <a:t>Stützen die Stellen die These? Was muss man ergänzen?</a:t>
+            </a:r>
+            <a:endParaRPr lang="en-US" sz="1900" dirty="0"/>
+          </a:p>
+        </p:txBody>
+      </p:sp>
+      <p:sp>
+        <p:nvSpPr>
+          <p:cNvPr id="17" name="Shape 15"/>
+          <p:cNvSpPr/>
+          <p:nvPr/>
+        </p:nvSpPr>
+        <p:spPr>
+          <a:xfrm>
+            <a:off x="548640" y="4434840"/>
+            <a:ext cx="11064240" cy="2057400"/>
+          </a:xfrm>
+          <a:prstGeom prst="roundRect">
+            <a:avLst>
+              <a:gd name="adj" fmla="val 3556"/>
+            </a:avLst>
+          </a:prstGeom>
+          <a:solidFill>
+            <a:srgbClr val="FFF8EC"/>
+          </a:solidFill>
+          <a:ln/>
+        </p:spPr>
+      </p:sp>
+      <p:sp>
+        <p:nvSpPr>
+          <p:cNvPr id="18" name="Text 16"/>
+          <p:cNvSpPr txBox="1"/>
+          <p:nvPr/>
+        </p:nvSpPr>
+        <p:spPr>
+          <a:xfrm>
+            <a:off x="822960" y="4553712"/>
+            <a:ext cx="5486400" cy="411480"/>
+          </a:xfrm>
+          <a:prstGeom prst="rect">
+            <a:avLst/>
+          </a:prstGeom>
+          <a:noFill/>
+          <a:ln/>
+        </p:spPr>
+        <p:txBody>
+          <a:bodyPr wrap="square" lIns="0" tIns="0" rIns="0" bIns="0" rtlCol="0" anchor="t"/>
+          <a:lstStyle/>
+          <a:p>
+            <a:pPr indent="0" marL="0">
+              <a:buNone/>
+            </a:pPr>
+            <a:r>
+              <a:rPr lang="en-US" sz="2000" b="1" dirty="0">
+                <a:solidFill>
+                  <a:srgbClr val="E8A33D"/>
+                </a:solidFill>
+                <a:latin typeface="Cambria" pitchFamily="34" charset="0"/>
+                <a:ea typeface="Cambria" pitchFamily="34" charset="-122"/>
+                <a:cs typeface="Cambria" pitchFamily="34" charset="-120"/>
+              </a:rPr>
+              <a:t>Satzbausteine</a:t>
+            </a:r>
+            <a:endParaRPr lang="en-US" sz="2000" dirty="0"/>
+          </a:p>
+        </p:txBody>
+      </p:sp>
+      <p:sp>
+        <p:nvSpPr>
+          <p:cNvPr id="19" name="Text 17"/>
+          <p:cNvSpPr txBox="1"/>
+          <p:nvPr/>
+        </p:nvSpPr>
+        <p:spPr>
+          <a:xfrm>
+            <a:off x="822960" y="5029200"/>
+            <a:ext cx="10515600" cy="1371600"/>
+          </a:xfrm>
+          <a:prstGeom prst="rect">
+            <a:avLst/>
+          </a:prstGeom>
+          <a:noFill/>
+          <a:ln/>
+        </p:spPr>
+        <p:txBody>
+          <a:bodyPr wrap="square" lIns="0" tIns="0" rIns="0" bIns="0" rtlCol="0" anchor="t"/>
+          <a:lstStyle/>
+          <a:p>
+            <a:pPr indent="0" marL="0">
+              <a:spcAft>
+                <a:spcPts val="400"/>
+              </a:spcAft>
+              <a:buNone/>
+            </a:pPr>
+            <a:r>
+              <a:rPr lang="en-US" sz="1800" i="1" dirty="0">
+                <a:solidFill>
+                  <a:srgbClr val="1E2761"/>
+                </a:solidFill>
+                <a:latin typeface="Calibri" pitchFamily="34" charset="0"/>
+                <a:ea typeface="Calibri" pitchFamily="34" charset="-122"/>
+                <a:cs typeface="Calibri" pitchFamily="34" charset="-120"/>
+              </a:rPr>
+              <a:t>In seinem „Brief an den Vater“ (1919) …  ·  Indem der Vater …, sendet er …  ·  Dies zeigt sich in … (Z. …)  ·  Hinzu kommt, dass …  ·  Die Folge ist …  ·  Besonders deutlich wird dies, wenn …  ·  Insgesamt stützt die Stelle die These, weil …  ·  Allerdings …</a:t>
+            </a:r>
+            <a:endParaRPr lang="en-US" sz="1800" dirty="0"/>
+          </a:p>
+        </p:txBody>
+      </p:sp>
+    </p:spTree>
+  </p:cSld>
+  <p:clrMapOvr>
+    <a:masterClrMapping/>
+  </p:clrMapOvr>
+</p:sld>
+</file>
+
+<file path=ppt/slides/slide12.xml><?xml version="1.0" encoding="utf-8"?>
+<p:sld xmlns:a="http://schemas.openxmlformats.org/drawingml/2006/main" xmlns:r="http://schemas.openxmlformats.org/officeDocument/2006/relationships" xmlns:p="http://schemas.openxmlformats.org/presentationml/2006/main">
+  <p:cSld name="Slide 12">
+    <p:bg>
+      <p:bgPr>
+        <a:solidFill>
+          <a:srgbClr val="FFFFFF"/>
+        </a:solidFill>
+      </p:bgPr>
+    </p:bg>
+    <p:spTree>
+      <p:nvGrpSpPr>
+        <p:cNvPr id="1" name=""/>
+        <p:cNvGrpSpPr/>
+        <p:nvPr/>
+      </p:nvGrpSpPr>
+      <p:grpSpPr>
+        <a:xfrm>
+          <a:off x="0" y="0"/>
+          <a:ext cx="0" cy="0"/>
+          <a:chOff x="0" y="0"/>
+          <a:chExt cx="0" cy="0"/>
+        </a:xfrm>
+      </p:grpSpPr>
+      <p:sp>
+        <p:nvSpPr>
+          <p:cNvPr id="2" name="Shape 0"/>
+          <p:cNvSpPr/>
+          <p:nvPr/>
+        </p:nvSpPr>
+        <p:spPr>
+          <a:xfrm>
+            <a:off x="0" y="0"/>
+            <a:ext cx="12191695" cy="960120"/>
+          </a:xfrm>
+          <a:prstGeom prst="roundRect">
+            <a:avLst/>
+          </a:prstGeom>
+          <a:solidFill>
+            <a:srgbClr val="1E2761"/>
+          </a:solidFill>
+          <a:ln/>
+        </p:spPr>
+      </p:sp>
+      <p:sp>
+        <p:nvSpPr>
+          <p:cNvPr id="3" name="Text 1"/>
+          <p:cNvSpPr txBox="1"/>
+          <p:nvPr/>
+        </p:nvSpPr>
+        <p:spPr>
+          <a:xfrm>
+            <a:off x="457200" y="109728"/>
+            <a:ext cx="8686800" cy="274320"/>
+          </a:xfrm>
+          <a:prstGeom prst="rect">
+            <a:avLst/>
+          </a:prstGeom>
+          <a:noFill/>
+          <a:ln/>
+        </p:spPr>
+        <p:txBody>
+          <a:bodyPr wrap="square" lIns="0" tIns="0" rIns="0" bIns="0" rtlCol="0" anchor="t"/>
+          <a:lstStyle/>
+          <a:p>
+            <a:pPr indent="0" marL="0">
+              <a:buNone/>
+            </a:pPr>
+            <a:r>
+              <a:rPr lang="en-US" sz="1300" b="1" spc="200" kern="0" dirty="0">
+                <a:solidFill>
+                  <a:srgbClr val="CADCFC"/>
+                </a:solidFill>
+                <a:latin typeface="Calibri" pitchFamily="34" charset="0"/>
+                <a:ea typeface="Calibri" pitchFamily="34" charset="-122"/>
+                <a:cs typeface="Calibri" pitchFamily="34" charset="-120"/>
+              </a:rPr>
+              <a:t>HILFE ZUM START</a:t>
+            </a:r>
+            <a:endParaRPr lang="en-US" sz="1300" dirty="0"/>
+          </a:p>
+        </p:txBody>
+      </p:sp>
+      <p:sp>
+        <p:nvSpPr>
+          <p:cNvPr id="4" name="Text 2"/>
+          <p:cNvSpPr txBox="1"/>
+          <p:nvPr/>
+        </p:nvSpPr>
+        <p:spPr>
+          <a:xfrm>
+            <a:off x="457200" y="384048"/>
+            <a:ext cx="9418320" cy="530352"/>
+          </a:xfrm>
+          <a:prstGeom prst="rect">
+            <a:avLst/>
+          </a:prstGeom>
+          <a:noFill/>
+          <a:ln/>
+        </p:spPr>
+        <p:txBody>
+          <a:bodyPr wrap="square" lIns="0" tIns="0" rIns="0" bIns="0" rtlCol="0" anchor="t"/>
+          <a:lstStyle/>
+          <a:p>
+            <a:pPr indent="0" marL="0">
+              <a:buNone/>
+            </a:pPr>
+            <a:r>
+              <a:rPr lang="en-US" sz="2700" b="1" dirty="0">
+                <a:solidFill>
+                  <a:srgbClr val="FFFFFF"/>
+                </a:solidFill>
+                <a:latin typeface="Cambria" pitchFamily="34" charset="0"/>
+                <a:ea typeface="Cambria" pitchFamily="34" charset="-122"/>
+                <a:cs typeface="Cambria" pitchFamily="34" charset="-120"/>
+              </a:rPr>
+              <a:t>So könnte dein Text beginnen</a:t>
+            </a:r>
+            <a:endParaRPr lang="en-US" sz="2700" dirty="0"/>
+          </a:p>
+        </p:txBody>
+      </p:sp>
+      <p:sp>
+        <p:nvSpPr>
+          <p:cNvPr id="5" name="Shape 3"/>
+          <p:cNvSpPr/>
+          <p:nvPr/>
+        </p:nvSpPr>
+        <p:spPr>
+          <a:xfrm>
+            <a:off x="548640" y="1280160"/>
+            <a:ext cx="11064240" cy="5120640"/>
+          </a:xfrm>
+          <a:prstGeom prst="roundRect">
+            <a:avLst>
+              <a:gd name="adj" fmla="val 1429"/>
+            </a:avLst>
+          </a:prstGeom>
+          <a:solidFill>
+            <a:srgbClr val="F4F7FD"/>
+          </a:solidFill>
+          <a:ln/>
+        </p:spPr>
+      </p:sp>
+      <p:sp>
+        <p:nvSpPr>
+          <p:cNvPr id="6" name="Text 4"/>
+          <p:cNvSpPr txBox="1"/>
+          <p:nvPr/>
+        </p:nvSpPr>
+        <p:spPr>
+          <a:xfrm>
+            <a:off x="868680" y="1463040"/>
+            <a:ext cx="10424160" cy="4754880"/>
+          </a:xfrm>
+          <a:prstGeom prst="rect">
+            <a:avLst/>
+          </a:prstGeom>
+          <a:noFill/>
+          <a:ln/>
+        </p:spPr>
+        <p:txBody>
+          <a:bodyPr wrap="square" lIns="0" tIns="0" rIns="0" bIns="0" rtlCol="0" anchor="t"/>
+          <a:lstStyle/>
+          <a:p>
+            <a:pPr indent="0" marL="0">
+              <a:lnSpc>
+                <a:spcPct val="120000"/>
+              </a:lnSpc>
+              <a:buNone/>
+            </a:pPr>
+            <a:r>
+              <a:rPr lang="en-US" sz="2100" dirty="0">
+                <a:solidFill>
+                  <a:srgbClr val="1E2761"/>
+                </a:solidFill>
+                <a:latin typeface="Cambria" pitchFamily="34" charset="0"/>
+                <a:ea typeface="Cambria" pitchFamily="34" charset="-122"/>
+                <a:cs typeface="Cambria" pitchFamily="34" charset="-120"/>
+              </a:rPr>
+              <a:t>In seinem „Brief an den Vater“ (1919) versucht Franz Kafka, seinem Vater zu erklären, warum er Furcht vor ihm hat. In den beiden Abschnitten beschreibt er, wie der Vater mit ihm gesprochen hat: durch Redeverbote (A) und durch Ironie (C).</a:t>
+            </a:r>
+            <a:endParaRPr lang="en-US" sz="2100" dirty="0"/>
+          </a:p>
+          <a:p>
+            <a:pPr indent="0" marL="0">
+              <a:lnSpc>
+                <a:spcPct val="120000"/>
+              </a:lnSpc>
+              <a:buNone/>
+            </a:pPr>
+            <a:r>
+              <a:rPr lang="en-US" sz="1000" dirty="0">
+                <a:solidFill>
+                  <a:srgbClr val="1E2761"/>
+                </a:solidFill>
+                <a:latin typeface="Cambria" pitchFamily="34" charset="0"/>
+                <a:ea typeface="Cambria" pitchFamily="34" charset="-122"/>
+                <a:cs typeface="Cambria" pitchFamily="34" charset="-120"/>
+              </a:rPr>
+              <a:t> </a:t>
+            </a:r>
+            <a:endParaRPr lang="en-US" sz="2100" dirty="0"/>
+          </a:p>
+          <a:p>
+            <a:pPr indent="0" marL="0">
+              <a:lnSpc>
+                <a:spcPct val="120000"/>
+              </a:lnSpc>
+              <a:buNone/>
+            </a:pPr>
+            <a:r>
+              <a:rPr lang="en-US" sz="2100" dirty="0">
+                <a:solidFill>
+                  <a:srgbClr val="1E2761"/>
+                </a:solidFill>
+                <a:latin typeface="Cambria" pitchFamily="34" charset="0"/>
+                <a:ea typeface="Cambria" pitchFamily="34" charset="-122"/>
+                <a:cs typeface="Cambria" pitchFamily="34" charset="-120"/>
+              </a:rPr>
+              <a:t>Indem der Vater jede Widerrede verbietet, sendet er kaum eine Sachinformation, sondern einen Appell – „Schweig!“ – und vor allem eine Beziehungsbotschaft: Er allein bestimmt. Seine Drohung „kein Wort der Widerrede!“ (A, Z. 5) unterstreicht er nonverbal mit der „erhobene[n] Hand“ (Z. 5). …</a:t>
+            </a:r>
+            <a:endParaRPr lang="en-US" sz="2100" dirty="0"/>
+          </a:p>
+        </p:txBody>
+      </p:sp>
+    </p:spTree>
+  </p:cSld>
+  <p:clrMapOvr>
+    <a:masterClrMapping/>
+  </p:clrMapOvr>
+</p:sld>
+</file>
+
+<file path=ppt/slides/slide13.xml><?xml version="1.0" encoding="utf-8"?>
+<p:sld xmlns:a="http://schemas.openxmlformats.org/drawingml/2006/main" xmlns:r="http://schemas.openxmlformats.org/officeDocument/2006/relationships" xmlns:p="http://schemas.openxmlformats.org/presentationml/2006/main">
+  <p:cSld name="Slide 13">
     <p:bg>
       <p:bgPr>
         <a:solidFill>
@@ -2409,7 +3673,7 @@
     <p:bg>
       <p:bgPr>
         <a:solidFill>
-          <a:srgbClr val="FFFFFF"/>
+          <a:srgbClr val="1E2761"/>
         </a:solidFill>
       </p:bgPr>
     </p:bg>
@@ -2435,14 +3699,14 @@
         </p:nvSpPr>
         <p:spPr>
           <a:xfrm>
-            <a:off x="0" y="0"/>
-            <a:ext cx="12191695" cy="960120"/>
-          </a:xfrm>
-          <a:prstGeom prst="roundRect">
+            <a:off x="9692640" y="-1463040"/>
+            <a:ext cx="4206240" cy="4206240"/>
+          </a:xfrm>
+          <a:prstGeom prst="ellipse">
             <a:avLst/>
           </a:prstGeom>
           <a:solidFill>
-            <a:srgbClr val="1E2761"/>
+            <a:srgbClr val="24306E"/>
           </a:solidFill>
           <a:ln/>
         </p:spPr>
@@ -2455,8 +3719,8 @@
         </p:nvSpPr>
         <p:spPr>
           <a:xfrm>
-            <a:off x="457200" y="109728"/>
-            <a:ext cx="8686800" cy="274320"/>
+            <a:off x="822960" y="1280160"/>
+            <a:ext cx="10424160" cy="914400"/>
           </a:xfrm>
           <a:prstGeom prst="rect">
             <a:avLst/>
@@ -2472,58 +3736,41 @@
               <a:buNone/>
             </a:pPr>
             <a:r>
-              <a:rPr lang="en-US" sz="1300" b="1" spc="200" kern="0" dirty="0">
+              <a:rPr lang="en-US" sz="3200" i="1" dirty="0">
                 <a:solidFill>
                   <a:srgbClr val="CADCFC"/>
-                </a:solidFill>
-                <a:latin typeface="Calibri" pitchFamily="34" charset="0"/>
-                <a:ea typeface="Calibri" pitchFamily="34" charset="-122"/>
-                <a:cs typeface="Calibri" pitchFamily="34" charset="-120"/>
-              </a:rPr>
-              <a:t>DIKTAT · SELBSTKONTROLLE · TEIL 1 · KONTEXT</a:t>
-            </a:r>
-            <a:endParaRPr lang="en-US" sz="1300" dirty="0"/>
-          </a:p>
-        </p:txBody>
-      </p:sp>
-      <p:sp>
-        <p:nvSpPr>
-          <p:cNvPr id="4" name="Text 2"/>
-          <p:cNvSpPr txBox="1"/>
-          <p:nvPr/>
-        </p:nvSpPr>
-        <p:spPr>
-          <a:xfrm>
-            <a:off x="457200" y="384048"/>
-            <a:ext cx="9418320" cy="530352"/>
-          </a:xfrm>
-          <a:prstGeom prst="rect">
-            <a:avLst/>
-          </a:prstGeom>
-          <a:noFill/>
-          <a:ln/>
-        </p:spPr>
-        <p:txBody>
-          <a:bodyPr wrap="square" lIns="0" tIns="0" rIns="0" bIns="0" rtlCol="0" anchor="t"/>
-          <a:lstStyle/>
-          <a:p>
-            <a:pPr indent="0" marL="0">
-              <a:buNone/>
-            </a:pPr>
-            <a:r>
-              <a:rPr lang="en-US" sz="2700" b="1" dirty="0">
-                <a:solidFill>
-                  <a:srgbClr val="FFFFFF"/>
                 </a:solidFill>
                 <a:latin typeface="Cambria" pitchFamily="34" charset="0"/>
                 <a:ea typeface="Cambria" pitchFamily="34" charset="-122"/>
                 <a:cs typeface="Cambria" pitchFamily="34" charset="-120"/>
               </a:rPr>
-              <a:t>Vergleiche Wort für Wort</a:t>
-            </a:r>
-            <a:endParaRPr lang="en-US" sz="2700" dirty="0"/>
-          </a:p>
-        </p:txBody>
+              <a:t>„… ich hätte Furcht vor Dir.“</a:t>
+            </a:r>
+            <a:endParaRPr lang="en-US" sz="3200" dirty="0"/>
+          </a:p>
+        </p:txBody>
+      </p:sp>
+      <p:sp>
+        <p:nvSpPr>
+          <p:cNvPr id="4" name="Shape 2"/>
+          <p:cNvSpPr/>
+          <p:nvPr/>
+        </p:nvSpPr>
+        <p:spPr>
+          <a:xfrm>
+            <a:off x="822960" y="2651760"/>
+            <a:ext cx="10515600" cy="1463040"/>
+          </a:xfrm>
+          <a:prstGeom prst="roundRect">
+            <a:avLst>
+              <a:gd name="adj" fmla="val 5000"/>
+            </a:avLst>
+          </a:prstGeom>
+          <a:solidFill>
+            <a:srgbClr val="D9534F"/>
+          </a:solidFill>
+          <a:ln/>
+        </p:spPr>
       </p:sp>
       <p:sp>
         <p:nvSpPr>
@@ -2533,98 +3780,34 @@
         </p:nvSpPr>
         <p:spPr>
           <a:xfrm>
-            <a:off x="548640" y="1188720"/>
-            <a:ext cx="11064240" cy="4663440"/>
-          </a:xfrm>
-          <a:prstGeom prst="rect">
-            <a:avLst/>
-          </a:prstGeom>
-          <a:noFill/>
-          <a:ln/>
-        </p:spPr>
-        <p:txBody>
-          <a:bodyPr wrap="square" lIns="0" tIns="0" rIns="0" bIns="0" rtlCol="0" anchor="t"/>
-          <a:lstStyle/>
-          <a:p>
-            <a:pPr indent="0" marL="0">
-              <a:lnSpc>
-                <a:spcPct val="125000"/>
-              </a:lnSpc>
-              <a:buNone/>
-            </a:pPr>
-            <a:r>
-              <a:rPr lang="en-US" sz="2300" dirty="0">
-                <a:solidFill>
-                  <a:srgbClr val="1E2761"/>
+            <a:off x="1097280" y="2651760"/>
+            <a:ext cx="10058400" cy="1463040"/>
+          </a:xfrm>
+          <a:prstGeom prst="rect">
+            <a:avLst/>
+          </a:prstGeom>
+          <a:noFill/>
+          <a:ln/>
+        </p:spPr>
+        <p:txBody>
+          <a:bodyPr wrap="square" lIns="0" tIns="0" rIns="0" bIns="0" rtlCol="0" anchor="ctr"/>
+          <a:lstStyle/>
+          <a:p>
+            <a:pPr indent="0" marL="0">
+              <a:buNone/>
+            </a:pPr>
+            <a:r>
+              <a:rPr lang="en-US" sz="3000" b="1" dirty="0">
+                <a:solidFill>
+                  <a:srgbClr val="FFFFFF"/>
                 </a:solidFill>
                 <a:latin typeface="Cambria" pitchFamily="34" charset="0"/>
                 <a:ea typeface="Cambria" pitchFamily="34" charset="-122"/>
                 <a:cs typeface="Cambria" pitchFamily="34" charset="-120"/>
               </a:rPr>
-              <a:t>Franz Kafka wurde 1883 in Prag geboren. Sein Vater Hermann war ein Kaufmann, der sich aus ärmlichen Verhältnissen hochgearbeitet hatte. Er erwartete von seinem Sohn, dass er stark, fleißig und dankbar ist. Im November 1919 schrieb der sechsunddreißigjährige Kafka seinem Vater einen Brief, der über hundert handschriftliche Seiten lang ist. Darin versucht er zu erklären, warum er Angst vor ihm hat. Das Besondere daran ist, dass er schreibt, weil er mit seinem Vater nicht reden kann. Kafka gab den Brief seiner Mutter, damit sie ihn weitergibt. Sie tat das aber nicht, sodass der Vater ihn nie gelesen hat. Veröffentlicht wurde der Brief erst nach Kafkas Tod.</a:t>
-            </a:r>
-            <a:endParaRPr lang="en-US" sz="2300" dirty="0"/>
-          </a:p>
-        </p:txBody>
-      </p:sp>
-      <p:sp>
-        <p:nvSpPr>
-          <p:cNvPr id="6" name="Shape 4"/>
-          <p:cNvSpPr/>
-          <p:nvPr/>
-        </p:nvSpPr>
-        <p:spPr>
-          <a:xfrm>
-            <a:off x="548640" y="5989320"/>
-            <a:ext cx="11064240" cy="548640"/>
-          </a:xfrm>
-          <a:prstGeom prst="roundRect">
-            <a:avLst>
-              <a:gd name="adj" fmla="val 13333"/>
-            </a:avLst>
-          </a:prstGeom>
-          <a:solidFill>
-            <a:srgbClr val="EAF0FA"/>
-          </a:solidFill>
-          <a:ln/>
-        </p:spPr>
-      </p:sp>
-      <p:sp>
-        <p:nvSpPr>
-          <p:cNvPr id="7" name="Text 5"/>
-          <p:cNvSpPr txBox="1"/>
-          <p:nvPr/>
-        </p:nvSpPr>
-        <p:spPr>
-          <a:xfrm>
-            <a:off x="777240" y="5989320"/>
-            <a:ext cx="10607040" cy="548640"/>
-          </a:xfrm>
-          <a:prstGeom prst="rect">
-            <a:avLst/>
-          </a:prstGeom>
-          <a:noFill/>
-          <a:ln/>
-        </p:spPr>
-        <p:txBody>
-          <a:bodyPr wrap="square" lIns="0" tIns="0" rIns="0" bIns="0" rtlCol="0" anchor="ctr"/>
-          <a:lstStyle/>
-          <a:p>
-            <a:pPr indent="0" marL="0">
-              <a:buNone/>
-            </a:pPr>
-            <a:r>
-              <a:rPr lang="en-US" sz="1700" b="1" dirty="0">
-                <a:solidFill>
-                  <a:srgbClr val="1E2761"/>
-                </a:solidFill>
-                <a:latin typeface="Calibri" pitchFamily="34" charset="0"/>
-                <a:ea typeface="Calibri" pitchFamily="34" charset="-122"/>
-                <a:cs typeface="Calibri" pitchFamily="34" charset="-120"/>
-              </a:rPr>
-              <a:t>Fehler farbig anstreichen · Anzahl notieren · Kommafehler extra zählen</a:t>
-            </a:r>
-            <a:endParaRPr lang="en-US" sz="1700" dirty="0"/>
+              <a:t>Wovor hat ein 36-Jähriger Furcht – und warum schreibt er, statt zu reden?</a:t>
+            </a:r>
+            <a:endParaRPr lang="en-US" sz="3000" dirty="0"/>
           </a:p>
         </p:txBody>
       </p:sp>
@@ -2642,7 +3825,7 @@
     <p:bg>
       <p:bgPr>
         <a:solidFill>
-          <a:srgbClr val="FFFFFF"/>
+          <a:srgbClr val="1E2761"/>
         </a:solidFill>
       </p:bgPr>
     </p:bg>
@@ -2668,67 +3851,89 @@
         </p:nvSpPr>
         <p:spPr>
           <a:xfrm>
-            <a:off x="0" y="0"/>
-            <a:ext cx="12191695" cy="960120"/>
+            <a:off x="-1371600" y="4206240"/>
+            <a:ext cx="3657600" cy="3657600"/>
+          </a:xfrm>
+          <a:prstGeom prst="ellipse">
+            <a:avLst/>
+          </a:prstGeom>
+          <a:solidFill>
+            <a:srgbClr val="24306E"/>
+          </a:solidFill>
+          <a:ln/>
+        </p:spPr>
+      </p:sp>
+      <p:sp>
+        <p:nvSpPr>
+          <p:cNvPr id="3" name="Shape 1"/>
+          <p:cNvSpPr/>
+          <p:nvPr/>
+        </p:nvSpPr>
+        <p:spPr>
+          <a:xfrm>
+            <a:off x="822960" y="1828800"/>
+            <a:ext cx="1828800" cy="402336"/>
           </a:xfrm>
           <a:prstGeom prst="roundRect">
-            <a:avLst/>
+            <a:avLst>
+              <a:gd name="adj" fmla="val 50000"/>
+            </a:avLst>
           </a:prstGeom>
           <a:solidFill>
-            <a:srgbClr val="1E2761"/>
+            <a:srgbClr val="D9534F"/>
           </a:solidFill>
           <a:ln/>
         </p:spPr>
       </p:sp>
       <p:sp>
         <p:nvSpPr>
-          <p:cNvPr id="3" name="Text 1"/>
-          <p:cNvSpPr txBox="1"/>
-          <p:nvPr/>
-        </p:nvSpPr>
-        <p:spPr>
-          <a:xfrm>
-            <a:off x="457200" y="109728"/>
-            <a:ext cx="8686800" cy="274320"/>
-          </a:xfrm>
-          <a:prstGeom prst="rect">
-            <a:avLst/>
-          </a:prstGeom>
-          <a:noFill/>
-          <a:ln/>
-        </p:spPr>
-        <p:txBody>
-          <a:bodyPr wrap="square" lIns="0" tIns="0" rIns="0" bIns="0" rtlCol="0" anchor="t"/>
-          <a:lstStyle/>
-          <a:p>
-            <a:pPr indent="0" marL="0">
-              <a:buNone/>
-            </a:pPr>
-            <a:r>
-              <a:rPr lang="en-US" sz="1300" b="1" spc="200" kern="0" dirty="0">
-                <a:solidFill>
-                  <a:srgbClr val="CADCFC"/>
+          <p:cNvPr id="4" name="Text 2"/>
+          <p:cNvSpPr txBox="1"/>
+          <p:nvPr/>
+        </p:nvSpPr>
+        <p:spPr>
+          <a:xfrm>
+            <a:off x="822960" y="1828800"/>
+            <a:ext cx="1828800" cy="402336"/>
+          </a:xfrm>
+          <a:prstGeom prst="rect">
+            <a:avLst/>
+          </a:prstGeom>
+          <a:noFill/>
+          <a:ln/>
+        </p:spPr>
+        <p:txBody>
+          <a:bodyPr wrap="square" lIns="0" tIns="0" rIns="0" bIns="0" rtlCol="0" anchor="ctr"/>
+          <a:lstStyle/>
+          <a:p>
+            <a:pPr algn="ctr" indent="0" marL="0">
+              <a:buNone/>
+            </a:pPr>
+            <a:r>
+              <a:rPr lang="en-US" sz="1400" b="1" dirty="0">
+                <a:solidFill>
+                  <a:srgbClr val="FFFFFF"/>
                 </a:solidFill>
                 <a:latin typeface="Calibri" pitchFamily="34" charset="0"/>
                 <a:ea typeface="Calibri" pitchFamily="34" charset="-122"/>
                 <a:cs typeface="Calibri" pitchFamily="34" charset="-120"/>
               </a:rPr>
-              <a:t>DIKTAT · SELBSTKONTROLLE · TEIL 2 · FACHBEGRIFFE</a:t>
-            </a:r>
-            <a:endParaRPr lang="en-US" sz="1300" dirty="0"/>
-          </a:p>
-        </p:txBody>
-      </p:sp>
-      <p:sp>
-        <p:nvSpPr>
-          <p:cNvPr id="4" name="Text 2"/>
-          <p:cNvSpPr txBox="1"/>
-          <p:nvPr/>
-        </p:nvSpPr>
-        <p:spPr>
-          <a:xfrm>
-            <a:off x="457200" y="384048"/>
-            <a:ext cx="9418320" cy="530352"/>
+              <a:t>DIKTAT</a:t>
+            </a:r>
+            <a:endParaRPr lang="en-US" sz="1400" dirty="0"/>
+          </a:p>
+        </p:txBody>
+      </p:sp>
+      <p:sp>
+        <p:nvSpPr>
+          <p:cNvPr id="5" name="Text 3"/>
+          <p:cNvSpPr txBox="1"/>
+          <p:nvPr/>
+        </p:nvSpPr>
+        <p:spPr>
+          <a:xfrm>
+            <a:off x="822960" y="2468880"/>
+            <a:ext cx="10789920" cy="822960"/>
           </a:xfrm>
           <a:prstGeom prst="rect">
             <a:avLst/>
@@ -2744,7 +3949,7 @@
               <a:buNone/>
             </a:pPr>
             <a:r>
-              <a:rPr lang="en-US" sz="2700" b="1" dirty="0">
+              <a:rPr lang="en-US" sz="3000" b="1" dirty="0">
                 <a:solidFill>
                   <a:srgbClr val="FFFFFF"/>
                 </a:solidFill>
@@ -2752,22 +3957,22 @@
                 <a:ea typeface="Cambria" pitchFamily="34" charset="-122"/>
                 <a:cs typeface="Cambria" pitchFamily="34" charset="-120"/>
               </a:rPr>
-              <a:t>Vergleiche Wort für Wort</a:t>
-            </a:r>
-            <a:endParaRPr lang="en-US" sz="2700" dirty="0"/>
-          </a:p>
-        </p:txBody>
-      </p:sp>
-      <p:sp>
-        <p:nvSpPr>
-          <p:cNvPr id="5" name="Text 3"/>
-          <p:cNvSpPr txBox="1"/>
-          <p:nvPr/>
-        </p:nvSpPr>
-        <p:spPr>
-          <a:xfrm>
-            <a:off x="548640" y="1188720"/>
-            <a:ext cx="11064240" cy="4663440"/>
+              <a:t>Kafka und sein Vater – Kontext und Fachbegriffe</a:t>
+            </a:r>
+            <a:endParaRPr lang="en-US" sz="3000" dirty="0"/>
+          </a:p>
+        </p:txBody>
+      </p:sp>
+      <p:sp>
+        <p:nvSpPr>
+          <p:cNvPr id="6" name="Text 4"/>
+          <p:cNvSpPr txBox="1"/>
+          <p:nvPr/>
+        </p:nvSpPr>
+        <p:spPr>
+          <a:xfrm>
+            <a:off x="822960" y="3566160"/>
+            <a:ext cx="10515600" cy="548640"/>
           </a:xfrm>
           <a:prstGeom prst="rect">
             <a:avLst/>
@@ -2780,84 +3985,20 @@
           <a:lstStyle/>
           <a:p>
             <a:pPr indent="0" marL="0">
-              <a:lnSpc>
-                <a:spcPct val="125000"/>
-              </a:lnSpc>
-              <a:buNone/>
-            </a:pPr>
-            <a:r>
-              <a:rPr lang="en-US" sz="2400" dirty="0">
-                <a:solidFill>
-                  <a:srgbClr val="1E2761"/>
-                </a:solidFill>
-                <a:latin typeface="Cambria" pitchFamily="34" charset="0"/>
-                <a:ea typeface="Cambria" pitchFamily="34" charset="-122"/>
-                <a:cs typeface="Cambria" pitchFamily="34" charset="-120"/>
-              </a:rPr>
-              <a:t>Nach Paul Watzlawick ist zwischenmenschliche Kommunikation entweder symmetrisch oder komplementär. Symmetrisch ist sie, wenn die Beziehung auf Gleichheit beruht und beide Partner auf derselben Stufe stehen. Komplementär ist sie, wenn die Beziehung auf Unterschiedlichkeit beruht: Einer ist überlegen, der andere ist unterlegen. Wird dieses Verhältnis so starr, dass niemand die Rolle wechseln kann, ist kein Gespräch auf Augenhöhe mehr möglich. Von einem Generationenkonflikt spricht man, wenn Eltern und Kinder unterschiedliche Werte, Erfahrungen und Erwartungen haben und sich deshalb nicht verstehen.</a:t>
-            </a:r>
-            <a:endParaRPr lang="en-US" sz="2400" dirty="0"/>
-          </a:p>
-        </p:txBody>
-      </p:sp>
-      <p:sp>
-        <p:nvSpPr>
-          <p:cNvPr id="6" name="Shape 4"/>
-          <p:cNvSpPr/>
-          <p:nvPr/>
-        </p:nvSpPr>
-        <p:spPr>
-          <a:xfrm>
-            <a:off x="548640" y="5989320"/>
-            <a:ext cx="11064240" cy="548640"/>
-          </a:xfrm>
-          <a:prstGeom prst="roundRect">
-            <a:avLst>
-              <a:gd name="adj" fmla="val 13333"/>
-            </a:avLst>
-          </a:prstGeom>
-          <a:solidFill>
-            <a:srgbClr val="EAF0FA"/>
-          </a:solidFill>
-          <a:ln/>
-        </p:spPr>
-      </p:sp>
-      <p:sp>
-        <p:nvSpPr>
-          <p:cNvPr id="7" name="Text 5"/>
-          <p:cNvSpPr txBox="1"/>
-          <p:nvPr/>
-        </p:nvSpPr>
-        <p:spPr>
-          <a:xfrm>
-            <a:off x="777240" y="5989320"/>
-            <a:ext cx="10607040" cy="548640"/>
-          </a:xfrm>
-          <a:prstGeom prst="rect">
-            <a:avLst/>
-          </a:prstGeom>
-          <a:noFill/>
-          <a:ln/>
-        </p:spPr>
-        <p:txBody>
-          <a:bodyPr wrap="square" lIns="0" tIns="0" rIns="0" bIns="0" rtlCol="0" anchor="ctr"/>
-          <a:lstStyle/>
-          <a:p>
-            <a:pPr indent="0" marL="0">
-              <a:buNone/>
-            </a:pPr>
-            <a:r>
-              <a:rPr lang="en-US" sz="1700" b="1" dirty="0">
-                <a:solidFill>
-                  <a:srgbClr val="1E2761"/>
+              <a:buNone/>
+            </a:pPr>
+            <a:r>
+              <a:rPr lang="en-US" sz="2200" dirty="0">
+                <a:solidFill>
+                  <a:srgbClr val="CADCFC"/>
                 </a:solidFill>
                 <a:latin typeface="Calibri" pitchFamily="34" charset="0"/>
                 <a:ea typeface="Calibri" pitchFamily="34" charset="-122"/>
                 <a:cs typeface="Calibri" pitchFamily="34" charset="-120"/>
               </a:rPr>
-              <a:t>Fehler farbig anstreichen · Anzahl notieren · Kommafehler extra zählen</a:t>
-            </a:r>
-            <a:endParaRPr lang="en-US" sz="1700" dirty="0"/>
+              <a:t>Schreibe mit. Satzzeichen werden nicht angesagt – achte selbst auf die Kommas.</a:t>
+            </a:r>
+            <a:endParaRPr lang="en-US" sz="2200" dirty="0"/>
           </a:p>
         </p:txBody>
       </p:sp>
@@ -2946,7 +4087,7 @@
                 <a:ea typeface="Calibri" pitchFamily="34" charset="-122"/>
                 <a:cs typeface="Calibri" pitchFamily="34" charset="-120"/>
               </a:rPr>
-              <a:t>DIKTAT · SELBSTKONTROLLE</a:t>
+              <a:t>DIKTAT · SELBSTKONTROLLE · TEIL 1 · KONTEXT</a:t>
             </a:r>
             <a:endParaRPr lang="en-US" sz="1300" dirty="0"/>
           </a:p>
@@ -2985,7 +4126,7 @@
                 <a:ea typeface="Cambria" pitchFamily="34" charset="-122"/>
                 <a:cs typeface="Cambria" pitchFamily="34" charset="-120"/>
               </a:rPr>
-              <a:t>Darauf achten – auch in jeder Klausur</a:t>
+              <a:t>Vergleiche Wort für Wort</a:t>
             </a:r>
             <a:endParaRPr lang="en-US" sz="2700" dirty="0"/>
           </a:p>
@@ -2993,58 +4134,14 @@
       </p:sp>
       <p:sp>
         <p:nvSpPr>
-          <p:cNvPr id="5" name="Shape 3"/>
-          <p:cNvSpPr/>
-          <p:nvPr/>
-        </p:nvSpPr>
-        <p:spPr>
-          <a:xfrm>
-            <a:off x="457200" y="1143000"/>
-            <a:ext cx="5486400" cy="2560320"/>
-          </a:xfrm>
-          <a:prstGeom prst="roundRect">
-            <a:avLst>
-              <a:gd name="adj" fmla="val 2857"/>
-            </a:avLst>
-          </a:prstGeom>
-          <a:solidFill>
-            <a:srgbClr val="F4F7FD"/>
-          </a:solidFill>
-          <a:ln/>
-        </p:spPr>
-      </p:sp>
-      <p:sp>
-        <p:nvSpPr>
-          <p:cNvPr id="6" name="Shape 4"/>
-          <p:cNvSpPr/>
-          <p:nvPr/>
-        </p:nvSpPr>
-        <p:spPr>
-          <a:xfrm>
-            <a:off x="457200" y="1143000"/>
-            <a:ext cx="128016" cy="2560320"/>
-          </a:xfrm>
-          <a:prstGeom prst="roundRect">
-            <a:avLst>
-              <a:gd name="adj" fmla="val 14286"/>
-            </a:avLst>
-          </a:prstGeom>
-          <a:solidFill>
-            <a:srgbClr val="D9534F"/>
-          </a:solidFill>
-          <a:ln/>
-        </p:spPr>
-      </p:sp>
-      <p:sp>
-        <p:nvSpPr>
-          <p:cNvPr id="7" name="Text 5"/>
-          <p:cNvSpPr txBox="1"/>
-          <p:nvPr/>
-        </p:nvSpPr>
-        <p:spPr>
-          <a:xfrm>
-            <a:off x="777240" y="1252728"/>
-            <a:ext cx="5029200" cy="411480"/>
+          <p:cNvPr id="5" name="Text 3"/>
+          <p:cNvSpPr txBox="1"/>
+          <p:nvPr/>
+        </p:nvSpPr>
+        <p:spPr>
+          <a:xfrm>
+            <a:off x="548640" y="1188720"/>
+            <a:ext cx="11064240" cy="4663440"/>
           </a:xfrm>
           <a:prstGeom prst="rect">
             <a:avLst/>
@@ -3057,49 +4154,74 @@
           <a:lstStyle/>
           <a:p>
             <a:pPr indent="0" marL="0">
-              <a:buNone/>
-            </a:pPr>
-            <a:r>
-              <a:rPr lang="en-US" sz="2000" b="1" dirty="0">
-                <a:solidFill>
-                  <a:srgbClr val="D9534F"/>
+              <a:lnSpc>
+                <a:spcPct val="125000"/>
+              </a:lnSpc>
+              <a:buNone/>
+            </a:pPr>
+            <a:r>
+              <a:rPr lang="en-US" sz="2300" dirty="0">
+                <a:solidFill>
+                  <a:srgbClr val="1E2761"/>
                 </a:solidFill>
                 <a:latin typeface="Cambria" pitchFamily="34" charset="0"/>
                 <a:ea typeface="Cambria" pitchFamily="34" charset="-122"/>
                 <a:cs typeface="Cambria" pitchFamily="34" charset="-120"/>
               </a:rPr>
-              <a:t>das oder dass?</a:t>
-            </a:r>
-            <a:endParaRPr lang="en-US" sz="2000" dirty="0"/>
-          </a:p>
-        </p:txBody>
-      </p:sp>
-      <p:sp>
-        <p:nvSpPr>
-          <p:cNvPr id="8" name="Text 6"/>
-          <p:cNvSpPr txBox="1"/>
-          <p:nvPr/>
-        </p:nvSpPr>
-        <p:spPr>
-          <a:xfrm>
-            <a:off x="777240" y="1691640"/>
-            <a:ext cx="4983480" cy="777240"/>
-          </a:xfrm>
-          <a:prstGeom prst="rect">
-            <a:avLst/>
-          </a:prstGeom>
-          <a:noFill/>
-          <a:ln/>
-        </p:spPr>
-        <p:txBody>
-          <a:bodyPr wrap="square" lIns="0" tIns="0" rIns="0" bIns="0" rtlCol="0" anchor="t"/>
-          <a:lstStyle/>
-          <a:p>
-            <a:pPr indent="0" marL="0">
-              <a:buNone/>
-            </a:pPr>
-            <a:r>
-              <a:rPr lang="en-US" sz="1600" dirty="0">
+              <a:t>Franz Kafka wurde 1883 in Prag geboren. Sein Vater Hermann war ein Kaufmann, der sich aus ärmlichen Verhältnissen hochgearbeitet hatte. Er erwartete von seinem Sohn, dass er stark, fleißig und dankbar ist. Im November 1919 schrieb der sechsunddreißigjährige Kafka seinem Vater einen Brief, der über hundert handschriftliche Seiten lang ist. Darin versucht er zu erklären, warum er Angst vor ihm hat. Das Besondere daran ist, dass er schreibt, weil er mit seinem Vater nicht reden kann. Kafka gab den Brief seiner Mutter, damit sie ihn weitergibt. Sie tat das aber nicht, sodass der Vater ihn nie gelesen hat. Veröffentlicht wurde der Brief erst nach Kafkas Tod.</a:t>
+            </a:r>
+            <a:endParaRPr lang="en-US" sz="2300" dirty="0"/>
+          </a:p>
+        </p:txBody>
+      </p:sp>
+      <p:sp>
+        <p:nvSpPr>
+          <p:cNvPr id="6" name="Shape 4"/>
+          <p:cNvSpPr/>
+          <p:nvPr/>
+        </p:nvSpPr>
+        <p:spPr>
+          <a:xfrm>
+            <a:off x="548640" y="5989320"/>
+            <a:ext cx="11064240" cy="548640"/>
+          </a:xfrm>
+          <a:prstGeom prst="roundRect">
+            <a:avLst>
+              <a:gd name="adj" fmla="val 13333"/>
+            </a:avLst>
+          </a:prstGeom>
+          <a:solidFill>
+            <a:srgbClr val="EAF0FA"/>
+          </a:solidFill>
+          <a:ln/>
+        </p:spPr>
+      </p:sp>
+      <p:sp>
+        <p:nvSpPr>
+          <p:cNvPr id="7" name="Text 5"/>
+          <p:cNvSpPr txBox="1"/>
+          <p:nvPr/>
+        </p:nvSpPr>
+        <p:spPr>
+          <a:xfrm>
+            <a:off x="777240" y="5989320"/>
+            <a:ext cx="10607040" cy="548640"/>
+          </a:xfrm>
+          <a:prstGeom prst="rect">
+            <a:avLst/>
+          </a:prstGeom>
+          <a:noFill/>
+          <a:ln/>
+        </p:spPr>
+        <p:txBody>
+          <a:bodyPr wrap="square" lIns="0" tIns="0" rIns="0" bIns="0" rtlCol="0" anchor="ctr"/>
+          <a:lstStyle/>
+          <a:p>
+            <a:pPr indent="0" marL="0">
+              <a:buNone/>
+            </a:pPr>
+            <a:r>
+              <a:rPr lang="en-US" sz="1700" b="1" dirty="0">
                 <a:solidFill>
                   <a:srgbClr val="1E2761"/>
                 </a:solidFill>
@@ -3107,703 +4229,9 @@
                 <a:ea typeface="Calibri" pitchFamily="34" charset="-122"/>
                 <a:cs typeface="Calibri" pitchFamily="34" charset="-120"/>
               </a:rPr>
-              <a:t>„dass“ leitet einen Nebensatz ein und lässt sich nicht durch „dieses“ oder „welches“ ersetzen.</a:t>
-            </a:r>
-            <a:endParaRPr lang="en-US" sz="1600" dirty="0"/>
-          </a:p>
-        </p:txBody>
-      </p:sp>
-      <p:sp>
-        <p:nvSpPr>
-          <p:cNvPr id="9" name="Text 7"/>
-          <p:cNvSpPr txBox="1"/>
-          <p:nvPr/>
-        </p:nvSpPr>
-        <p:spPr>
-          <a:xfrm>
-            <a:off x="777240" y="2468880"/>
-            <a:ext cx="4983480" cy="1188720"/>
-          </a:xfrm>
-          <a:prstGeom prst="rect">
-            <a:avLst/>
-          </a:prstGeom>
-          <a:noFill/>
-          <a:ln/>
-        </p:spPr>
-        <p:txBody>
-          <a:bodyPr wrap="square" lIns="0" tIns="0" rIns="0" bIns="0" rtlCol="0" anchor="t"/>
-          <a:lstStyle/>
-          <a:p>
-            <a:pPr indent="0" marL="0">
-              <a:spcAft>
-                <a:spcPts val="300"/>
-              </a:spcAft>
-              <a:buNone/>
-            </a:pPr>
-            <a:r>
-              <a:rPr lang="en-US" sz="1600" i="1" dirty="0">
-                <a:solidFill>
-                  <a:srgbClr val="5B6B8C"/>
-                </a:solidFill>
-                <a:latin typeface="Calibri" pitchFamily="34" charset="0"/>
-                <a:ea typeface="Calibri" pitchFamily="34" charset="-122"/>
-                <a:cs typeface="Calibri" pitchFamily="34" charset="-120"/>
-              </a:rPr>
-              <a:t>… erwartete von seinem Sohn, dass er stark … ist.</a:t>
-            </a:r>
-            <a:endParaRPr lang="en-US" sz="1600" dirty="0"/>
-          </a:p>
-          <a:p>
-            <a:pPr indent="0" marL="0">
-              <a:spcAft>
-                <a:spcPts val="300"/>
-              </a:spcAft>
-              <a:buNone/>
-            </a:pPr>
-            <a:r>
-              <a:rPr lang="en-US" sz="1600" i="1" dirty="0">
-                <a:solidFill>
-                  <a:srgbClr val="5B6B8C"/>
-                </a:solidFill>
-                <a:latin typeface="Calibri" pitchFamily="34" charset="0"/>
-                <a:ea typeface="Calibri" pitchFamily="34" charset="-122"/>
-                <a:cs typeface="Calibri" pitchFamily="34" charset="-120"/>
-              </a:rPr>
-              <a:t>Das Besondere daran ist, dass er schreibt …</a:t>
-            </a:r>
-            <a:endParaRPr lang="en-US" sz="1600" dirty="0"/>
-          </a:p>
-          <a:p>
-            <a:pPr indent="0" marL="0">
-              <a:spcAft>
-                <a:spcPts val="300"/>
-              </a:spcAft>
-              <a:buNone/>
-            </a:pPr>
-            <a:r>
-              <a:rPr lang="en-US" sz="1600" i="1" dirty="0">
-                <a:solidFill>
-                  <a:srgbClr val="5B6B8C"/>
-                </a:solidFill>
-                <a:latin typeface="Calibri" pitchFamily="34" charset="0"/>
-                <a:ea typeface="Calibri" pitchFamily="34" charset="-122"/>
-                <a:cs typeface="Calibri" pitchFamily="34" charset="-120"/>
-              </a:rPr>
-              <a:t>Sie tat das aber nicht …  (das = dieses)</a:t>
-            </a:r>
-            <a:endParaRPr lang="en-US" sz="1600" dirty="0"/>
-          </a:p>
-        </p:txBody>
-      </p:sp>
-      <p:sp>
-        <p:nvSpPr>
-          <p:cNvPr id="10" name="Shape 8"/>
-          <p:cNvSpPr/>
-          <p:nvPr/>
-        </p:nvSpPr>
-        <p:spPr>
-          <a:xfrm>
-            <a:off x="6126480" y="1143000"/>
-            <a:ext cx="5486400" cy="2560320"/>
-          </a:xfrm>
-          <a:prstGeom prst="roundRect">
-            <a:avLst>
-              <a:gd name="adj" fmla="val 2857"/>
-            </a:avLst>
-          </a:prstGeom>
-          <a:solidFill>
-            <a:srgbClr val="F4F7FD"/>
-          </a:solidFill>
-          <a:ln/>
-        </p:spPr>
-      </p:sp>
-      <p:sp>
-        <p:nvSpPr>
-          <p:cNvPr id="11" name="Shape 9"/>
-          <p:cNvSpPr/>
-          <p:nvPr/>
-        </p:nvSpPr>
-        <p:spPr>
-          <a:xfrm>
-            <a:off x="6126480" y="1143000"/>
-            <a:ext cx="128016" cy="2560320"/>
-          </a:xfrm>
-          <a:prstGeom prst="roundRect">
-            <a:avLst>
-              <a:gd name="adj" fmla="val 14286"/>
-            </a:avLst>
-          </a:prstGeom>
-          <a:solidFill>
-            <a:srgbClr val="E8A33D"/>
-          </a:solidFill>
-          <a:ln/>
-        </p:spPr>
-      </p:sp>
-      <p:sp>
-        <p:nvSpPr>
-          <p:cNvPr id="12" name="Text 10"/>
-          <p:cNvSpPr txBox="1"/>
-          <p:nvPr/>
-        </p:nvSpPr>
-        <p:spPr>
-          <a:xfrm>
-            <a:off x="6446520" y="1252728"/>
-            <a:ext cx="5029200" cy="411480"/>
-          </a:xfrm>
-          <a:prstGeom prst="rect">
-            <a:avLst/>
-          </a:prstGeom>
-          <a:noFill/>
-          <a:ln/>
-        </p:spPr>
-        <p:txBody>
-          <a:bodyPr wrap="square" lIns="0" tIns="0" rIns="0" bIns="0" rtlCol="0" anchor="t"/>
-          <a:lstStyle/>
-          <a:p>
-            <a:pPr indent="0" marL="0">
-              <a:buNone/>
-            </a:pPr>
-            <a:r>
-              <a:rPr lang="en-US" sz="2000" b="1" dirty="0">
-                <a:solidFill>
-                  <a:srgbClr val="E8A33D"/>
-                </a:solidFill>
-                <a:latin typeface="Cambria" pitchFamily="34" charset="0"/>
-                <a:ea typeface="Cambria" pitchFamily="34" charset="-122"/>
-                <a:cs typeface="Cambria" pitchFamily="34" charset="-120"/>
-              </a:rPr>
-              <a:t>Komma vor Nebensätzen</a:t>
-            </a:r>
-            <a:endParaRPr lang="en-US" sz="2000" dirty="0"/>
-          </a:p>
-        </p:txBody>
-      </p:sp>
-      <p:sp>
-        <p:nvSpPr>
-          <p:cNvPr id="13" name="Text 11"/>
-          <p:cNvSpPr txBox="1"/>
-          <p:nvPr/>
-        </p:nvSpPr>
-        <p:spPr>
-          <a:xfrm>
-            <a:off x="6446520" y="1691640"/>
-            <a:ext cx="4983480" cy="777240"/>
-          </a:xfrm>
-          <a:prstGeom prst="rect">
-            <a:avLst/>
-          </a:prstGeom>
-          <a:noFill/>
-          <a:ln/>
-        </p:spPr>
-        <p:txBody>
-          <a:bodyPr wrap="square" lIns="0" tIns="0" rIns="0" bIns="0" rtlCol="0" anchor="t"/>
-          <a:lstStyle/>
-          <a:p>
-            <a:pPr indent="0" marL="0">
-              <a:buNone/>
-            </a:pPr>
-            <a:r>
-              <a:rPr lang="en-US" sz="1600" dirty="0">
-                <a:solidFill>
-                  <a:srgbClr val="1E2761"/>
-                </a:solidFill>
-                <a:latin typeface="Calibri" pitchFamily="34" charset="0"/>
-                <a:ea typeface="Calibri" pitchFamily="34" charset="-122"/>
-                <a:cs typeface="Calibri" pitchFamily="34" charset="-120"/>
-              </a:rPr>
-              <a:t>Vor dass, weil, wenn, damit, sodass, warum und vor Relativsätzen (der, die, das) steht ein Komma.</a:t>
-            </a:r>
-            <a:endParaRPr lang="en-US" sz="1600" dirty="0"/>
-          </a:p>
-        </p:txBody>
-      </p:sp>
-      <p:sp>
-        <p:nvSpPr>
-          <p:cNvPr id="14" name="Text 12"/>
-          <p:cNvSpPr txBox="1"/>
-          <p:nvPr/>
-        </p:nvSpPr>
-        <p:spPr>
-          <a:xfrm>
-            <a:off x="6446520" y="2468880"/>
-            <a:ext cx="4983480" cy="1188720"/>
-          </a:xfrm>
-          <a:prstGeom prst="rect">
-            <a:avLst/>
-          </a:prstGeom>
-          <a:noFill/>
-          <a:ln/>
-        </p:spPr>
-        <p:txBody>
-          <a:bodyPr wrap="square" lIns="0" tIns="0" rIns="0" bIns="0" rtlCol="0" anchor="t"/>
-          <a:lstStyle/>
-          <a:p>
-            <a:pPr indent="0" marL="0">
-              <a:spcAft>
-                <a:spcPts val="300"/>
-              </a:spcAft>
-              <a:buNone/>
-            </a:pPr>
-            <a:r>
-              <a:rPr lang="en-US" sz="1600" i="1" dirty="0">
-                <a:solidFill>
-                  <a:srgbClr val="5B6B8C"/>
-                </a:solidFill>
-                <a:latin typeface="Calibri" pitchFamily="34" charset="0"/>
-                <a:ea typeface="Calibri" pitchFamily="34" charset="-122"/>
-                <a:cs typeface="Calibri" pitchFamily="34" charset="-120"/>
-              </a:rPr>
-              <a:t>… einen Brief, der über hundert … Seiten lang ist.</a:t>
-            </a:r>
-            <a:endParaRPr lang="en-US" sz="1600" dirty="0"/>
-          </a:p>
-          <a:p>
-            <a:pPr indent="0" marL="0">
-              <a:spcAft>
-                <a:spcPts val="300"/>
-              </a:spcAft>
-              <a:buNone/>
-            </a:pPr>
-            <a:r>
-              <a:rPr lang="en-US" sz="1600" i="1" dirty="0">
-                <a:solidFill>
-                  <a:srgbClr val="5B6B8C"/>
-                </a:solidFill>
-                <a:latin typeface="Calibri" pitchFamily="34" charset="0"/>
-                <a:ea typeface="Calibri" pitchFamily="34" charset="-122"/>
-                <a:cs typeface="Calibri" pitchFamily="34" charset="-120"/>
-              </a:rPr>
-              <a:t>… zu erklären, warum er Angst vor ihm hat.</a:t>
-            </a:r>
-            <a:endParaRPr lang="en-US" sz="1600" dirty="0"/>
-          </a:p>
-          <a:p>
-            <a:pPr indent="0" marL="0">
-              <a:spcAft>
-                <a:spcPts val="300"/>
-              </a:spcAft>
-              <a:buNone/>
-            </a:pPr>
-            <a:r>
-              <a:rPr lang="en-US" sz="1600" i="1" dirty="0">
-                <a:solidFill>
-                  <a:srgbClr val="5B6B8C"/>
-                </a:solidFill>
-                <a:latin typeface="Calibri" pitchFamily="34" charset="0"/>
-                <a:ea typeface="Calibri" pitchFamily="34" charset="-122"/>
-                <a:cs typeface="Calibri" pitchFamily="34" charset="-120"/>
-              </a:rPr>
-              <a:t>… der Mutter, damit sie ihn weitergibt.</a:t>
-            </a:r>
-            <a:endParaRPr lang="en-US" sz="1600" dirty="0"/>
-          </a:p>
-        </p:txBody>
-      </p:sp>
-      <p:sp>
-        <p:nvSpPr>
-          <p:cNvPr id="15" name="Shape 13"/>
-          <p:cNvSpPr/>
-          <p:nvPr/>
-        </p:nvSpPr>
-        <p:spPr>
-          <a:xfrm>
-            <a:off x="457200" y="3840480"/>
-            <a:ext cx="5486400" cy="2560320"/>
-          </a:xfrm>
-          <a:prstGeom prst="roundRect">
-            <a:avLst>
-              <a:gd name="adj" fmla="val 2857"/>
-            </a:avLst>
-          </a:prstGeom>
-          <a:solidFill>
-            <a:srgbClr val="F4F7FD"/>
-          </a:solidFill>
-          <a:ln/>
-        </p:spPr>
-      </p:sp>
-      <p:sp>
-        <p:nvSpPr>
-          <p:cNvPr id="16" name="Shape 14"/>
-          <p:cNvSpPr/>
-          <p:nvPr/>
-        </p:nvSpPr>
-        <p:spPr>
-          <a:xfrm>
-            <a:off x="457200" y="3840480"/>
-            <a:ext cx="128016" cy="2560320"/>
-          </a:xfrm>
-          <a:prstGeom prst="roundRect">
-            <a:avLst>
-              <a:gd name="adj" fmla="val 14286"/>
-            </a:avLst>
-          </a:prstGeom>
-          <a:solidFill>
-            <a:srgbClr val="2E9E6B"/>
-          </a:solidFill>
-          <a:ln/>
-        </p:spPr>
-      </p:sp>
-      <p:sp>
-        <p:nvSpPr>
-          <p:cNvPr id="17" name="Text 15"/>
-          <p:cNvSpPr txBox="1"/>
-          <p:nvPr/>
-        </p:nvSpPr>
-        <p:spPr>
-          <a:xfrm>
-            <a:off x="777240" y="3950208"/>
-            <a:ext cx="5029200" cy="411480"/>
-          </a:xfrm>
-          <a:prstGeom prst="rect">
-            <a:avLst/>
-          </a:prstGeom>
-          <a:noFill/>
-          <a:ln/>
-        </p:spPr>
-        <p:txBody>
-          <a:bodyPr wrap="square" lIns="0" tIns="0" rIns="0" bIns="0" rtlCol="0" anchor="t"/>
-          <a:lstStyle/>
-          <a:p>
-            <a:pPr indent="0" marL="0">
-              <a:buNone/>
-            </a:pPr>
-            <a:r>
-              <a:rPr lang="en-US" sz="2000" b="1" dirty="0">
-                <a:solidFill>
-                  <a:srgbClr val="2E9E6B"/>
-                </a:solidFill>
-                <a:latin typeface="Cambria" pitchFamily="34" charset="0"/>
-                <a:ea typeface="Cambria" pitchFamily="34" charset="-122"/>
-                <a:cs typeface="Cambria" pitchFamily="34" charset="-120"/>
-              </a:rPr>
-              <a:t>Groß oder klein?</a:t>
-            </a:r>
-            <a:endParaRPr lang="en-US" sz="2000" dirty="0"/>
-          </a:p>
-        </p:txBody>
-      </p:sp>
-      <p:sp>
-        <p:nvSpPr>
-          <p:cNvPr id="18" name="Text 16"/>
-          <p:cNvSpPr txBox="1"/>
-          <p:nvPr/>
-        </p:nvSpPr>
-        <p:spPr>
-          <a:xfrm>
-            <a:off x="777240" y="4389120"/>
-            <a:ext cx="4983480" cy="777240"/>
-          </a:xfrm>
-          <a:prstGeom prst="rect">
-            <a:avLst/>
-          </a:prstGeom>
-          <a:noFill/>
-          <a:ln/>
-        </p:spPr>
-        <p:txBody>
-          <a:bodyPr wrap="square" lIns="0" tIns="0" rIns="0" bIns="0" rtlCol="0" anchor="t"/>
-          <a:lstStyle/>
-          <a:p>
-            <a:pPr indent="0" marL="0">
-              <a:buNone/>
-            </a:pPr>
-            <a:r>
-              <a:rPr lang="en-US" sz="1600" dirty="0">
-                <a:solidFill>
-                  <a:srgbClr val="1E2761"/>
-                </a:solidFill>
-                <a:latin typeface="Calibri" pitchFamily="34" charset="0"/>
-                <a:ea typeface="Calibri" pitchFamily="34" charset="-122"/>
-                <a:cs typeface="Calibri" pitchFamily="34" charset="-120"/>
-              </a:rPr>
-              <a:t>Nominalisierte Adjektive groß, Zahlwörter und Zahladjektive klein und zusammen.</a:t>
-            </a:r>
-            <a:endParaRPr lang="en-US" sz="1600" dirty="0"/>
-          </a:p>
-        </p:txBody>
-      </p:sp>
-      <p:sp>
-        <p:nvSpPr>
-          <p:cNvPr id="19" name="Text 17"/>
-          <p:cNvSpPr txBox="1"/>
-          <p:nvPr/>
-        </p:nvSpPr>
-        <p:spPr>
-          <a:xfrm>
-            <a:off x="777240" y="5166360"/>
-            <a:ext cx="4983480" cy="1188720"/>
-          </a:xfrm>
-          <a:prstGeom prst="rect">
-            <a:avLst/>
-          </a:prstGeom>
-          <a:noFill/>
-          <a:ln/>
-        </p:spPr>
-        <p:txBody>
-          <a:bodyPr wrap="square" lIns="0" tIns="0" rIns="0" bIns="0" rtlCol="0" anchor="t"/>
-          <a:lstStyle/>
-          <a:p>
-            <a:pPr indent="0" marL="0">
-              <a:spcAft>
-                <a:spcPts val="300"/>
-              </a:spcAft>
-              <a:buNone/>
-            </a:pPr>
-            <a:r>
-              <a:rPr lang="en-US" sz="1600" i="1" dirty="0">
-                <a:solidFill>
-                  <a:srgbClr val="5B6B8C"/>
-                </a:solidFill>
-                <a:latin typeface="Calibri" pitchFamily="34" charset="0"/>
-                <a:ea typeface="Calibri" pitchFamily="34" charset="-122"/>
-                <a:cs typeface="Calibri" pitchFamily="34" charset="-120"/>
-              </a:rPr>
-              <a:t>groß: das Besondere</a:t>
-            </a:r>
-            <a:endParaRPr lang="en-US" sz="1600" dirty="0"/>
-          </a:p>
-          <a:p>
-            <a:pPr indent="0" marL="0">
-              <a:spcAft>
-                <a:spcPts val="300"/>
-              </a:spcAft>
-              <a:buNone/>
-            </a:pPr>
-            <a:r>
-              <a:rPr lang="en-US" sz="1600" i="1" dirty="0">
-                <a:solidFill>
-                  <a:srgbClr val="5B6B8C"/>
-                </a:solidFill>
-                <a:latin typeface="Calibri" pitchFamily="34" charset="0"/>
-                <a:ea typeface="Calibri" pitchFamily="34" charset="-122"/>
-                <a:cs typeface="Calibri" pitchFamily="34" charset="-120"/>
-              </a:rPr>
-              <a:t>klein: der sechsunddreißigjährige Kafka</a:t>
-            </a:r>
-            <a:endParaRPr lang="en-US" sz="1600" dirty="0"/>
-          </a:p>
-          <a:p>
-            <a:pPr indent="0" marL="0">
-              <a:spcAft>
-                <a:spcPts val="300"/>
-              </a:spcAft>
-              <a:buNone/>
-            </a:pPr>
-            <a:r>
-              <a:rPr lang="en-US" sz="1600" i="1" dirty="0">
-                <a:solidFill>
-                  <a:srgbClr val="5B6B8C"/>
-                </a:solidFill>
-                <a:latin typeface="Calibri" pitchFamily="34" charset="0"/>
-                <a:ea typeface="Calibri" pitchFamily="34" charset="-122"/>
-                <a:cs typeface="Calibri" pitchFamily="34" charset="-120"/>
-              </a:rPr>
-              <a:t>klein: über hundert Seiten  ·  einer … der andere</a:t>
-            </a:r>
-            <a:endParaRPr lang="en-US" sz="1600" dirty="0"/>
-          </a:p>
-        </p:txBody>
-      </p:sp>
-      <p:sp>
-        <p:nvSpPr>
-          <p:cNvPr id="20" name="Shape 18"/>
-          <p:cNvSpPr/>
-          <p:nvPr/>
-        </p:nvSpPr>
-        <p:spPr>
-          <a:xfrm>
-            <a:off x="6126480" y="3840480"/>
-            <a:ext cx="5486400" cy="2560320"/>
-          </a:xfrm>
-          <a:prstGeom prst="roundRect">
-            <a:avLst>
-              <a:gd name="adj" fmla="val 2857"/>
-            </a:avLst>
-          </a:prstGeom>
-          <a:solidFill>
-            <a:srgbClr val="F4F7FD"/>
-          </a:solidFill>
-          <a:ln/>
-        </p:spPr>
-      </p:sp>
-      <p:sp>
-        <p:nvSpPr>
-          <p:cNvPr id="21" name="Shape 19"/>
-          <p:cNvSpPr/>
-          <p:nvPr/>
-        </p:nvSpPr>
-        <p:spPr>
-          <a:xfrm>
-            <a:off x="6126480" y="3840480"/>
-            <a:ext cx="128016" cy="2560320"/>
-          </a:xfrm>
-          <a:prstGeom prst="roundRect">
-            <a:avLst>
-              <a:gd name="adj" fmla="val 14286"/>
-            </a:avLst>
-          </a:prstGeom>
-          <a:solidFill>
-            <a:srgbClr val="3F7CC4"/>
-          </a:solidFill>
-          <a:ln/>
-        </p:spPr>
-      </p:sp>
-      <p:sp>
-        <p:nvSpPr>
-          <p:cNvPr id="22" name="Text 20"/>
-          <p:cNvSpPr txBox="1"/>
-          <p:nvPr/>
-        </p:nvSpPr>
-        <p:spPr>
-          <a:xfrm>
-            <a:off x="6446520" y="3950208"/>
-            <a:ext cx="5029200" cy="411480"/>
-          </a:xfrm>
-          <a:prstGeom prst="rect">
-            <a:avLst/>
-          </a:prstGeom>
-          <a:noFill/>
-          <a:ln/>
-        </p:spPr>
-        <p:txBody>
-          <a:bodyPr wrap="square" lIns="0" tIns="0" rIns="0" bIns="0" rtlCol="0" anchor="t"/>
-          <a:lstStyle/>
-          <a:p>
-            <a:pPr indent="0" marL="0">
-              <a:buNone/>
-            </a:pPr>
-            <a:r>
-              <a:rPr lang="en-US" sz="2000" b="1" dirty="0">
-                <a:solidFill>
-                  <a:srgbClr val="3F7CC4"/>
-                </a:solidFill>
-                <a:latin typeface="Cambria" pitchFamily="34" charset="0"/>
-                <a:ea typeface="Cambria" pitchFamily="34" charset="-122"/>
-                <a:cs typeface="Cambria" pitchFamily="34" charset="-120"/>
-              </a:rPr>
-              <a:t>Fachwörter</a:t>
-            </a:r>
-            <a:endParaRPr lang="en-US" sz="2000" dirty="0"/>
-          </a:p>
-        </p:txBody>
-      </p:sp>
-      <p:sp>
-        <p:nvSpPr>
-          <p:cNvPr id="23" name="Text 21"/>
-          <p:cNvSpPr txBox="1"/>
-          <p:nvPr/>
-        </p:nvSpPr>
-        <p:spPr>
-          <a:xfrm>
-            <a:off x="6446520" y="4389120"/>
-            <a:ext cx="4983480" cy="777240"/>
-          </a:xfrm>
-          <a:prstGeom prst="rect">
-            <a:avLst/>
-          </a:prstGeom>
-          <a:noFill/>
-          <a:ln/>
-        </p:spPr>
-        <p:txBody>
-          <a:bodyPr wrap="square" lIns="0" tIns="0" rIns="0" bIns="0" rtlCol="0" anchor="t"/>
-          <a:lstStyle/>
-          <a:p>
-            <a:pPr indent="0" marL="0">
-              <a:buNone/>
-            </a:pPr>
-            <a:r>
-              <a:rPr lang="en-US" sz="1600" dirty="0">
-                <a:solidFill>
-                  <a:srgbClr val="1E2761"/>
-                </a:solidFill>
-                <a:latin typeface="Calibri" pitchFamily="34" charset="0"/>
-                <a:ea typeface="Calibri" pitchFamily="34" charset="-122"/>
-                <a:cs typeface="Calibri" pitchFamily="34" charset="-120"/>
-              </a:rPr>
-              <a:t>Diese Wörter müssen sitzen – sie kommen in jeder Analyse vor.</a:t>
-            </a:r>
-            <a:endParaRPr lang="en-US" sz="1600" dirty="0"/>
-          </a:p>
-        </p:txBody>
-      </p:sp>
-      <p:sp>
-        <p:nvSpPr>
-          <p:cNvPr id="24" name="Text 22"/>
-          <p:cNvSpPr txBox="1"/>
-          <p:nvPr/>
-        </p:nvSpPr>
-        <p:spPr>
-          <a:xfrm>
-            <a:off x="6446520" y="5166360"/>
-            <a:ext cx="4983480" cy="1188720"/>
-          </a:xfrm>
-          <a:prstGeom prst="rect">
-            <a:avLst/>
-          </a:prstGeom>
-          <a:noFill/>
-          <a:ln/>
-        </p:spPr>
-        <p:txBody>
-          <a:bodyPr wrap="square" lIns="0" tIns="0" rIns="0" bIns="0" rtlCol="0" anchor="t"/>
-          <a:lstStyle/>
-          <a:p>
-            <a:pPr indent="0" marL="0">
-              <a:spcAft>
-                <a:spcPts val="300"/>
-              </a:spcAft>
-              <a:buNone/>
-            </a:pPr>
-            <a:r>
-              <a:rPr lang="en-US" sz="1600" i="1" dirty="0">
-                <a:solidFill>
-                  <a:srgbClr val="5B6B8C"/>
-                </a:solidFill>
-                <a:latin typeface="Calibri" pitchFamily="34" charset="0"/>
-                <a:ea typeface="Calibri" pitchFamily="34" charset="-122"/>
-                <a:cs typeface="Calibri" pitchFamily="34" charset="-120"/>
-              </a:rPr>
-              <a:t>symmetrisch  ·  komplementär</a:t>
-            </a:r>
-            <a:endParaRPr lang="en-US" sz="1600" dirty="0"/>
-          </a:p>
-          <a:p>
-            <a:pPr indent="0" marL="0">
-              <a:spcAft>
-                <a:spcPts val="300"/>
-              </a:spcAft>
-              <a:buNone/>
-            </a:pPr>
-            <a:r>
-              <a:rPr lang="en-US" sz="1600" i="1" dirty="0">
-                <a:solidFill>
-                  <a:srgbClr val="5B6B8C"/>
-                </a:solidFill>
-                <a:latin typeface="Calibri" pitchFamily="34" charset="0"/>
-                <a:ea typeface="Calibri" pitchFamily="34" charset="-122"/>
-                <a:cs typeface="Calibri" pitchFamily="34" charset="-120"/>
-              </a:rPr>
-              <a:t>Generationenkonflikt  ·  Watzlawick</a:t>
-            </a:r>
-            <a:endParaRPr lang="en-US" sz="1600" dirty="0"/>
-          </a:p>
-          <a:p>
-            <a:pPr indent="0" marL="0">
-              <a:spcAft>
-                <a:spcPts val="300"/>
-              </a:spcAft>
-              <a:buNone/>
-            </a:pPr>
-            <a:r>
-              <a:rPr lang="en-US" sz="1600" i="1" dirty="0">
-                <a:solidFill>
-                  <a:srgbClr val="5B6B8C"/>
-                </a:solidFill>
-                <a:latin typeface="Calibri" pitchFamily="34" charset="0"/>
-                <a:ea typeface="Calibri" pitchFamily="34" charset="-122"/>
-                <a:cs typeface="Calibri" pitchFamily="34" charset="-120"/>
-              </a:rPr>
-              <a:t>handschriftlich  ·  veröffentlicht</a:t>
-            </a:r>
-            <a:endParaRPr lang="en-US" sz="1600" dirty="0"/>
+              <a:t>Fehler farbig anstreichen · Anzahl notieren · Kommafehler extra zählen</a:t>
+            </a:r>
+            <a:endParaRPr lang="en-US" sz="1700" dirty="0"/>
           </a:p>
         </p:txBody>
       </p:sp>
@@ -3892,7 +4320,7 @@
                 <a:ea typeface="Calibri" pitchFamily="34" charset="-122"/>
                 <a:cs typeface="Calibri" pitchFamily="34" charset="-120"/>
               </a:rPr>
-              <a:t>ABSCHNITT A · GEMEINSAM · MATRIX IN DEN HEFTER</a:t>
+              <a:t>DIKTAT · SELBSTKONTROLLE · TEIL 2 · FACHBEGRIFFE</a:t>
             </a:r>
             <a:endParaRPr lang="en-US" sz="1300" dirty="0"/>
           </a:p>
@@ -3931,7 +4359,7 @@
                 <a:ea typeface="Cambria" pitchFamily="34" charset="-122"/>
                 <a:cs typeface="Cambria" pitchFamily="34" charset="-120"/>
               </a:rPr>
-              <a:t>„ich verlernte das Reden“ (S. 5 f.)</a:t>
+              <a:t>Vergleiche Wort für Wort</a:t>
             </a:r>
             <a:endParaRPr lang="en-US" sz="2700" dirty="0"/>
           </a:p>
@@ -3945,8 +4373,72 @@
         </p:nvSpPr>
         <p:spPr>
           <a:xfrm>
-            <a:off x="365760" y="1143000"/>
-            <a:ext cx="411480" cy="335280"/>
+            <a:off x="548640" y="1188720"/>
+            <a:ext cx="11064240" cy="4663440"/>
+          </a:xfrm>
+          <a:prstGeom prst="rect">
+            <a:avLst/>
+          </a:prstGeom>
+          <a:noFill/>
+          <a:ln/>
+        </p:spPr>
+        <p:txBody>
+          <a:bodyPr wrap="square" lIns="0" tIns="0" rIns="0" bIns="0" rtlCol="0" anchor="t"/>
+          <a:lstStyle/>
+          <a:p>
+            <a:pPr indent="0" marL="0">
+              <a:lnSpc>
+                <a:spcPct val="125000"/>
+              </a:lnSpc>
+              <a:buNone/>
+            </a:pPr>
+            <a:r>
+              <a:rPr lang="en-US" sz="2400" dirty="0">
+                <a:solidFill>
+                  <a:srgbClr val="1E2761"/>
+                </a:solidFill>
+                <a:latin typeface="Cambria" pitchFamily="34" charset="0"/>
+                <a:ea typeface="Cambria" pitchFamily="34" charset="-122"/>
+                <a:cs typeface="Cambria" pitchFamily="34" charset="-120"/>
+              </a:rPr>
+              <a:t>Nach Paul Watzlawick ist zwischenmenschliche Kommunikation entweder symmetrisch oder komplementär. Symmetrisch ist sie, wenn die Beziehung auf Gleichheit beruht und beide Partner auf derselben Stufe stehen. Komplementär ist sie, wenn die Beziehung auf Unterschiedlichkeit beruht: Einer ist überlegen, der andere ist unterlegen. Wird dieses Verhältnis so starr, dass niemand die Rolle wechseln kann, ist kein Gespräch auf Augenhöhe mehr möglich. Von einem Generationenkonflikt spricht man, wenn Eltern und Kinder unterschiedliche Werte, Erfahrungen und Erwartungen haben und sich deshalb nicht verstehen.</a:t>
+            </a:r>
+            <a:endParaRPr lang="en-US" sz="2400" dirty="0"/>
+          </a:p>
+        </p:txBody>
+      </p:sp>
+      <p:sp>
+        <p:nvSpPr>
+          <p:cNvPr id="6" name="Shape 4"/>
+          <p:cNvSpPr/>
+          <p:nvPr/>
+        </p:nvSpPr>
+        <p:spPr>
+          <a:xfrm>
+            <a:off x="548640" y="5989320"/>
+            <a:ext cx="11064240" cy="548640"/>
+          </a:xfrm>
+          <a:prstGeom prst="roundRect">
+            <a:avLst>
+              <a:gd name="adj" fmla="val 13333"/>
+            </a:avLst>
+          </a:prstGeom>
+          <a:solidFill>
+            <a:srgbClr val="EAF0FA"/>
+          </a:solidFill>
+          <a:ln/>
+        </p:spPr>
+      </p:sp>
+      <p:sp>
+        <p:nvSpPr>
+          <p:cNvPr id="7" name="Text 5"/>
+          <p:cNvSpPr txBox="1"/>
+          <p:nvPr/>
+        </p:nvSpPr>
+        <p:spPr>
+          <a:xfrm>
+            <a:off x="777240" y="5989320"/>
+            <a:ext cx="10607040" cy="548640"/>
           </a:xfrm>
           <a:prstGeom prst="rect">
             <a:avLst/>
@@ -3958,1255 +4450,23 @@
           <a:bodyPr wrap="square" lIns="0" tIns="0" rIns="0" bIns="0" rtlCol="0" anchor="ctr"/>
           <a:lstStyle/>
           <a:p>
-            <a:pPr algn="r" indent="0" marL="0">
-              <a:buNone/>
-            </a:pPr>
-            <a:r>
-              <a:rPr lang="en-US" sz="1500" dirty="0">
-                <a:solidFill>
-                  <a:srgbClr val="5B6B8C"/>
+            <a:pPr indent="0" marL="0">
+              <a:buNone/>
+            </a:pPr>
+            <a:r>
+              <a:rPr lang="en-US" sz="1700" b="1" dirty="0">
+                <a:solidFill>
+                  <a:srgbClr val="1E2761"/>
                 </a:solidFill>
                 <a:latin typeface="Calibri" pitchFamily="34" charset="0"/>
                 <a:ea typeface="Calibri" pitchFamily="34" charset="-122"/>
                 <a:cs typeface="Calibri" pitchFamily="34" charset="-120"/>
               </a:rPr>
-              <a:t>1</a:t>
-            </a:r>
-            <a:endParaRPr lang="en-US" sz="1500" dirty="0"/>
-          </a:p>
-        </p:txBody>
-      </p:sp>
-      <p:sp>
-        <p:nvSpPr>
-          <p:cNvPr id="6" name="Text 4"/>
-          <p:cNvSpPr txBox="1"/>
-          <p:nvPr/>
-        </p:nvSpPr>
-        <p:spPr>
-          <a:xfrm>
-            <a:off x="914400" y="1143000"/>
-            <a:ext cx="10972800" cy="335280"/>
-          </a:xfrm>
-          <a:prstGeom prst="rect">
-            <a:avLst/>
-          </a:prstGeom>
-          <a:noFill/>
-          <a:ln/>
-        </p:spPr>
-        <p:txBody>
-          <a:bodyPr wrap="square" lIns="0" tIns="0" rIns="0" bIns="0" rtlCol="0" anchor="ctr"/>
-          <a:lstStyle/>
-          <a:p>
-            <a:pPr indent="0" marL="0">
-              <a:buNone/>
-            </a:pPr>
-            <a:r>
-              <a:rPr lang="en-US" sz="2000" dirty="0">
-                <a:solidFill>
-                  <a:srgbClr val="1E2761"/>
-                </a:solidFill>
-                <a:latin typeface="Cambria" pitchFamily="34" charset="0"/>
-                <a:ea typeface="Cambria" pitchFamily="34" charset="-122"/>
-                <a:cs typeface="Cambria" pitchFamily="34" charset="-120"/>
-              </a:rPr>
-              <a:t>Die Unmöglichkeit des ruhigen Verkehrs hatte noch eine weitere eigentlich sehr</a:t>
-            </a:r>
-            <a:endParaRPr lang="en-US" sz="2000" dirty="0"/>
-          </a:p>
-        </p:txBody>
-      </p:sp>
-      <p:sp>
-        <p:nvSpPr>
-          <p:cNvPr id="7" name="Text 5"/>
-          <p:cNvSpPr txBox="1"/>
-          <p:nvPr/>
-        </p:nvSpPr>
-        <p:spPr>
-          <a:xfrm>
-            <a:off x="365760" y="1478280"/>
-            <a:ext cx="411480" cy="335280"/>
-          </a:xfrm>
-          <a:prstGeom prst="rect">
-            <a:avLst/>
-          </a:prstGeom>
-          <a:noFill/>
-          <a:ln/>
-        </p:spPr>
-        <p:txBody>
-          <a:bodyPr wrap="square" lIns="0" tIns="0" rIns="0" bIns="0" rtlCol="0" anchor="ctr"/>
-          <a:lstStyle/>
-          <a:p>
-            <a:pPr algn="r" indent="0" marL="0">
-              <a:buNone/>
-            </a:pPr>
-            <a:r>
-              <a:rPr lang="en-US" sz="1500" dirty="0">
-                <a:solidFill>
-                  <a:srgbClr val="5B6B8C"/>
-                </a:solidFill>
-                <a:latin typeface="Calibri" pitchFamily="34" charset="0"/>
-                <a:ea typeface="Calibri" pitchFamily="34" charset="-122"/>
-                <a:cs typeface="Calibri" pitchFamily="34" charset="-120"/>
-              </a:rPr>
-              <a:t>2</a:t>
-            </a:r>
-            <a:endParaRPr lang="en-US" sz="1500" dirty="0"/>
-          </a:p>
-        </p:txBody>
-      </p:sp>
-      <p:sp>
-        <p:nvSpPr>
-          <p:cNvPr id="8" name="Text 6"/>
-          <p:cNvSpPr txBox="1"/>
-          <p:nvPr/>
-        </p:nvSpPr>
-        <p:spPr>
-          <a:xfrm>
-            <a:off x="914400" y="1478280"/>
-            <a:ext cx="10972800" cy="335280"/>
-          </a:xfrm>
-          <a:prstGeom prst="rect">
-            <a:avLst/>
-          </a:prstGeom>
-          <a:noFill/>
-          <a:ln/>
-        </p:spPr>
-        <p:txBody>
-          <a:bodyPr wrap="square" lIns="0" tIns="0" rIns="0" bIns="0" rtlCol="0" anchor="ctr"/>
-          <a:lstStyle/>
-          <a:p>
-            <a:pPr indent="0" marL="0">
-              <a:buNone/>
-            </a:pPr>
-            <a:r>
-              <a:rPr lang="en-US" sz="2000" dirty="0">
-                <a:solidFill>
-                  <a:srgbClr val="1E2761"/>
-                </a:solidFill>
-                <a:latin typeface="Cambria" pitchFamily="34" charset="0"/>
-                <a:ea typeface="Cambria" pitchFamily="34" charset="-122"/>
-                <a:cs typeface="Cambria" pitchFamily="34" charset="-120"/>
-              </a:rPr>
-              <a:t>natürliche Folge: ich verlernte das Reden. Ich wäre ja wohl auch sonst kein</a:t>
-            </a:r>
-            <a:endParaRPr lang="en-US" sz="2000" dirty="0"/>
-          </a:p>
-        </p:txBody>
-      </p:sp>
-      <p:sp>
-        <p:nvSpPr>
-          <p:cNvPr id="9" name="Text 7"/>
-          <p:cNvSpPr txBox="1"/>
-          <p:nvPr/>
-        </p:nvSpPr>
-        <p:spPr>
-          <a:xfrm>
-            <a:off x="365760" y="1813560"/>
-            <a:ext cx="411480" cy="335280"/>
-          </a:xfrm>
-          <a:prstGeom prst="rect">
-            <a:avLst/>
-          </a:prstGeom>
-          <a:noFill/>
-          <a:ln/>
-        </p:spPr>
-        <p:txBody>
-          <a:bodyPr wrap="square" lIns="0" tIns="0" rIns="0" bIns="0" rtlCol="0" anchor="ctr"/>
-          <a:lstStyle/>
-          <a:p>
-            <a:pPr algn="r" indent="0" marL="0">
-              <a:buNone/>
-            </a:pPr>
-            <a:r>
-              <a:rPr lang="en-US" sz="1500" dirty="0">
-                <a:solidFill>
-                  <a:srgbClr val="5B6B8C"/>
-                </a:solidFill>
-                <a:latin typeface="Calibri" pitchFamily="34" charset="0"/>
-                <a:ea typeface="Calibri" pitchFamily="34" charset="-122"/>
-                <a:cs typeface="Calibri" pitchFamily="34" charset="-120"/>
-              </a:rPr>
-              <a:t>3</a:t>
-            </a:r>
-            <a:endParaRPr lang="en-US" sz="1500" dirty="0"/>
-          </a:p>
-        </p:txBody>
-      </p:sp>
-      <p:sp>
-        <p:nvSpPr>
-          <p:cNvPr id="10" name="Text 8"/>
-          <p:cNvSpPr txBox="1"/>
-          <p:nvPr/>
-        </p:nvSpPr>
-        <p:spPr>
-          <a:xfrm>
-            <a:off x="914400" y="1813560"/>
-            <a:ext cx="10972800" cy="335280"/>
-          </a:xfrm>
-          <a:prstGeom prst="rect">
-            <a:avLst/>
-          </a:prstGeom>
-          <a:noFill/>
-          <a:ln/>
-        </p:spPr>
-        <p:txBody>
-          <a:bodyPr wrap="square" lIns="0" tIns="0" rIns="0" bIns="0" rtlCol="0" anchor="ctr"/>
-          <a:lstStyle/>
-          <a:p>
-            <a:pPr indent="0" marL="0">
-              <a:buNone/>
-            </a:pPr>
-            <a:r>
-              <a:rPr lang="en-US" sz="2000" dirty="0">
-                <a:solidFill>
-                  <a:srgbClr val="1E2761"/>
-                </a:solidFill>
-                <a:latin typeface="Cambria" pitchFamily="34" charset="0"/>
-                <a:ea typeface="Cambria" pitchFamily="34" charset="-122"/>
-                <a:cs typeface="Cambria" pitchFamily="34" charset="-120"/>
-              </a:rPr>
-              <a:t>großer Redner geworden, aber die gewöhnlich fließende menschliche Sprache</a:t>
-            </a:r>
-            <a:endParaRPr lang="en-US" sz="2000" dirty="0"/>
-          </a:p>
-        </p:txBody>
-      </p:sp>
-      <p:sp>
-        <p:nvSpPr>
-          <p:cNvPr id="11" name="Text 9"/>
-          <p:cNvSpPr txBox="1"/>
-          <p:nvPr/>
-        </p:nvSpPr>
-        <p:spPr>
-          <a:xfrm>
-            <a:off x="365760" y="2148840"/>
-            <a:ext cx="411480" cy="335280"/>
-          </a:xfrm>
-          <a:prstGeom prst="rect">
-            <a:avLst/>
-          </a:prstGeom>
-          <a:noFill/>
-          <a:ln/>
-        </p:spPr>
-        <p:txBody>
-          <a:bodyPr wrap="square" lIns="0" tIns="0" rIns="0" bIns="0" rtlCol="0" anchor="ctr"/>
-          <a:lstStyle/>
-          <a:p>
-            <a:pPr algn="r" indent="0" marL="0">
-              <a:buNone/>
-            </a:pPr>
-            <a:r>
-              <a:rPr lang="en-US" sz="1500" dirty="0">
-                <a:solidFill>
-                  <a:srgbClr val="5B6B8C"/>
-                </a:solidFill>
-                <a:latin typeface="Calibri" pitchFamily="34" charset="0"/>
-                <a:ea typeface="Calibri" pitchFamily="34" charset="-122"/>
-                <a:cs typeface="Calibri" pitchFamily="34" charset="-120"/>
-              </a:rPr>
-              <a:t>4</a:t>
-            </a:r>
-            <a:endParaRPr lang="en-US" sz="1500" dirty="0"/>
-          </a:p>
-        </p:txBody>
-      </p:sp>
-      <p:sp>
-        <p:nvSpPr>
-          <p:cNvPr id="12" name="Text 10"/>
-          <p:cNvSpPr txBox="1"/>
-          <p:nvPr/>
-        </p:nvSpPr>
-        <p:spPr>
-          <a:xfrm>
-            <a:off x="914400" y="2148840"/>
-            <a:ext cx="10972800" cy="335280"/>
-          </a:xfrm>
-          <a:prstGeom prst="rect">
-            <a:avLst/>
-          </a:prstGeom>
-          <a:noFill/>
-          <a:ln/>
-        </p:spPr>
-        <p:txBody>
-          <a:bodyPr wrap="square" lIns="0" tIns="0" rIns="0" bIns="0" rtlCol="0" anchor="ctr"/>
-          <a:lstStyle/>
-          <a:p>
-            <a:pPr indent="0" marL="0">
-              <a:buNone/>
-            </a:pPr>
-            <a:r>
-              <a:rPr lang="en-US" sz="2000" dirty="0">
-                <a:solidFill>
-                  <a:srgbClr val="1E2761"/>
-                </a:solidFill>
-                <a:latin typeface="Cambria" pitchFamily="34" charset="0"/>
-                <a:ea typeface="Cambria" pitchFamily="34" charset="-122"/>
-                <a:cs typeface="Cambria" pitchFamily="34" charset="-120"/>
-              </a:rPr>
-              <a:t>hätte ich doch beherrscht. Du hast mir aber schon früh das Wort verboten.</a:t>
-            </a:r>
-            <a:endParaRPr lang="en-US" sz="2000" dirty="0"/>
-          </a:p>
-        </p:txBody>
-      </p:sp>
-      <p:sp>
-        <p:nvSpPr>
-          <p:cNvPr id="13" name="Text 11"/>
-          <p:cNvSpPr txBox="1"/>
-          <p:nvPr/>
-        </p:nvSpPr>
-        <p:spPr>
-          <a:xfrm>
-            <a:off x="365760" y="2484120"/>
-            <a:ext cx="411480" cy="335280"/>
-          </a:xfrm>
-          <a:prstGeom prst="rect">
-            <a:avLst/>
-          </a:prstGeom>
-          <a:noFill/>
-          <a:ln/>
-        </p:spPr>
-        <p:txBody>
-          <a:bodyPr wrap="square" lIns="0" tIns="0" rIns="0" bIns="0" rtlCol="0" anchor="ctr"/>
-          <a:lstStyle/>
-          <a:p>
-            <a:pPr algn="r" indent="0" marL="0">
-              <a:buNone/>
-            </a:pPr>
-            <a:r>
-              <a:rPr lang="en-US" sz="1500" dirty="0">
-                <a:solidFill>
-                  <a:srgbClr val="5B6B8C"/>
-                </a:solidFill>
-                <a:latin typeface="Calibri" pitchFamily="34" charset="0"/>
-                <a:ea typeface="Calibri" pitchFamily="34" charset="-122"/>
-                <a:cs typeface="Calibri" pitchFamily="34" charset="-120"/>
-              </a:rPr>
-              <a:t>5</a:t>
-            </a:r>
-            <a:endParaRPr lang="en-US" sz="1500" dirty="0"/>
-          </a:p>
-        </p:txBody>
-      </p:sp>
-      <p:sp>
-        <p:nvSpPr>
-          <p:cNvPr id="14" name="Text 12"/>
-          <p:cNvSpPr txBox="1"/>
-          <p:nvPr/>
-        </p:nvSpPr>
-        <p:spPr>
-          <a:xfrm>
-            <a:off x="914400" y="2484120"/>
-            <a:ext cx="10972800" cy="335280"/>
-          </a:xfrm>
-          <a:prstGeom prst="rect">
-            <a:avLst/>
-          </a:prstGeom>
-          <a:noFill/>
-          <a:ln/>
-        </p:spPr>
-        <p:txBody>
-          <a:bodyPr wrap="square" lIns="0" tIns="0" rIns="0" bIns="0" rtlCol="0" anchor="ctr"/>
-          <a:lstStyle/>
-          <a:p>
-            <a:pPr indent="0" marL="0">
-              <a:buNone/>
-            </a:pPr>
-            <a:r>
-              <a:rPr lang="en-US" sz="2000" dirty="0">
-                <a:solidFill>
-                  <a:srgbClr val="1E2761"/>
-                </a:solidFill>
-                <a:latin typeface="Cambria" pitchFamily="34" charset="0"/>
-                <a:ea typeface="Cambria" pitchFamily="34" charset="-122"/>
-                <a:cs typeface="Cambria" pitchFamily="34" charset="-120"/>
-              </a:rPr>
-              <a:t>Deine Drohung: »kein Wort der Widerrede!« und die dazu erhobene Hand begleiten</a:t>
-            </a:r>
-            <a:endParaRPr lang="en-US" sz="2000" dirty="0"/>
-          </a:p>
-        </p:txBody>
-      </p:sp>
-      <p:sp>
-        <p:nvSpPr>
-          <p:cNvPr id="15" name="Text 13"/>
-          <p:cNvSpPr txBox="1"/>
-          <p:nvPr/>
-        </p:nvSpPr>
-        <p:spPr>
-          <a:xfrm>
-            <a:off x="365760" y="2819400"/>
-            <a:ext cx="411480" cy="335280"/>
-          </a:xfrm>
-          <a:prstGeom prst="rect">
-            <a:avLst/>
-          </a:prstGeom>
-          <a:noFill/>
-          <a:ln/>
-        </p:spPr>
-        <p:txBody>
-          <a:bodyPr wrap="square" lIns="0" tIns="0" rIns="0" bIns="0" rtlCol="0" anchor="ctr"/>
-          <a:lstStyle/>
-          <a:p>
-            <a:pPr algn="r" indent="0" marL="0">
-              <a:buNone/>
-            </a:pPr>
-            <a:r>
-              <a:rPr lang="en-US" sz="1500" dirty="0">
-                <a:solidFill>
-                  <a:srgbClr val="5B6B8C"/>
-                </a:solidFill>
-                <a:latin typeface="Calibri" pitchFamily="34" charset="0"/>
-                <a:ea typeface="Calibri" pitchFamily="34" charset="-122"/>
-                <a:cs typeface="Calibri" pitchFamily="34" charset="-120"/>
-              </a:rPr>
-              <a:t>6</a:t>
-            </a:r>
-            <a:endParaRPr lang="en-US" sz="1500" dirty="0"/>
-          </a:p>
-        </p:txBody>
-      </p:sp>
-      <p:sp>
-        <p:nvSpPr>
-          <p:cNvPr id="16" name="Text 14"/>
-          <p:cNvSpPr txBox="1"/>
-          <p:nvPr/>
-        </p:nvSpPr>
-        <p:spPr>
-          <a:xfrm>
-            <a:off x="914400" y="2819400"/>
-            <a:ext cx="10972800" cy="335280"/>
-          </a:xfrm>
-          <a:prstGeom prst="rect">
-            <a:avLst/>
-          </a:prstGeom>
-          <a:noFill/>
-          <a:ln/>
-        </p:spPr>
-        <p:txBody>
-          <a:bodyPr wrap="square" lIns="0" tIns="0" rIns="0" bIns="0" rtlCol="0" anchor="ctr"/>
-          <a:lstStyle/>
-          <a:p>
-            <a:pPr indent="0" marL="0">
-              <a:buNone/>
-            </a:pPr>
-            <a:r>
-              <a:rPr lang="en-US" sz="2000" dirty="0">
-                <a:solidFill>
-                  <a:srgbClr val="1E2761"/>
-                </a:solidFill>
-                <a:latin typeface="Cambria" pitchFamily="34" charset="0"/>
-                <a:ea typeface="Cambria" pitchFamily="34" charset="-122"/>
-                <a:cs typeface="Cambria" pitchFamily="34" charset="-120"/>
-              </a:rPr>
-              <a:t>mich schon seit jeher. Ich bekam vor Dir – Du bist, sobald es um Deine Dinge</a:t>
-            </a:r>
-            <a:endParaRPr lang="en-US" sz="2000" dirty="0"/>
-          </a:p>
-        </p:txBody>
-      </p:sp>
-      <p:sp>
-        <p:nvSpPr>
-          <p:cNvPr id="17" name="Text 15"/>
-          <p:cNvSpPr txBox="1"/>
-          <p:nvPr/>
-        </p:nvSpPr>
-        <p:spPr>
-          <a:xfrm>
-            <a:off x="365760" y="3154680"/>
-            <a:ext cx="411480" cy="335280"/>
-          </a:xfrm>
-          <a:prstGeom prst="rect">
-            <a:avLst/>
-          </a:prstGeom>
-          <a:noFill/>
-          <a:ln/>
-        </p:spPr>
-        <p:txBody>
-          <a:bodyPr wrap="square" lIns="0" tIns="0" rIns="0" bIns="0" rtlCol="0" anchor="ctr"/>
-          <a:lstStyle/>
-          <a:p>
-            <a:pPr algn="r" indent="0" marL="0">
-              <a:buNone/>
-            </a:pPr>
-            <a:r>
-              <a:rPr lang="en-US" sz="1500" dirty="0">
-                <a:solidFill>
-                  <a:srgbClr val="5B6B8C"/>
-                </a:solidFill>
-                <a:latin typeface="Calibri" pitchFamily="34" charset="0"/>
-                <a:ea typeface="Calibri" pitchFamily="34" charset="-122"/>
-                <a:cs typeface="Calibri" pitchFamily="34" charset="-120"/>
-              </a:rPr>
-              <a:t>7</a:t>
-            </a:r>
-            <a:endParaRPr lang="en-US" sz="1500" dirty="0"/>
-          </a:p>
-        </p:txBody>
-      </p:sp>
-      <p:sp>
-        <p:nvSpPr>
-          <p:cNvPr id="18" name="Text 16"/>
-          <p:cNvSpPr txBox="1"/>
-          <p:nvPr/>
-        </p:nvSpPr>
-        <p:spPr>
-          <a:xfrm>
-            <a:off x="914400" y="3154680"/>
-            <a:ext cx="10972800" cy="335280"/>
-          </a:xfrm>
-          <a:prstGeom prst="rect">
-            <a:avLst/>
-          </a:prstGeom>
-          <a:noFill/>
-          <a:ln/>
-        </p:spPr>
-        <p:txBody>
-          <a:bodyPr wrap="square" lIns="0" tIns="0" rIns="0" bIns="0" rtlCol="0" anchor="ctr"/>
-          <a:lstStyle/>
-          <a:p>
-            <a:pPr indent="0" marL="0">
-              <a:buNone/>
-            </a:pPr>
-            <a:r>
-              <a:rPr lang="en-US" sz="2000" dirty="0">
-                <a:solidFill>
-                  <a:srgbClr val="1E2761"/>
-                </a:solidFill>
-                <a:latin typeface="Cambria" pitchFamily="34" charset="0"/>
-                <a:ea typeface="Cambria" pitchFamily="34" charset="-122"/>
-                <a:cs typeface="Cambria" pitchFamily="34" charset="-120"/>
-              </a:rPr>
-              <a:t>geht, ein ausgezeichneter Redner – eine stockende, stotternde Art des</a:t>
-            </a:r>
-            <a:endParaRPr lang="en-US" sz="2000" dirty="0"/>
-          </a:p>
-        </p:txBody>
-      </p:sp>
-      <p:sp>
-        <p:nvSpPr>
-          <p:cNvPr id="19" name="Text 17"/>
-          <p:cNvSpPr txBox="1"/>
-          <p:nvPr/>
-        </p:nvSpPr>
-        <p:spPr>
-          <a:xfrm>
-            <a:off x="365760" y="3489960"/>
-            <a:ext cx="411480" cy="335280"/>
-          </a:xfrm>
-          <a:prstGeom prst="rect">
-            <a:avLst/>
-          </a:prstGeom>
-          <a:noFill/>
-          <a:ln/>
-        </p:spPr>
-        <p:txBody>
-          <a:bodyPr wrap="square" lIns="0" tIns="0" rIns="0" bIns="0" rtlCol="0" anchor="ctr"/>
-          <a:lstStyle/>
-          <a:p>
-            <a:pPr algn="r" indent="0" marL="0">
-              <a:buNone/>
-            </a:pPr>
-            <a:r>
-              <a:rPr lang="en-US" sz="1500" dirty="0">
-                <a:solidFill>
-                  <a:srgbClr val="5B6B8C"/>
-                </a:solidFill>
-                <a:latin typeface="Calibri" pitchFamily="34" charset="0"/>
-                <a:ea typeface="Calibri" pitchFamily="34" charset="-122"/>
-                <a:cs typeface="Calibri" pitchFamily="34" charset="-120"/>
-              </a:rPr>
-              <a:t>8</a:t>
-            </a:r>
-            <a:endParaRPr lang="en-US" sz="1500" dirty="0"/>
-          </a:p>
-        </p:txBody>
-      </p:sp>
-      <p:sp>
-        <p:nvSpPr>
-          <p:cNvPr id="20" name="Text 18"/>
-          <p:cNvSpPr txBox="1"/>
-          <p:nvPr/>
-        </p:nvSpPr>
-        <p:spPr>
-          <a:xfrm>
-            <a:off x="914400" y="3489960"/>
-            <a:ext cx="10972800" cy="335280"/>
-          </a:xfrm>
-          <a:prstGeom prst="rect">
-            <a:avLst/>
-          </a:prstGeom>
-          <a:noFill/>
-          <a:ln/>
-        </p:spPr>
-        <p:txBody>
-          <a:bodyPr wrap="square" lIns="0" tIns="0" rIns="0" bIns="0" rtlCol="0" anchor="ctr"/>
-          <a:lstStyle/>
-          <a:p>
-            <a:pPr indent="0" marL="0">
-              <a:buNone/>
-            </a:pPr>
-            <a:r>
-              <a:rPr lang="en-US" sz="2000" dirty="0">
-                <a:solidFill>
-                  <a:srgbClr val="1E2761"/>
-                </a:solidFill>
-                <a:latin typeface="Cambria" pitchFamily="34" charset="0"/>
-                <a:ea typeface="Cambria" pitchFamily="34" charset="-122"/>
-                <a:cs typeface="Cambria" pitchFamily="34" charset="-120"/>
-              </a:rPr>
-              <a:t>Sprechens, auch das war Dir noch zu viel, schließlich schwieg ich, zuerst</a:t>
-            </a:r>
-            <a:endParaRPr lang="en-US" sz="2000" dirty="0"/>
-          </a:p>
-        </p:txBody>
-      </p:sp>
-      <p:sp>
-        <p:nvSpPr>
-          <p:cNvPr id="21" name="Text 19"/>
-          <p:cNvSpPr txBox="1"/>
-          <p:nvPr/>
-        </p:nvSpPr>
-        <p:spPr>
-          <a:xfrm>
-            <a:off x="365760" y="3825240"/>
-            <a:ext cx="411480" cy="335280"/>
-          </a:xfrm>
-          <a:prstGeom prst="rect">
-            <a:avLst/>
-          </a:prstGeom>
-          <a:noFill/>
-          <a:ln/>
-        </p:spPr>
-        <p:txBody>
-          <a:bodyPr wrap="square" lIns="0" tIns="0" rIns="0" bIns="0" rtlCol="0" anchor="ctr"/>
-          <a:lstStyle/>
-          <a:p>
-            <a:pPr algn="r" indent="0" marL="0">
-              <a:buNone/>
-            </a:pPr>
-            <a:r>
-              <a:rPr lang="en-US" sz="1500" dirty="0">
-                <a:solidFill>
-                  <a:srgbClr val="5B6B8C"/>
-                </a:solidFill>
-                <a:latin typeface="Calibri" pitchFamily="34" charset="0"/>
-                <a:ea typeface="Calibri" pitchFamily="34" charset="-122"/>
-                <a:cs typeface="Calibri" pitchFamily="34" charset="-120"/>
-              </a:rPr>
-              <a:t>9</a:t>
-            </a:r>
-            <a:endParaRPr lang="en-US" sz="1500" dirty="0"/>
-          </a:p>
-        </p:txBody>
-      </p:sp>
-      <p:sp>
-        <p:nvSpPr>
-          <p:cNvPr id="22" name="Text 20"/>
-          <p:cNvSpPr txBox="1"/>
-          <p:nvPr/>
-        </p:nvSpPr>
-        <p:spPr>
-          <a:xfrm>
-            <a:off x="914400" y="3825240"/>
-            <a:ext cx="10972800" cy="335280"/>
-          </a:xfrm>
-          <a:prstGeom prst="rect">
-            <a:avLst/>
-          </a:prstGeom>
-          <a:noFill/>
-          <a:ln/>
-        </p:spPr>
-        <p:txBody>
-          <a:bodyPr wrap="square" lIns="0" tIns="0" rIns="0" bIns="0" rtlCol="0" anchor="ctr"/>
-          <a:lstStyle/>
-          <a:p>
-            <a:pPr indent="0" marL="0">
-              <a:buNone/>
-            </a:pPr>
-            <a:r>
-              <a:rPr lang="en-US" sz="2000" dirty="0">
-                <a:solidFill>
-                  <a:srgbClr val="1E2761"/>
-                </a:solidFill>
-                <a:latin typeface="Cambria" pitchFamily="34" charset="0"/>
-                <a:ea typeface="Cambria" pitchFamily="34" charset="-122"/>
-                <a:cs typeface="Cambria" pitchFamily="34" charset="-120"/>
-              </a:rPr>
-              <a:t>vielleicht aus Trotz, dann, weil ich vor Dir weder denken noch reden konnte.</a:t>
-            </a:r>
-            <a:endParaRPr lang="en-US" sz="2000" dirty="0"/>
-          </a:p>
-        </p:txBody>
-      </p:sp>
-      <p:sp>
-        <p:nvSpPr>
-          <p:cNvPr id="23" name="Text 21"/>
-          <p:cNvSpPr txBox="1"/>
-          <p:nvPr/>
-        </p:nvSpPr>
-        <p:spPr>
-          <a:xfrm>
-            <a:off x="365760" y="4160520"/>
-            <a:ext cx="411480" cy="335280"/>
-          </a:xfrm>
-          <a:prstGeom prst="rect">
-            <a:avLst/>
-          </a:prstGeom>
-          <a:noFill/>
-          <a:ln/>
-        </p:spPr>
-        <p:txBody>
-          <a:bodyPr wrap="square" lIns="0" tIns="0" rIns="0" bIns="0" rtlCol="0" anchor="ctr"/>
-          <a:lstStyle/>
-          <a:p>
-            <a:pPr algn="r" indent="0" marL="0">
-              <a:buNone/>
-            </a:pPr>
-            <a:r>
-              <a:rPr lang="en-US" sz="1500" dirty="0">
-                <a:solidFill>
-                  <a:srgbClr val="5B6B8C"/>
-                </a:solidFill>
-                <a:latin typeface="Calibri" pitchFamily="34" charset="0"/>
-                <a:ea typeface="Calibri" pitchFamily="34" charset="-122"/>
-                <a:cs typeface="Calibri" pitchFamily="34" charset="-120"/>
-              </a:rPr>
-              <a:t>10</a:t>
-            </a:r>
-            <a:endParaRPr lang="en-US" sz="1500" dirty="0"/>
-          </a:p>
-        </p:txBody>
-      </p:sp>
-      <p:sp>
-        <p:nvSpPr>
-          <p:cNvPr id="24" name="Text 22"/>
-          <p:cNvSpPr txBox="1"/>
-          <p:nvPr/>
-        </p:nvSpPr>
-        <p:spPr>
-          <a:xfrm>
-            <a:off x="914400" y="4160520"/>
-            <a:ext cx="10972800" cy="335280"/>
-          </a:xfrm>
-          <a:prstGeom prst="rect">
-            <a:avLst/>
-          </a:prstGeom>
-          <a:noFill/>
-          <a:ln/>
-        </p:spPr>
-        <p:txBody>
-          <a:bodyPr wrap="square" lIns="0" tIns="0" rIns="0" bIns="0" rtlCol="0" anchor="ctr"/>
-          <a:lstStyle/>
-          <a:p>
-            <a:pPr indent="0" marL="0">
-              <a:buNone/>
-            </a:pPr>
-            <a:r>
-              <a:rPr lang="en-US" sz="2000" dirty="0">
-                <a:solidFill>
-                  <a:srgbClr val="1E2761"/>
-                </a:solidFill>
-                <a:latin typeface="Cambria" pitchFamily="34" charset="0"/>
-                <a:ea typeface="Cambria" pitchFamily="34" charset="-122"/>
-                <a:cs typeface="Cambria" pitchFamily="34" charset="-120"/>
-              </a:rPr>
-              <a:t>[…] Du sagtest: »Kein Wort der Widerrede!« und wolltest damit die Dir</a:t>
-            </a:r>
-            <a:endParaRPr lang="en-US" sz="2000" dirty="0"/>
-          </a:p>
-        </p:txBody>
-      </p:sp>
-      <p:sp>
-        <p:nvSpPr>
-          <p:cNvPr id="25" name="Text 23"/>
-          <p:cNvSpPr txBox="1"/>
-          <p:nvPr/>
-        </p:nvSpPr>
-        <p:spPr>
-          <a:xfrm>
-            <a:off x="365760" y="4495800"/>
-            <a:ext cx="411480" cy="335280"/>
-          </a:xfrm>
-          <a:prstGeom prst="rect">
-            <a:avLst/>
-          </a:prstGeom>
-          <a:noFill/>
-          <a:ln/>
-        </p:spPr>
-        <p:txBody>
-          <a:bodyPr wrap="square" lIns="0" tIns="0" rIns="0" bIns="0" rtlCol="0" anchor="ctr"/>
-          <a:lstStyle/>
-          <a:p>
-            <a:pPr algn="r" indent="0" marL="0">
-              <a:buNone/>
-            </a:pPr>
-            <a:r>
-              <a:rPr lang="en-US" sz="1500" dirty="0">
-                <a:solidFill>
-                  <a:srgbClr val="5B6B8C"/>
-                </a:solidFill>
-                <a:latin typeface="Calibri" pitchFamily="34" charset="0"/>
-                <a:ea typeface="Calibri" pitchFamily="34" charset="-122"/>
-                <a:cs typeface="Calibri" pitchFamily="34" charset="-120"/>
-              </a:rPr>
-              <a:t>11</a:t>
-            </a:r>
-            <a:endParaRPr lang="en-US" sz="1500" dirty="0"/>
-          </a:p>
-        </p:txBody>
-      </p:sp>
-      <p:sp>
-        <p:nvSpPr>
-          <p:cNvPr id="26" name="Text 24"/>
-          <p:cNvSpPr txBox="1"/>
-          <p:nvPr/>
-        </p:nvSpPr>
-        <p:spPr>
-          <a:xfrm>
-            <a:off x="914400" y="4495800"/>
-            <a:ext cx="10972800" cy="335280"/>
-          </a:xfrm>
-          <a:prstGeom prst="rect">
-            <a:avLst/>
-          </a:prstGeom>
-          <a:noFill/>
-          <a:ln/>
-        </p:spPr>
-        <p:txBody>
-          <a:bodyPr wrap="square" lIns="0" tIns="0" rIns="0" bIns="0" rtlCol="0" anchor="ctr"/>
-          <a:lstStyle/>
-          <a:p>
-            <a:pPr indent="0" marL="0">
-              <a:buNone/>
-            </a:pPr>
-            <a:r>
-              <a:rPr lang="en-US" sz="2000" dirty="0">
-                <a:solidFill>
-                  <a:srgbClr val="1E2761"/>
-                </a:solidFill>
-                <a:latin typeface="Cambria" pitchFamily="34" charset="0"/>
-                <a:ea typeface="Cambria" pitchFamily="34" charset="-122"/>
-                <a:cs typeface="Cambria" pitchFamily="34" charset="-120"/>
-              </a:rPr>
-              <a:t>unangenehmen Gegenkräfte in mir zum Schweigen bringen, diese Einwirkung war</a:t>
-            </a:r>
-            <a:endParaRPr lang="en-US" sz="2000" dirty="0"/>
-          </a:p>
-        </p:txBody>
-      </p:sp>
-      <p:sp>
-        <p:nvSpPr>
-          <p:cNvPr id="27" name="Text 25"/>
-          <p:cNvSpPr txBox="1"/>
-          <p:nvPr/>
-        </p:nvSpPr>
-        <p:spPr>
-          <a:xfrm>
-            <a:off x="365760" y="4831080"/>
-            <a:ext cx="411480" cy="335280"/>
-          </a:xfrm>
-          <a:prstGeom prst="rect">
-            <a:avLst/>
-          </a:prstGeom>
-          <a:noFill/>
-          <a:ln/>
-        </p:spPr>
-        <p:txBody>
-          <a:bodyPr wrap="square" lIns="0" tIns="0" rIns="0" bIns="0" rtlCol="0" anchor="ctr"/>
-          <a:lstStyle/>
-          <a:p>
-            <a:pPr algn="r" indent="0" marL="0">
-              <a:buNone/>
-            </a:pPr>
-            <a:r>
-              <a:rPr lang="en-US" sz="1500" dirty="0">
-                <a:solidFill>
-                  <a:srgbClr val="5B6B8C"/>
-                </a:solidFill>
-                <a:latin typeface="Calibri" pitchFamily="34" charset="0"/>
-                <a:ea typeface="Calibri" pitchFamily="34" charset="-122"/>
-                <a:cs typeface="Calibri" pitchFamily="34" charset="-120"/>
-              </a:rPr>
-              <a:t>12</a:t>
-            </a:r>
-            <a:endParaRPr lang="en-US" sz="1500" dirty="0"/>
-          </a:p>
-        </p:txBody>
-      </p:sp>
-      <p:sp>
-        <p:nvSpPr>
-          <p:cNvPr id="28" name="Text 26"/>
-          <p:cNvSpPr txBox="1"/>
-          <p:nvPr/>
-        </p:nvSpPr>
-        <p:spPr>
-          <a:xfrm>
-            <a:off x="914400" y="4831080"/>
-            <a:ext cx="10972800" cy="335280"/>
-          </a:xfrm>
-          <a:prstGeom prst="rect">
-            <a:avLst/>
-          </a:prstGeom>
-          <a:noFill/>
-          <a:ln/>
-        </p:spPr>
-        <p:txBody>
-          <a:bodyPr wrap="square" lIns="0" tIns="0" rIns="0" bIns="0" rtlCol="0" anchor="ctr"/>
-          <a:lstStyle/>
-          <a:p>
-            <a:pPr indent="0" marL="0">
-              <a:buNone/>
-            </a:pPr>
-            <a:r>
-              <a:rPr lang="en-US" sz="2000" dirty="0">
-                <a:solidFill>
-                  <a:srgbClr val="1E2761"/>
-                </a:solidFill>
-                <a:latin typeface="Cambria" pitchFamily="34" charset="0"/>
-                <a:ea typeface="Cambria" pitchFamily="34" charset="-122"/>
-                <a:cs typeface="Cambria" pitchFamily="34" charset="-120"/>
-              </a:rPr>
-              <a:t>aber für mich zu stark, ich war zu folgsam, ich verstummte gänzlich, verkroch</a:t>
-            </a:r>
-            <a:endParaRPr lang="en-US" sz="2000" dirty="0"/>
-          </a:p>
-        </p:txBody>
-      </p:sp>
-      <p:sp>
-        <p:nvSpPr>
-          <p:cNvPr id="29" name="Text 27"/>
-          <p:cNvSpPr txBox="1"/>
-          <p:nvPr/>
-        </p:nvSpPr>
-        <p:spPr>
-          <a:xfrm>
-            <a:off x="365760" y="5166360"/>
-            <a:ext cx="411480" cy="335280"/>
-          </a:xfrm>
-          <a:prstGeom prst="rect">
-            <a:avLst/>
-          </a:prstGeom>
-          <a:noFill/>
-          <a:ln/>
-        </p:spPr>
-        <p:txBody>
-          <a:bodyPr wrap="square" lIns="0" tIns="0" rIns="0" bIns="0" rtlCol="0" anchor="ctr"/>
-          <a:lstStyle/>
-          <a:p>
-            <a:pPr algn="r" indent="0" marL="0">
-              <a:buNone/>
-            </a:pPr>
-            <a:r>
-              <a:rPr lang="en-US" sz="1500" dirty="0">
-                <a:solidFill>
-                  <a:srgbClr val="5B6B8C"/>
-                </a:solidFill>
-                <a:latin typeface="Calibri" pitchFamily="34" charset="0"/>
-                <a:ea typeface="Calibri" pitchFamily="34" charset="-122"/>
-                <a:cs typeface="Calibri" pitchFamily="34" charset="-120"/>
-              </a:rPr>
-              <a:t>13</a:t>
-            </a:r>
-            <a:endParaRPr lang="en-US" sz="1500" dirty="0"/>
-          </a:p>
-        </p:txBody>
-      </p:sp>
-      <p:sp>
-        <p:nvSpPr>
-          <p:cNvPr id="30" name="Text 28"/>
-          <p:cNvSpPr txBox="1"/>
-          <p:nvPr/>
-        </p:nvSpPr>
-        <p:spPr>
-          <a:xfrm>
-            <a:off x="914400" y="5166360"/>
-            <a:ext cx="10972800" cy="335280"/>
-          </a:xfrm>
-          <a:prstGeom prst="rect">
-            <a:avLst/>
-          </a:prstGeom>
-          <a:noFill/>
-          <a:ln/>
-        </p:spPr>
-        <p:txBody>
-          <a:bodyPr wrap="square" lIns="0" tIns="0" rIns="0" bIns="0" rtlCol="0" anchor="ctr"/>
-          <a:lstStyle/>
-          <a:p>
-            <a:pPr indent="0" marL="0">
-              <a:buNone/>
-            </a:pPr>
-            <a:r>
-              <a:rPr lang="en-US" sz="2000" dirty="0">
-                <a:solidFill>
-                  <a:srgbClr val="1E2761"/>
-                </a:solidFill>
-                <a:latin typeface="Cambria" pitchFamily="34" charset="0"/>
-                <a:ea typeface="Cambria" pitchFamily="34" charset="-122"/>
-                <a:cs typeface="Cambria" pitchFamily="34" charset="-120"/>
-              </a:rPr>
-              <a:t>mich vor Dir und wagte mich erst zu regen, wenn ich so weit von Dir entfernt</a:t>
-            </a:r>
-            <a:endParaRPr lang="en-US" sz="2000" dirty="0"/>
-          </a:p>
-        </p:txBody>
-      </p:sp>
-      <p:sp>
-        <p:nvSpPr>
-          <p:cNvPr id="31" name="Text 29"/>
-          <p:cNvSpPr txBox="1"/>
-          <p:nvPr/>
-        </p:nvSpPr>
-        <p:spPr>
-          <a:xfrm>
-            <a:off x="365760" y="5501640"/>
-            <a:ext cx="411480" cy="335280"/>
-          </a:xfrm>
-          <a:prstGeom prst="rect">
-            <a:avLst/>
-          </a:prstGeom>
-          <a:noFill/>
-          <a:ln/>
-        </p:spPr>
-        <p:txBody>
-          <a:bodyPr wrap="square" lIns="0" tIns="0" rIns="0" bIns="0" rtlCol="0" anchor="ctr"/>
-          <a:lstStyle/>
-          <a:p>
-            <a:pPr algn="r" indent="0" marL="0">
-              <a:buNone/>
-            </a:pPr>
-            <a:r>
-              <a:rPr lang="en-US" sz="1500" dirty="0">
-                <a:solidFill>
-                  <a:srgbClr val="5B6B8C"/>
-                </a:solidFill>
-                <a:latin typeface="Calibri" pitchFamily="34" charset="0"/>
-                <a:ea typeface="Calibri" pitchFamily="34" charset="-122"/>
-                <a:cs typeface="Calibri" pitchFamily="34" charset="-120"/>
-              </a:rPr>
-              <a:t>14</a:t>
-            </a:r>
-            <a:endParaRPr lang="en-US" sz="1500" dirty="0"/>
-          </a:p>
-        </p:txBody>
-      </p:sp>
-      <p:sp>
-        <p:nvSpPr>
-          <p:cNvPr id="32" name="Text 30"/>
-          <p:cNvSpPr txBox="1"/>
-          <p:nvPr/>
-        </p:nvSpPr>
-        <p:spPr>
-          <a:xfrm>
-            <a:off x="914400" y="5501640"/>
-            <a:ext cx="10972800" cy="335280"/>
-          </a:xfrm>
-          <a:prstGeom prst="rect">
-            <a:avLst/>
-          </a:prstGeom>
-          <a:noFill/>
-          <a:ln/>
-        </p:spPr>
-        <p:txBody>
-          <a:bodyPr wrap="square" lIns="0" tIns="0" rIns="0" bIns="0" rtlCol="0" anchor="ctr"/>
-          <a:lstStyle/>
-          <a:p>
-            <a:pPr indent="0" marL="0">
-              <a:buNone/>
-            </a:pPr>
-            <a:r>
-              <a:rPr lang="en-US" sz="2000" dirty="0">
-                <a:solidFill>
-                  <a:srgbClr val="1E2761"/>
-                </a:solidFill>
-                <a:latin typeface="Cambria" pitchFamily="34" charset="0"/>
-                <a:ea typeface="Cambria" pitchFamily="34" charset="-122"/>
-                <a:cs typeface="Cambria" pitchFamily="34" charset="-120"/>
-              </a:rPr>
-              <a:t>war, daß Deine Macht, wenigstens direkt, nicht mehr hinreichte. Du aber</a:t>
-            </a:r>
-            <a:endParaRPr lang="en-US" sz="2000" dirty="0"/>
-          </a:p>
-        </p:txBody>
-      </p:sp>
-      <p:sp>
-        <p:nvSpPr>
-          <p:cNvPr id="33" name="Text 31"/>
-          <p:cNvSpPr txBox="1"/>
-          <p:nvPr/>
-        </p:nvSpPr>
-        <p:spPr>
-          <a:xfrm>
-            <a:off x="365760" y="5836920"/>
-            <a:ext cx="411480" cy="335280"/>
-          </a:xfrm>
-          <a:prstGeom prst="rect">
-            <a:avLst/>
-          </a:prstGeom>
-          <a:noFill/>
-          <a:ln/>
-        </p:spPr>
-        <p:txBody>
-          <a:bodyPr wrap="square" lIns="0" tIns="0" rIns="0" bIns="0" rtlCol="0" anchor="ctr"/>
-          <a:lstStyle/>
-          <a:p>
-            <a:pPr algn="r" indent="0" marL="0">
-              <a:buNone/>
-            </a:pPr>
-            <a:r>
-              <a:rPr lang="en-US" sz="1500" dirty="0">
-                <a:solidFill>
-                  <a:srgbClr val="5B6B8C"/>
-                </a:solidFill>
-                <a:latin typeface="Calibri" pitchFamily="34" charset="0"/>
-                <a:ea typeface="Calibri" pitchFamily="34" charset="-122"/>
-                <a:cs typeface="Calibri" pitchFamily="34" charset="-120"/>
-              </a:rPr>
-              <a:t>15</a:t>
-            </a:r>
-            <a:endParaRPr lang="en-US" sz="1500" dirty="0"/>
-          </a:p>
-        </p:txBody>
-      </p:sp>
-      <p:sp>
-        <p:nvSpPr>
-          <p:cNvPr id="34" name="Text 32"/>
-          <p:cNvSpPr txBox="1"/>
-          <p:nvPr/>
-        </p:nvSpPr>
-        <p:spPr>
-          <a:xfrm>
-            <a:off x="914400" y="5836920"/>
-            <a:ext cx="10972800" cy="335280"/>
-          </a:xfrm>
-          <a:prstGeom prst="rect">
-            <a:avLst/>
-          </a:prstGeom>
-          <a:noFill/>
-          <a:ln/>
-        </p:spPr>
-        <p:txBody>
-          <a:bodyPr wrap="square" lIns="0" tIns="0" rIns="0" bIns="0" rtlCol="0" anchor="ctr"/>
-          <a:lstStyle/>
-          <a:p>
-            <a:pPr indent="0" marL="0">
-              <a:buNone/>
-            </a:pPr>
-            <a:r>
-              <a:rPr lang="en-US" sz="2000" dirty="0">
-                <a:solidFill>
-                  <a:srgbClr val="1E2761"/>
-                </a:solidFill>
-                <a:latin typeface="Cambria" pitchFamily="34" charset="0"/>
-                <a:ea typeface="Cambria" pitchFamily="34" charset="-122"/>
-                <a:cs typeface="Cambria" pitchFamily="34" charset="-120"/>
-              </a:rPr>
-              <a:t>standst davor, und alles schien Dir wieder »contra« zu sein, während es nur</a:t>
-            </a:r>
-            <a:endParaRPr lang="en-US" sz="2000" dirty="0"/>
-          </a:p>
-        </p:txBody>
-      </p:sp>
-      <p:sp>
-        <p:nvSpPr>
-          <p:cNvPr id="35" name="Text 33"/>
-          <p:cNvSpPr txBox="1"/>
-          <p:nvPr/>
-        </p:nvSpPr>
-        <p:spPr>
-          <a:xfrm>
-            <a:off x="365760" y="6172200"/>
-            <a:ext cx="411480" cy="335280"/>
-          </a:xfrm>
-          <a:prstGeom prst="rect">
-            <a:avLst/>
-          </a:prstGeom>
-          <a:noFill/>
-          <a:ln/>
-        </p:spPr>
-        <p:txBody>
-          <a:bodyPr wrap="square" lIns="0" tIns="0" rIns="0" bIns="0" rtlCol="0" anchor="ctr"/>
-          <a:lstStyle/>
-          <a:p>
-            <a:pPr algn="r" indent="0" marL="0">
-              <a:buNone/>
-            </a:pPr>
-            <a:r>
-              <a:rPr lang="en-US" sz="1500" dirty="0">
-                <a:solidFill>
-                  <a:srgbClr val="5B6B8C"/>
-                </a:solidFill>
-                <a:latin typeface="Calibri" pitchFamily="34" charset="0"/>
-                <a:ea typeface="Calibri" pitchFamily="34" charset="-122"/>
-                <a:cs typeface="Calibri" pitchFamily="34" charset="-120"/>
-              </a:rPr>
-              <a:t>16</a:t>
-            </a:r>
-            <a:endParaRPr lang="en-US" sz="1500" dirty="0"/>
-          </a:p>
-        </p:txBody>
-      </p:sp>
-      <p:sp>
-        <p:nvSpPr>
-          <p:cNvPr id="36" name="Text 34"/>
-          <p:cNvSpPr txBox="1"/>
-          <p:nvPr/>
-        </p:nvSpPr>
-        <p:spPr>
-          <a:xfrm>
-            <a:off x="914400" y="6172200"/>
-            <a:ext cx="10972800" cy="335280"/>
-          </a:xfrm>
-          <a:prstGeom prst="rect">
-            <a:avLst/>
-          </a:prstGeom>
-          <a:noFill/>
-          <a:ln/>
-        </p:spPr>
-        <p:txBody>
-          <a:bodyPr wrap="square" lIns="0" tIns="0" rIns="0" bIns="0" rtlCol="0" anchor="ctr"/>
-          <a:lstStyle/>
-          <a:p>
-            <a:pPr indent="0" marL="0">
-              <a:buNone/>
-            </a:pPr>
-            <a:r>
-              <a:rPr lang="en-US" sz="2000" dirty="0">
-                <a:solidFill>
-                  <a:srgbClr val="1E2761"/>
-                </a:solidFill>
-                <a:latin typeface="Cambria" pitchFamily="34" charset="0"/>
-                <a:ea typeface="Cambria" pitchFamily="34" charset="-122"/>
-                <a:cs typeface="Cambria" pitchFamily="34" charset="-120"/>
-              </a:rPr>
-              <a:t>selbstverständliche Folge Deiner Stärke und meiner Schwäche war.</a:t>
-            </a:r>
-            <a:endParaRPr lang="en-US" sz="2000" dirty="0"/>
-          </a:p>
-        </p:txBody>
-      </p:sp>
-      <p:sp>
-        <p:nvSpPr>
-          <p:cNvPr id="37" name="Shape 35"/>
-          <p:cNvSpPr/>
-          <p:nvPr/>
-        </p:nvSpPr>
-        <p:spPr>
-          <a:xfrm>
-            <a:off x="841248" y="1143000"/>
-            <a:ext cx="0" cy="5364480"/>
-          </a:xfrm>
-          <a:prstGeom prst="line">
-            <a:avLst/>
-          </a:prstGeom>
-          <a:noFill/>
-          <a:ln w="25400">
-            <a:solidFill>
-              <a:srgbClr val="3F7CC4"/>
-            </a:solidFill>
-            <a:prstDash val="solid"/>
-          </a:ln>
-        </p:spPr>
+              <a:t>Fehler farbig anstreichen · Anzahl notieren · Kommafehler extra zählen</a:t>
+            </a:r>
+            <a:endParaRPr lang="en-US" sz="1700" dirty="0"/>
+          </a:p>
+        </p:txBody>
       </p:sp>
     </p:spTree>
   </p:cSld>
@@ -5293,7 +4553,7 @@
                 <a:ea typeface="Calibri" pitchFamily="34" charset="-122"/>
                 <a:cs typeface="Calibri" pitchFamily="34" charset="-120"/>
               </a:rPr>
-              <a:t>AUFTRAG 1 · ALLEIN</a:t>
+              <a:t>DIKTAT · SELBSTKONTROLLE</a:t>
             </a:r>
             <a:endParaRPr lang="en-US" sz="1300" dirty="0"/>
           </a:p>
@@ -5332,7 +4592,7 @@
                 <a:ea typeface="Cambria" pitchFamily="34" charset="-122"/>
                 <a:cs typeface="Cambria" pitchFamily="34" charset="-120"/>
               </a:rPr>
-              <a:t>Untersuche Abschnitt C wie Abschnitt A</a:t>
+              <a:t>Darauf achten – auch in jeder Klausur</a:t>
             </a:r>
             <a:endParaRPr lang="en-US" sz="2700" dirty="0"/>
           </a:p>
@@ -5346,12 +4606,34 @@
         </p:nvSpPr>
         <p:spPr>
           <a:xfrm>
-            <a:off x="10058400" y="164592"/>
-            <a:ext cx="1737360" cy="640080"/>
+            <a:off x="457200" y="1143000"/>
+            <a:ext cx="5486400" cy="2560320"/>
           </a:xfrm>
           <a:prstGeom prst="roundRect">
             <a:avLst>
-              <a:gd name="adj" fmla="val 17143"/>
+              <a:gd name="adj" fmla="val 2857"/>
+            </a:avLst>
+          </a:prstGeom>
+          <a:solidFill>
+            <a:srgbClr val="F4F7FD"/>
+          </a:solidFill>
+          <a:ln/>
+        </p:spPr>
+      </p:sp>
+      <p:sp>
+        <p:nvSpPr>
+          <p:cNvPr id="6" name="Shape 4"/>
+          <p:cNvSpPr/>
+          <p:nvPr/>
+        </p:nvSpPr>
+        <p:spPr>
+          <a:xfrm>
+            <a:off x="457200" y="1143000"/>
+            <a:ext cx="128016" cy="2560320"/>
+          </a:xfrm>
+          <a:prstGeom prst="roundRect">
+            <a:avLst>
+              <a:gd name="adj" fmla="val 14286"/>
             </a:avLst>
           </a:prstGeom>
           <a:solidFill>
@@ -5362,53 +4644,92 @@
       </p:sp>
       <p:sp>
         <p:nvSpPr>
-          <p:cNvPr id="6" name="Text 4"/>
-          <p:cNvSpPr txBox="1"/>
-          <p:nvPr/>
-        </p:nvSpPr>
-        <p:spPr>
-          <a:xfrm>
-            <a:off x="10058400" y="164592"/>
-            <a:ext cx="1737360" cy="640080"/>
-          </a:xfrm>
-          <a:prstGeom prst="rect">
-            <a:avLst/>
-          </a:prstGeom>
-          <a:noFill/>
-          <a:ln/>
-        </p:spPr>
-        <p:txBody>
-          <a:bodyPr wrap="square" lIns="0" tIns="0" rIns="0" bIns="0" rtlCol="0" anchor="ctr"/>
-          <a:lstStyle/>
-          <a:p>
-            <a:pPr algn="ctr" indent="0" marL="0">
+          <p:cNvPr id="7" name="Text 5"/>
+          <p:cNvSpPr txBox="1"/>
+          <p:nvPr/>
+        </p:nvSpPr>
+        <p:spPr>
+          <a:xfrm>
+            <a:off x="777240" y="1252728"/>
+            <a:ext cx="5029200" cy="411480"/>
+          </a:xfrm>
+          <a:prstGeom prst="rect">
+            <a:avLst/>
+          </a:prstGeom>
+          <a:noFill/>
+          <a:ln/>
+        </p:spPr>
+        <p:txBody>
+          <a:bodyPr wrap="square" lIns="0" tIns="0" rIns="0" bIns="0" rtlCol="0" anchor="t"/>
+          <a:lstStyle/>
+          <a:p>
+            <a:pPr indent="0" marL="0">
               <a:buNone/>
             </a:pPr>
             <a:r>
               <a:rPr lang="en-US" sz="2000" b="1" dirty="0">
                 <a:solidFill>
-                  <a:srgbClr val="FFFFFF"/>
+                  <a:srgbClr val="D9534F"/>
+                </a:solidFill>
+                <a:latin typeface="Cambria" pitchFamily="34" charset="0"/>
+                <a:ea typeface="Cambria" pitchFamily="34" charset="-122"/>
+                <a:cs typeface="Cambria" pitchFamily="34" charset="-120"/>
+              </a:rPr>
+              <a:t>das oder dass?</a:t>
+            </a:r>
+            <a:endParaRPr lang="en-US" sz="2000" dirty="0"/>
+          </a:p>
+        </p:txBody>
+      </p:sp>
+      <p:sp>
+        <p:nvSpPr>
+          <p:cNvPr id="8" name="Text 6"/>
+          <p:cNvSpPr txBox="1"/>
+          <p:nvPr/>
+        </p:nvSpPr>
+        <p:spPr>
+          <a:xfrm>
+            <a:off x="777240" y="1691640"/>
+            <a:ext cx="4983480" cy="777240"/>
+          </a:xfrm>
+          <a:prstGeom prst="rect">
+            <a:avLst/>
+          </a:prstGeom>
+          <a:noFill/>
+          <a:ln/>
+        </p:spPr>
+        <p:txBody>
+          <a:bodyPr wrap="square" lIns="0" tIns="0" rIns="0" bIns="0" rtlCol="0" anchor="t"/>
+          <a:lstStyle/>
+          <a:p>
+            <a:pPr indent="0" marL="0">
+              <a:buNone/>
+            </a:pPr>
+            <a:r>
+              <a:rPr lang="en-US" sz="1600" dirty="0">
+                <a:solidFill>
+                  <a:srgbClr val="1E2761"/>
                 </a:solidFill>
                 <a:latin typeface="Calibri" pitchFamily="34" charset="0"/>
                 <a:ea typeface="Calibri" pitchFamily="34" charset="-122"/>
                 <a:cs typeface="Calibri" pitchFamily="34" charset="-120"/>
               </a:rPr>
-              <a:t>13 Min.</a:t>
-            </a:r>
-            <a:endParaRPr lang="en-US" sz="2000" dirty="0"/>
-          </a:p>
-        </p:txBody>
-      </p:sp>
-      <p:sp>
-        <p:nvSpPr>
-          <p:cNvPr id="7" name="Text 5"/>
-          <p:cNvSpPr txBox="1"/>
-          <p:nvPr/>
-        </p:nvSpPr>
-        <p:spPr>
-          <a:xfrm>
-            <a:off x="548640" y="1234440"/>
-            <a:ext cx="10972800" cy="411480"/>
+              <a:t>„dass“ leitet einen Nebensatz ein und lässt sich nicht durch „dieses“ oder „welches“ ersetzen.</a:t>
+            </a:r>
+            <a:endParaRPr lang="en-US" sz="1600" dirty="0"/>
+          </a:p>
+        </p:txBody>
+      </p:sp>
+      <p:sp>
+        <p:nvSpPr>
+          <p:cNvPr id="9" name="Text 7"/>
+          <p:cNvSpPr txBox="1"/>
+          <p:nvPr/>
+        </p:nvSpPr>
+        <p:spPr>
+          <a:xfrm>
+            <a:off x="777240" y="2468880"/>
+            <a:ext cx="4983480" cy="1188720"/>
           </a:xfrm>
           <a:prstGeom prst="rect">
             <a:avLst/>
@@ -5421,338 +4742,324 @@
           <a:lstStyle/>
           <a:p>
             <a:pPr indent="0" marL="0">
-              <a:buNone/>
-            </a:pPr>
-            <a:r>
-              <a:rPr lang="en-US" sz="2100" dirty="0">
-                <a:solidFill>
-                  <a:srgbClr val="1E2761"/>
+              <a:spcAft>
+                <a:spcPts val="300"/>
+              </a:spcAft>
+              <a:buNone/>
+            </a:pPr>
+            <a:r>
+              <a:rPr lang="en-US" sz="1600" i="1" dirty="0">
+                <a:solidFill>
+                  <a:srgbClr val="5B6B8C"/>
                 </a:solidFill>
                 <a:latin typeface="Calibri" pitchFamily="34" charset="0"/>
                 <a:ea typeface="Calibri" pitchFamily="34" charset="-122"/>
                 <a:cs typeface="Calibri" pitchFamily="34" charset="-120"/>
               </a:rPr>
-              <a:t>Lege in deinem Hefter die Matrix an und fülle sie aus:</a:t>
-            </a:r>
-            <a:endParaRPr lang="en-US" sz="2100" dirty="0"/>
-          </a:p>
-        </p:txBody>
-      </p:sp>
-      <p:sp>
-        <p:nvSpPr>
-          <p:cNvPr id="8" name="Shape 6"/>
-          <p:cNvSpPr/>
-          <p:nvPr/>
-        </p:nvSpPr>
-        <p:spPr>
-          <a:xfrm>
-            <a:off x="548640" y="1783080"/>
-            <a:ext cx="1024128" cy="594360"/>
-          </a:xfrm>
-          <a:prstGeom prst="roundRect">
-            <a:avLst>
-              <a:gd name="adj" fmla="val 6154"/>
-            </a:avLst>
-          </a:prstGeom>
-          <a:solidFill>
-            <a:srgbClr val="1E2761"/>
-          </a:solidFill>
-          <a:ln/>
-        </p:spPr>
-      </p:sp>
-      <p:sp>
-        <p:nvSpPr>
-          <p:cNvPr id="9" name="Text 7"/>
-          <p:cNvSpPr txBox="1"/>
-          <p:nvPr/>
-        </p:nvSpPr>
-        <p:spPr>
-          <a:xfrm>
-            <a:off x="658368" y="1783080"/>
-            <a:ext cx="822960" cy="594360"/>
-          </a:xfrm>
-          <a:prstGeom prst="rect">
-            <a:avLst/>
-          </a:prstGeom>
-          <a:noFill/>
-          <a:ln/>
-        </p:spPr>
-        <p:txBody>
-          <a:bodyPr wrap="square" lIns="0" tIns="0" rIns="0" bIns="0" rtlCol="0" anchor="ctr"/>
-          <a:lstStyle/>
-          <a:p>
-            <a:pPr indent="0" marL="0">
-              <a:buNone/>
-            </a:pPr>
-            <a:r>
-              <a:rPr lang="en-US" sz="1700" b="1" dirty="0">
-                <a:solidFill>
-                  <a:srgbClr val="FFFFFF"/>
+              <a:t>… erwartete von seinem Sohn, dass er stark … ist.</a:t>
+            </a:r>
+            <a:endParaRPr lang="en-US" sz="1600" dirty="0"/>
+          </a:p>
+          <a:p>
+            <a:pPr indent="0" marL="0">
+              <a:spcAft>
+                <a:spcPts val="300"/>
+              </a:spcAft>
+              <a:buNone/>
+            </a:pPr>
+            <a:r>
+              <a:rPr lang="en-US" sz="1600" i="1" dirty="0">
+                <a:solidFill>
+                  <a:srgbClr val="5B6B8C"/>
                 </a:solidFill>
                 <a:latin typeface="Calibri" pitchFamily="34" charset="0"/>
                 <a:ea typeface="Calibri" pitchFamily="34" charset="-122"/>
                 <a:cs typeface="Calibri" pitchFamily="34" charset="-120"/>
               </a:rPr>
-              <a:t>Z.</a:t>
-            </a:r>
-            <a:endParaRPr lang="en-US" sz="1700" dirty="0"/>
-          </a:p>
-        </p:txBody>
-      </p:sp>
-      <p:sp>
-        <p:nvSpPr>
-          <p:cNvPr id="10" name="Shape 8"/>
-          <p:cNvSpPr/>
-          <p:nvPr/>
-        </p:nvSpPr>
-        <p:spPr>
-          <a:xfrm>
-            <a:off x="1645920" y="1783080"/>
-            <a:ext cx="3310128" cy="594360"/>
-          </a:xfrm>
-          <a:prstGeom prst="roundRect">
-            <a:avLst>
-              <a:gd name="adj" fmla="val 6154"/>
-            </a:avLst>
-          </a:prstGeom>
-          <a:solidFill>
-            <a:srgbClr val="1E2761"/>
-          </a:solidFill>
-          <a:ln/>
-        </p:spPr>
-      </p:sp>
-      <p:sp>
-        <p:nvSpPr>
-          <p:cNvPr id="11" name="Text 9"/>
-          <p:cNvSpPr txBox="1"/>
-          <p:nvPr/>
-        </p:nvSpPr>
-        <p:spPr>
-          <a:xfrm>
-            <a:off x="1755648" y="1783080"/>
-            <a:ext cx="3108960" cy="594360"/>
-          </a:xfrm>
-          <a:prstGeom prst="rect">
-            <a:avLst/>
-          </a:prstGeom>
-          <a:noFill/>
-          <a:ln/>
-        </p:spPr>
-        <p:txBody>
-          <a:bodyPr wrap="square" lIns="0" tIns="0" rIns="0" bIns="0" rtlCol="0" anchor="ctr"/>
-          <a:lstStyle/>
-          <a:p>
-            <a:pPr indent="0" marL="0">
-              <a:buNone/>
-            </a:pPr>
-            <a:r>
-              <a:rPr lang="en-US" sz="1700" b="1" dirty="0">
-                <a:solidFill>
-                  <a:srgbClr val="FFFFFF"/>
+              <a:t>Das Besondere daran ist, dass er schreibt …</a:t>
+            </a:r>
+            <a:endParaRPr lang="en-US" sz="1600" dirty="0"/>
+          </a:p>
+          <a:p>
+            <a:pPr indent="0" marL="0">
+              <a:spcAft>
+                <a:spcPts val="300"/>
+              </a:spcAft>
+              <a:buNone/>
+            </a:pPr>
+            <a:r>
+              <a:rPr lang="en-US" sz="1600" i="1" dirty="0">
+                <a:solidFill>
+                  <a:srgbClr val="5B6B8C"/>
                 </a:solidFill>
                 <a:latin typeface="Calibri" pitchFamily="34" charset="0"/>
                 <a:ea typeface="Calibri" pitchFamily="34" charset="-122"/>
                 <a:cs typeface="Calibri" pitchFamily="34" charset="-120"/>
               </a:rPr>
-              <a:t>Handlung des Vaters</a:t>
-            </a:r>
-            <a:endParaRPr lang="en-US" sz="1700" dirty="0"/>
-          </a:p>
-        </p:txBody>
-      </p:sp>
-      <p:sp>
-        <p:nvSpPr>
-          <p:cNvPr id="12" name="Shape 10"/>
+              <a:t>Sie tat das aber nicht …  (das = dieses)</a:t>
+            </a:r>
+            <a:endParaRPr lang="en-US" sz="1600" dirty="0"/>
+          </a:p>
+        </p:txBody>
+      </p:sp>
+      <p:sp>
+        <p:nvSpPr>
+          <p:cNvPr id="10" name="Shape 8"/>
           <p:cNvSpPr/>
           <p:nvPr/>
         </p:nvSpPr>
         <p:spPr>
           <a:xfrm>
-            <a:off x="5029200" y="1783080"/>
-            <a:ext cx="3218688" cy="594360"/>
+            <a:off x="6126480" y="1143000"/>
+            <a:ext cx="5486400" cy="2560320"/>
           </a:xfrm>
           <a:prstGeom prst="roundRect">
             <a:avLst>
-              <a:gd name="adj" fmla="val 6154"/>
+              <a:gd name="adj" fmla="val 2857"/>
             </a:avLst>
           </a:prstGeom>
           <a:solidFill>
-            <a:srgbClr val="1E2761"/>
+            <a:srgbClr val="F4F7FD"/>
           </a:solidFill>
           <a:ln/>
         </p:spPr>
       </p:sp>
       <p:sp>
         <p:nvSpPr>
+          <p:cNvPr id="11" name="Shape 9"/>
+          <p:cNvSpPr/>
+          <p:nvPr/>
+        </p:nvSpPr>
+        <p:spPr>
+          <a:xfrm>
+            <a:off x="6126480" y="1143000"/>
+            <a:ext cx="128016" cy="2560320"/>
+          </a:xfrm>
+          <a:prstGeom prst="roundRect">
+            <a:avLst>
+              <a:gd name="adj" fmla="val 14286"/>
+            </a:avLst>
+          </a:prstGeom>
+          <a:solidFill>
+            <a:srgbClr val="E8A33D"/>
+          </a:solidFill>
+          <a:ln/>
+        </p:spPr>
+      </p:sp>
+      <p:sp>
+        <p:nvSpPr>
+          <p:cNvPr id="12" name="Text 10"/>
+          <p:cNvSpPr txBox="1"/>
+          <p:nvPr/>
+        </p:nvSpPr>
+        <p:spPr>
+          <a:xfrm>
+            <a:off x="6446520" y="1252728"/>
+            <a:ext cx="5029200" cy="411480"/>
+          </a:xfrm>
+          <a:prstGeom prst="rect">
+            <a:avLst/>
+          </a:prstGeom>
+          <a:noFill/>
+          <a:ln/>
+        </p:spPr>
+        <p:txBody>
+          <a:bodyPr wrap="square" lIns="0" tIns="0" rIns="0" bIns="0" rtlCol="0" anchor="t"/>
+          <a:lstStyle/>
+          <a:p>
+            <a:pPr indent="0" marL="0">
+              <a:buNone/>
+            </a:pPr>
+            <a:r>
+              <a:rPr lang="en-US" sz="2000" b="1" dirty="0">
+                <a:solidFill>
+                  <a:srgbClr val="E8A33D"/>
+                </a:solidFill>
+                <a:latin typeface="Cambria" pitchFamily="34" charset="0"/>
+                <a:ea typeface="Cambria" pitchFamily="34" charset="-122"/>
+                <a:cs typeface="Cambria" pitchFamily="34" charset="-120"/>
+              </a:rPr>
+              <a:t>Komma vor Nebensätzen</a:t>
+            </a:r>
+            <a:endParaRPr lang="en-US" sz="2000" dirty="0"/>
+          </a:p>
+        </p:txBody>
+      </p:sp>
+      <p:sp>
+        <p:nvSpPr>
           <p:cNvPr id="13" name="Text 11"/>
           <p:cNvSpPr txBox="1"/>
           <p:nvPr/>
         </p:nvSpPr>
         <p:spPr>
           <a:xfrm>
-            <a:off x="5138928" y="1783080"/>
-            <a:ext cx="3017520" cy="594360"/>
-          </a:xfrm>
-          <a:prstGeom prst="rect">
-            <a:avLst/>
-          </a:prstGeom>
-          <a:noFill/>
-          <a:ln/>
-        </p:spPr>
-        <p:txBody>
-          <a:bodyPr wrap="square" lIns="0" tIns="0" rIns="0" bIns="0" rtlCol="0" anchor="ctr"/>
-          <a:lstStyle/>
-          <a:p>
-            <a:pPr indent="0" marL="0">
-              <a:buNone/>
-            </a:pPr>
-            <a:r>
-              <a:rPr lang="en-US" sz="1700" b="1" dirty="0">
-                <a:solidFill>
-                  <a:srgbClr val="FFFFFF"/>
+            <a:off x="6446520" y="1691640"/>
+            <a:ext cx="4983480" cy="777240"/>
+          </a:xfrm>
+          <a:prstGeom prst="rect">
+            <a:avLst/>
+          </a:prstGeom>
+          <a:noFill/>
+          <a:ln/>
+        </p:spPr>
+        <p:txBody>
+          <a:bodyPr wrap="square" lIns="0" tIns="0" rIns="0" bIns="0" rtlCol="0" anchor="t"/>
+          <a:lstStyle/>
+          <a:p>
+            <a:pPr indent="0" marL="0">
+              <a:buNone/>
+            </a:pPr>
+            <a:r>
+              <a:rPr lang="en-US" sz="1600" dirty="0">
+                <a:solidFill>
+                  <a:srgbClr val="1E2761"/>
                 </a:solidFill>
                 <a:latin typeface="Calibri" pitchFamily="34" charset="0"/>
                 <a:ea typeface="Calibri" pitchFamily="34" charset="-122"/>
                 <a:cs typeface="Calibri" pitchFamily="34" charset="-120"/>
               </a:rPr>
-              <a:t>Modell (Seite / Axiom)</a:t>
-            </a:r>
-            <a:endParaRPr lang="en-US" sz="1700" dirty="0"/>
-          </a:p>
-        </p:txBody>
-      </p:sp>
-      <p:sp>
-        <p:nvSpPr>
-          <p:cNvPr id="14" name="Shape 12"/>
-          <p:cNvSpPr/>
-          <p:nvPr/>
-        </p:nvSpPr>
-        <p:spPr>
-          <a:xfrm>
-            <a:off x="8321040" y="1783080"/>
-            <a:ext cx="3218688" cy="594360"/>
-          </a:xfrm>
-          <a:prstGeom prst="roundRect">
-            <a:avLst>
-              <a:gd name="adj" fmla="val 6154"/>
-            </a:avLst>
-          </a:prstGeom>
-          <a:solidFill>
-            <a:srgbClr val="1E2761"/>
-          </a:solidFill>
-          <a:ln/>
-        </p:spPr>
-      </p:sp>
-      <p:sp>
-        <p:nvSpPr>
-          <p:cNvPr id="15" name="Text 13"/>
-          <p:cNvSpPr txBox="1"/>
-          <p:nvPr/>
-        </p:nvSpPr>
-        <p:spPr>
-          <a:xfrm>
-            <a:off x="8430768" y="1783080"/>
-            <a:ext cx="3017520" cy="594360"/>
-          </a:xfrm>
-          <a:prstGeom prst="rect">
-            <a:avLst/>
-          </a:prstGeom>
-          <a:noFill/>
-          <a:ln/>
-        </p:spPr>
-        <p:txBody>
-          <a:bodyPr wrap="square" lIns="0" tIns="0" rIns="0" bIns="0" rtlCol="0" anchor="ctr"/>
-          <a:lstStyle/>
-          <a:p>
-            <a:pPr indent="0" marL="0">
-              <a:buNone/>
-            </a:pPr>
-            <a:r>
-              <a:rPr lang="en-US" sz="1700" b="1" dirty="0">
-                <a:solidFill>
-                  <a:srgbClr val="FFFFFF"/>
+              <a:t>Vor dass, weil, wenn, damit, sodass, warum und vor Relativsätzen (der, die, das) steht ein Komma.</a:t>
+            </a:r>
+            <a:endParaRPr lang="en-US" sz="1600" dirty="0"/>
+          </a:p>
+        </p:txBody>
+      </p:sp>
+      <p:sp>
+        <p:nvSpPr>
+          <p:cNvPr id="14" name="Text 12"/>
+          <p:cNvSpPr txBox="1"/>
+          <p:nvPr/>
+        </p:nvSpPr>
+        <p:spPr>
+          <a:xfrm>
+            <a:off x="6446520" y="2468880"/>
+            <a:ext cx="4983480" cy="1188720"/>
+          </a:xfrm>
+          <a:prstGeom prst="rect">
+            <a:avLst/>
+          </a:prstGeom>
+          <a:noFill/>
+          <a:ln/>
+        </p:spPr>
+        <p:txBody>
+          <a:bodyPr wrap="square" lIns="0" tIns="0" rIns="0" bIns="0" rtlCol="0" anchor="t"/>
+          <a:lstStyle/>
+          <a:p>
+            <a:pPr indent="0" marL="0">
+              <a:spcAft>
+                <a:spcPts val="300"/>
+              </a:spcAft>
+              <a:buNone/>
+            </a:pPr>
+            <a:r>
+              <a:rPr lang="en-US" sz="1600" i="1" dirty="0">
+                <a:solidFill>
+                  <a:srgbClr val="5B6B8C"/>
                 </a:solidFill>
                 <a:latin typeface="Calibri" pitchFamily="34" charset="0"/>
                 <a:ea typeface="Calibri" pitchFamily="34" charset="-122"/>
                 <a:cs typeface="Calibri" pitchFamily="34" charset="-120"/>
               </a:rPr>
-              <a:t>Wirkung auf den Sohn (Zitat)</a:t>
-            </a:r>
-            <a:endParaRPr lang="en-US" sz="1700" dirty="0"/>
-          </a:p>
-        </p:txBody>
-      </p:sp>
-      <p:sp>
-        <p:nvSpPr>
-          <p:cNvPr id="16" name="Text 14"/>
-          <p:cNvSpPr txBox="1"/>
-          <p:nvPr/>
-        </p:nvSpPr>
-        <p:spPr>
-          <a:xfrm>
-            <a:off x="548640" y="2514600"/>
-            <a:ext cx="10972800" cy="411480"/>
-          </a:xfrm>
-          <a:prstGeom prst="rect">
-            <a:avLst/>
-          </a:prstGeom>
-          <a:noFill/>
-          <a:ln/>
-        </p:spPr>
-        <p:txBody>
-          <a:bodyPr wrap="square" lIns="0" tIns="0" rIns="0" bIns="0" rtlCol="0" anchor="t"/>
-          <a:lstStyle/>
-          <a:p>
-            <a:pPr indent="0" marL="0">
-              <a:buNone/>
-            </a:pPr>
-            <a:r>
-              <a:rPr lang="en-US" sz="1900" b="1" dirty="0">
-                <a:solidFill>
-                  <a:srgbClr val="D9534F"/>
+              <a:t>… einen Brief, der über hundert … Seiten lang ist.</a:t>
+            </a:r>
+            <a:endParaRPr lang="en-US" sz="1600" dirty="0"/>
+          </a:p>
+          <a:p>
+            <a:pPr indent="0" marL="0">
+              <a:spcAft>
+                <a:spcPts val="300"/>
+              </a:spcAft>
+              <a:buNone/>
+            </a:pPr>
+            <a:r>
+              <a:rPr lang="en-US" sz="1600" i="1" dirty="0">
+                <a:solidFill>
+                  <a:srgbClr val="5B6B8C"/>
                 </a:solidFill>
                 <a:latin typeface="Calibri" pitchFamily="34" charset="0"/>
                 <a:ea typeface="Calibri" pitchFamily="34" charset="-122"/>
                 <a:cs typeface="Calibri" pitchFamily="34" charset="-120"/>
               </a:rPr>
-              <a:t>mindestens vier Zeilen · jede mit Zitat und Zeilenangabe</a:t>
-            </a:r>
-            <a:endParaRPr lang="en-US" sz="1900" dirty="0"/>
-          </a:p>
-        </p:txBody>
-      </p:sp>
-      <p:sp>
-        <p:nvSpPr>
-          <p:cNvPr id="17" name="Shape 15"/>
+              <a:t>… zu erklären, warum er Angst vor ihm hat.</a:t>
+            </a:r>
+            <a:endParaRPr lang="en-US" sz="1600" dirty="0"/>
+          </a:p>
+          <a:p>
+            <a:pPr indent="0" marL="0">
+              <a:spcAft>
+                <a:spcPts val="300"/>
+              </a:spcAft>
+              <a:buNone/>
+            </a:pPr>
+            <a:r>
+              <a:rPr lang="en-US" sz="1600" i="1" dirty="0">
+                <a:solidFill>
+                  <a:srgbClr val="5B6B8C"/>
+                </a:solidFill>
+                <a:latin typeface="Calibri" pitchFamily="34" charset="0"/>
+                <a:ea typeface="Calibri" pitchFamily="34" charset="-122"/>
+                <a:cs typeface="Calibri" pitchFamily="34" charset="-120"/>
+              </a:rPr>
+              <a:t>… der Mutter, damit sie ihn weitergibt.</a:t>
+            </a:r>
+            <a:endParaRPr lang="en-US" sz="1600" dirty="0"/>
+          </a:p>
+        </p:txBody>
+      </p:sp>
+      <p:sp>
+        <p:nvSpPr>
+          <p:cNvPr id="15" name="Shape 13"/>
           <p:cNvSpPr/>
           <p:nvPr/>
         </p:nvSpPr>
         <p:spPr>
           <a:xfrm>
-            <a:off x="548640" y="3200400"/>
-            <a:ext cx="11064240" cy="3246120"/>
+            <a:off x="457200" y="3840480"/>
+            <a:ext cx="5486400" cy="2560320"/>
           </a:xfrm>
           <a:prstGeom prst="roundRect">
             <a:avLst>
-              <a:gd name="adj" fmla="val 2254"/>
+              <a:gd name="adj" fmla="val 2857"/>
             </a:avLst>
           </a:prstGeom>
           <a:solidFill>
-            <a:srgbClr val="FFF8EC"/>
+            <a:srgbClr val="F4F7FD"/>
           </a:solidFill>
           <a:ln/>
         </p:spPr>
       </p:sp>
       <p:sp>
         <p:nvSpPr>
-          <p:cNvPr id="18" name="Text 16"/>
-          <p:cNvSpPr txBox="1"/>
-          <p:nvPr/>
-        </p:nvSpPr>
-        <p:spPr>
-          <a:xfrm>
-            <a:off x="822960" y="3337560"/>
-            <a:ext cx="10058400" cy="411480"/>
+          <p:cNvPr id="16" name="Shape 14"/>
+          <p:cNvSpPr/>
+          <p:nvPr/>
+        </p:nvSpPr>
+        <p:spPr>
+          <a:xfrm>
+            <a:off x="457200" y="3840480"/>
+            <a:ext cx="128016" cy="2560320"/>
+          </a:xfrm>
+          <a:prstGeom prst="roundRect">
+            <a:avLst>
+              <a:gd name="adj" fmla="val 14286"/>
+            </a:avLst>
+          </a:prstGeom>
+          <a:solidFill>
+            <a:srgbClr val="2E9E6B"/>
+          </a:solidFill>
+          <a:ln/>
+        </p:spPr>
+      </p:sp>
+      <p:sp>
+        <p:nvSpPr>
+          <p:cNvPr id="17" name="Text 15"/>
+          <p:cNvSpPr txBox="1"/>
+          <p:nvPr/>
+        </p:nvSpPr>
+        <p:spPr>
+          <a:xfrm>
+            <a:off x="777240" y="3950208"/>
+            <a:ext cx="5029200" cy="411480"/>
           </a:xfrm>
           <a:prstGeom prst="rect">
             <a:avLst/>
@@ -5770,13 +5077,13 @@
             <a:r>
               <a:rPr lang="en-US" sz="2000" b="1" dirty="0">
                 <a:solidFill>
-                  <a:srgbClr val="E8A33D"/>
+                  <a:srgbClr val="2E9E6B"/>
                 </a:solidFill>
                 <a:latin typeface="Cambria" pitchFamily="34" charset="0"/>
                 <a:ea typeface="Cambria" pitchFamily="34" charset="-122"/>
                 <a:cs typeface="Cambria" pitchFamily="34" charset="-120"/>
               </a:rPr>
-              <a:t>Wenn du nicht weiterkommst</a:t>
+              <a:t>Groß oder klein?</a:t>
             </a:r>
             <a:endParaRPr lang="en-US" sz="2000" dirty="0"/>
           </a:p>
@@ -5784,14 +5091,14 @@
       </p:sp>
       <p:sp>
         <p:nvSpPr>
-          <p:cNvPr id="19" name="Text 17"/>
-          <p:cNvSpPr txBox="1"/>
-          <p:nvPr/>
-        </p:nvSpPr>
-        <p:spPr>
-          <a:xfrm>
-            <a:off x="822960" y="3840480"/>
-            <a:ext cx="10515600" cy="2468880"/>
+          <p:cNvPr id="18" name="Text 16"/>
+          <p:cNvSpPr txBox="1"/>
+          <p:nvPr/>
+        </p:nvSpPr>
+        <p:spPr>
+          <a:xfrm>
+            <a:off x="777240" y="4389120"/>
+            <a:ext cx="4983480" cy="777240"/>
           </a:xfrm>
           <a:prstGeom prst="rect">
             <a:avLst/>
@@ -5803,15 +5110,11 @@
           <a:bodyPr wrap="square" lIns="0" tIns="0" rIns="0" bIns="0" rtlCol="0" anchor="t"/>
           <a:lstStyle/>
           <a:p>
-            <a:pPr marL="342900" indent="-342900">
-              <a:spcAft>
-                <a:spcPts val="800"/>
-              </a:spcAft>
-              <a:buSzPct val="100000"/>
-              <a:buChar char="•"/>
-            </a:pPr>
-            <a:r>
-              <a:rPr lang="en-US" sz="1900" dirty="0">
+            <a:pPr indent="0" marL="0">
+              <a:buNone/>
+            </a:pPr>
+            <a:r>
+              <a:rPr lang="en-US" sz="1600" dirty="0">
                 <a:solidFill>
                   <a:srgbClr val="1E2761"/>
                 </a:solidFill>
@@ -5819,72 +5122,295 @@
                 <a:ea typeface="Calibri" pitchFamily="34" charset="-122"/>
                 <a:cs typeface="Calibri" pitchFamily="34" charset="-120"/>
               </a:rPr>
-              <a:t>Wie klingen die Fragen des Vaters – und wie sind sie gemeint? (Z. 3–5)</a:t>
-            </a:r>
-            <a:endParaRPr lang="en-US" sz="1900" dirty="0"/>
-          </a:p>
-          <a:p>
-            <a:pPr marL="342900" indent="-342900">
+              <a:t>Nominalisierte Adjektive groß, Zahlwörter und Zahladjektive klein und zusammen.</a:t>
+            </a:r>
+            <a:endParaRPr lang="en-US" sz="1600" dirty="0"/>
+          </a:p>
+        </p:txBody>
+      </p:sp>
+      <p:sp>
+        <p:nvSpPr>
+          <p:cNvPr id="19" name="Text 17"/>
+          <p:cNvSpPr txBox="1"/>
+          <p:nvPr/>
+        </p:nvSpPr>
+        <p:spPr>
+          <a:xfrm>
+            <a:off x="777240" y="5166360"/>
+            <a:ext cx="4983480" cy="1188720"/>
+          </a:xfrm>
+          <a:prstGeom prst="rect">
+            <a:avLst/>
+          </a:prstGeom>
+          <a:noFill/>
+          <a:ln/>
+        </p:spPr>
+        <p:txBody>
+          <a:bodyPr wrap="square" lIns="0" tIns="0" rIns="0" bIns="0" rtlCol="0" anchor="t"/>
+          <a:lstStyle/>
+          <a:p>
+            <a:pPr indent="0" marL="0">
               <a:spcAft>
-                <a:spcPts val="800"/>
+                <a:spcPts val="300"/>
               </a:spcAft>
-              <a:buSzPct val="100000"/>
-              <a:buChar char="•"/>
-            </a:pPr>
-            <a:r>
-              <a:rPr lang="en-US" sz="1900" dirty="0">
-                <a:solidFill>
-                  <a:srgbClr val="1E2761"/>
+              <a:buNone/>
+            </a:pPr>
+            <a:r>
+              <a:rPr lang="en-US" sz="1600" i="1" dirty="0">
+                <a:solidFill>
+                  <a:srgbClr val="5B6B8C"/>
                 </a:solidFill>
                 <a:latin typeface="Calibri" pitchFamily="34" charset="0"/>
                 <a:ea typeface="Calibri" pitchFamily="34" charset="-122"/>
                 <a:cs typeface="Calibri" pitchFamily="34" charset="-120"/>
               </a:rPr>
-              <a:t>Was sagen Lachen und Gesicht? (Z. 5)</a:t>
-            </a:r>
-            <a:endParaRPr lang="en-US" sz="1900" dirty="0"/>
-          </a:p>
-          <a:p>
-            <a:pPr marL="342900" indent="-342900">
+              <a:t>groß: das Besondere</a:t>
+            </a:r>
+            <a:endParaRPr lang="en-US" sz="1600" dirty="0"/>
+          </a:p>
+          <a:p>
+            <a:pPr indent="0" marL="0">
               <a:spcAft>
-                <a:spcPts val="800"/>
+                <a:spcPts val="300"/>
               </a:spcAft>
-              <a:buSzPct val="100000"/>
-              <a:buChar char="•"/>
-            </a:pPr>
-            <a:r>
-              <a:rPr lang="en-US" sz="1900" dirty="0">
-                <a:solidFill>
-                  <a:srgbClr val="1E2761"/>
+              <a:buNone/>
+            </a:pPr>
+            <a:r>
+              <a:rPr lang="en-US" sz="1600" i="1" dirty="0">
+                <a:solidFill>
+                  <a:srgbClr val="5B6B8C"/>
                 </a:solidFill>
                 <a:latin typeface="Calibri" pitchFamily="34" charset="0"/>
                 <a:ea typeface="Calibri" pitchFamily="34" charset="-122"/>
                 <a:cs typeface="Calibri" pitchFamily="34" charset="-120"/>
               </a:rPr>
-              <a:t>Mit wem spricht der Vater eigentlich? (Z. 9–10)</a:t>
-            </a:r>
-            <a:endParaRPr lang="en-US" sz="1900" dirty="0"/>
-          </a:p>
-          <a:p>
-            <a:pPr marL="342900" indent="-342900">
+              <a:t>klein: der sechsunddreißigjährige Kafka</a:t>
+            </a:r>
+            <a:endParaRPr lang="en-US" sz="1600" dirty="0"/>
+          </a:p>
+          <a:p>
+            <a:pPr indent="0" marL="0">
               <a:spcAft>
-                <a:spcPts val="800"/>
+                <a:spcPts val="300"/>
               </a:spcAft>
-              <a:buSzPct val="100000"/>
-              <a:buChar char="•"/>
-            </a:pPr>
-            <a:r>
-              <a:rPr lang="en-US" sz="1900" dirty="0">
-                <a:solidFill>
-                  <a:srgbClr val="1E2761"/>
+              <a:buNone/>
+            </a:pPr>
+            <a:r>
+              <a:rPr lang="en-US" sz="1600" i="1" dirty="0">
+                <a:solidFill>
+                  <a:srgbClr val="5B6B8C"/>
                 </a:solidFill>
                 <a:latin typeface="Calibri" pitchFamily="34" charset="0"/>
                 <a:ea typeface="Calibri" pitchFamily="34" charset="-122"/>
                 <a:cs typeface="Calibri" pitchFamily="34" charset="-120"/>
               </a:rPr>
-              <a:t>Was macht der Sohn daraus? (Z. 11–15)</a:t>
-            </a:r>
-            <a:endParaRPr lang="en-US" sz="1900" dirty="0"/>
+              <a:t>klein: über hundert Seiten  ·  einer … der andere</a:t>
+            </a:r>
+            <a:endParaRPr lang="en-US" sz="1600" dirty="0"/>
+          </a:p>
+        </p:txBody>
+      </p:sp>
+      <p:sp>
+        <p:nvSpPr>
+          <p:cNvPr id="20" name="Shape 18"/>
+          <p:cNvSpPr/>
+          <p:nvPr/>
+        </p:nvSpPr>
+        <p:spPr>
+          <a:xfrm>
+            <a:off x="6126480" y="3840480"/>
+            <a:ext cx="5486400" cy="2560320"/>
+          </a:xfrm>
+          <a:prstGeom prst="roundRect">
+            <a:avLst>
+              <a:gd name="adj" fmla="val 2857"/>
+            </a:avLst>
+          </a:prstGeom>
+          <a:solidFill>
+            <a:srgbClr val="F4F7FD"/>
+          </a:solidFill>
+          <a:ln/>
+        </p:spPr>
+      </p:sp>
+      <p:sp>
+        <p:nvSpPr>
+          <p:cNvPr id="21" name="Shape 19"/>
+          <p:cNvSpPr/>
+          <p:nvPr/>
+        </p:nvSpPr>
+        <p:spPr>
+          <a:xfrm>
+            <a:off x="6126480" y="3840480"/>
+            <a:ext cx="128016" cy="2560320"/>
+          </a:xfrm>
+          <a:prstGeom prst="roundRect">
+            <a:avLst>
+              <a:gd name="adj" fmla="val 14286"/>
+            </a:avLst>
+          </a:prstGeom>
+          <a:solidFill>
+            <a:srgbClr val="3F7CC4"/>
+          </a:solidFill>
+          <a:ln/>
+        </p:spPr>
+      </p:sp>
+      <p:sp>
+        <p:nvSpPr>
+          <p:cNvPr id="22" name="Text 20"/>
+          <p:cNvSpPr txBox="1"/>
+          <p:nvPr/>
+        </p:nvSpPr>
+        <p:spPr>
+          <a:xfrm>
+            <a:off x="6446520" y="3950208"/>
+            <a:ext cx="5029200" cy="411480"/>
+          </a:xfrm>
+          <a:prstGeom prst="rect">
+            <a:avLst/>
+          </a:prstGeom>
+          <a:noFill/>
+          <a:ln/>
+        </p:spPr>
+        <p:txBody>
+          <a:bodyPr wrap="square" lIns="0" tIns="0" rIns="0" bIns="0" rtlCol="0" anchor="t"/>
+          <a:lstStyle/>
+          <a:p>
+            <a:pPr indent="0" marL="0">
+              <a:buNone/>
+            </a:pPr>
+            <a:r>
+              <a:rPr lang="en-US" sz="2000" b="1" dirty="0">
+                <a:solidFill>
+                  <a:srgbClr val="3F7CC4"/>
+                </a:solidFill>
+                <a:latin typeface="Cambria" pitchFamily="34" charset="0"/>
+                <a:ea typeface="Cambria" pitchFamily="34" charset="-122"/>
+                <a:cs typeface="Cambria" pitchFamily="34" charset="-120"/>
+              </a:rPr>
+              <a:t>Fachwörter</a:t>
+            </a:r>
+            <a:endParaRPr lang="en-US" sz="2000" dirty="0"/>
+          </a:p>
+        </p:txBody>
+      </p:sp>
+      <p:sp>
+        <p:nvSpPr>
+          <p:cNvPr id="23" name="Text 21"/>
+          <p:cNvSpPr txBox="1"/>
+          <p:nvPr/>
+        </p:nvSpPr>
+        <p:spPr>
+          <a:xfrm>
+            <a:off x="6446520" y="4389120"/>
+            <a:ext cx="4983480" cy="777240"/>
+          </a:xfrm>
+          <a:prstGeom prst="rect">
+            <a:avLst/>
+          </a:prstGeom>
+          <a:noFill/>
+          <a:ln/>
+        </p:spPr>
+        <p:txBody>
+          <a:bodyPr wrap="square" lIns="0" tIns="0" rIns="0" bIns="0" rtlCol="0" anchor="t"/>
+          <a:lstStyle/>
+          <a:p>
+            <a:pPr indent="0" marL="0">
+              <a:buNone/>
+            </a:pPr>
+            <a:r>
+              <a:rPr lang="en-US" sz="1600" dirty="0">
+                <a:solidFill>
+                  <a:srgbClr val="1E2761"/>
+                </a:solidFill>
+                <a:latin typeface="Calibri" pitchFamily="34" charset="0"/>
+                <a:ea typeface="Calibri" pitchFamily="34" charset="-122"/>
+                <a:cs typeface="Calibri" pitchFamily="34" charset="-120"/>
+              </a:rPr>
+              <a:t>Diese Wörter müssen sitzen – sie kommen in jeder Analyse vor.</a:t>
+            </a:r>
+            <a:endParaRPr lang="en-US" sz="1600" dirty="0"/>
+          </a:p>
+        </p:txBody>
+      </p:sp>
+      <p:sp>
+        <p:nvSpPr>
+          <p:cNvPr id="24" name="Text 22"/>
+          <p:cNvSpPr txBox="1"/>
+          <p:nvPr/>
+        </p:nvSpPr>
+        <p:spPr>
+          <a:xfrm>
+            <a:off x="6446520" y="5166360"/>
+            <a:ext cx="4983480" cy="1188720"/>
+          </a:xfrm>
+          <a:prstGeom prst="rect">
+            <a:avLst/>
+          </a:prstGeom>
+          <a:noFill/>
+          <a:ln/>
+        </p:spPr>
+        <p:txBody>
+          <a:bodyPr wrap="square" lIns="0" tIns="0" rIns="0" bIns="0" rtlCol="0" anchor="t"/>
+          <a:lstStyle/>
+          <a:p>
+            <a:pPr indent="0" marL="0">
+              <a:spcAft>
+                <a:spcPts val="300"/>
+              </a:spcAft>
+              <a:buNone/>
+            </a:pPr>
+            <a:r>
+              <a:rPr lang="en-US" sz="1600" i="1" dirty="0">
+                <a:solidFill>
+                  <a:srgbClr val="5B6B8C"/>
+                </a:solidFill>
+                <a:latin typeface="Calibri" pitchFamily="34" charset="0"/>
+                <a:ea typeface="Calibri" pitchFamily="34" charset="-122"/>
+                <a:cs typeface="Calibri" pitchFamily="34" charset="-120"/>
+              </a:rPr>
+              <a:t>symmetrisch  ·  komplementär</a:t>
+            </a:r>
+            <a:endParaRPr lang="en-US" sz="1600" dirty="0"/>
+          </a:p>
+          <a:p>
+            <a:pPr indent="0" marL="0">
+              <a:spcAft>
+                <a:spcPts val="300"/>
+              </a:spcAft>
+              <a:buNone/>
+            </a:pPr>
+            <a:r>
+              <a:rPr lang="en-US" sz="1600" i="1" dirty="0">
+                <a:solidFill>
+                  <a:srgbClr val="5B6B8C"/>
+                </a:solidFill>
+                <a:latin typeface="Calibri" pitchFamily="34" charset="0"/>
+                <a:ea typeface="Calibri" pitchFamily="34" charset="-122"/>
+                <a:cs typeface="Calibri" pitchFamily="34" charset="-120"/>
+              </a:rPr>
+              <a:t>Generationenkonflikt  ·  Watzlawick</a:t>
+            </a:r>
+            <a:endParaRPr lang="en-US" sz="1600" dirty="0"/>
+          </a:p>
+          <a:p>
+            <a:pPr indent="0" marL="0">
+              <a:spcAft>
+                <a:spcPts val="300"/>
+              </a:spcAft>
+              <a:buNone/>
+            </a:pPr>
+            <a:r>
+              <a:rPr lang="en-US" sz="1600" i="1" dirty="0">
+                <a:solidFill>
+                  <a:srgbClr val="5B6B8C"/>
+                </a:solidFill>
+                <a:latin typeface="Calibri" pitchFamily="34" charset="0"/>
+                <a:ea typeface="Calibri" pitchFamily="34" charset="-122"/>
+                <a:cs typeface="Calibri" pitchFamily="34" charset="-120"/>
+              </a:rPr>
+              <a:t>handschriftlich  ·  veröffentlicht</a:t>
+            </a:r>
+            <a:endParaRPr lang="en-US" sz="1600" dirty="0"/>
           </a:p>
         </p:txBody>
       </p:sp>
@@ -5973,7 +5499,7 @@
                 <a:ea typeface="Calibri" pitchFamily="34" charset="-122"/>
                 <a:cs typeface="Calibri" pitchFamily="34" charset="-120"/>
               </a:rPr>
-              <a:t>ABSCHNITT C · ZUSAMMENTRAGEN</a:t>
+              <a:t>ABSCHNITT A · GEMEINSAM · MATRIX IN DEN HEFTER</a:t>
             </a:r>
             <a:endParaRPr lang="en-US" sz="1300" dirty="0"/>
           </a:p>
@@ -6012,7 +5538,7 @@
                 <a:ea typeface="Cambria" pitchFamily="34" charset="-122"/>
                 <a:cs typeface="Cambria" pitchFamily="34" charset="-120"/>
               </a:rPr>
-              <a:t>Ironie (S. 6)</a:t>
+              <a:t>„ich verlernte das Reden“ (S. 5 f.)</a:t>
             </a:r>
             <a:endParaRPr lang="en-US" sz="2700" dirty="0"/>
           </a:p>
@@ -6090,7 +5616,7 @@
                 <a:ea typeface="Cambria" pitchFamily="34" charset="-122"/>
                 <a:cs typeface="Cambria" pitchFamily="34" charset="-120"/>
               </a:rPr>
-              <a:t>Ein besonderes Vertrauen hattest Du zur Erziehung durch Ironie, sie entsprach</a:t>
+              <a:t>Die Unmöglichkeit des ruhigen Verkehrs hatte noch eine weitere eigentlich sehr</a:t>
             </a:r>
             <a:endParaRPr lang="en-US" sz="2000" dirty="0"/>
           </a:p>
@@ -6168,7 +5694,7 @@
                 <a:ea typeface="Cambria" pitchFamily="34" charset="-122"/>
                 <a:cs typeface="Cambria" pitchFamily="34" charset="-120"/>
               </a:rPr>
-              <a:t>auch am besten Deiner Überlegenheit über mich. Eine Ermahnung hatte bei Dir</a:t>
+              <a:t>natürliche Folge: ich verlernte das Reden. Ich wäre ja wohl auch sonst kein</a:t>
             </a:r>
             <a:endParaRPr lang="en-US" sz="2000" dirty="0"/>
           </a:p>
@@ -6246,7 +5772,7 @@
                 <a:ea typeface="Cambria" pitchFamily="34" charset="-122"/>
                 <a:cs typeface="Cambria" pitchFamily="34" charset="-120"/>
               </a:rPr>
-              <a:t>gewöhnlich diese Form: »Kannst Du das nicht so und so machen? Das ist Dir wohl</a:t>
+              <a:t>großer Redner geworden, aber die gewöhnlich fließende menschliche Sprache</a:t>
             </a:r>
             <a:endParaRPr lang="en-US" sz="2000" dirty="0"/>
           </a:p>
@@ -6324,7 +5850,7 @@
                 <a:ea typeface="Cambria" pitchFamily="34" charset="-122"/>
                 <a:cs typeface="Cambria" pitchFamily="34" charset="-120"/>
               </a:rPr>
-              <a:t>schon zu viel? Dazu hast Du natürlich keine Zeit?« und ähnlich. Dabei jede</a:t>
+              <a:t>hätte ich doch beherrscht. Du hast mir aber schon früh das Wort verboten.</a:t>
             </a:r>
             <a:endParaRPr lang="en-US" sz="2000" dirty="0"/>
           </a:p>
@@ -6402,7 +5928,7 @@
                 <a:ea typeface="Cambria" pitchFamily="34" charset="-122"/>
                 <a:cs typeface="Cambria" pitchFamily="34" charset="-120"/>
               </a:rPr>
-              <a:t>solche Frage begleitet von bösem Lachen und bösem Gesicht. Man wurde</a:t>
+              <a:t>Deine Drohung: »kein Wort der Widerrede!« und die dazu erhobene Hand begleiten</a:t>
             </a:r>
             <a:endParaRPr lang="en-US" sz="2000" dirty="0"/>
           </a:p>
@@ -6480,7 +6006,7 @@
                 <a:ea typeface="Cambria" pitchFamily="34" charset="-122"/>
                 <a:cs typeface="Cambria" pitchFamily="34" charset="-120"/>
               </a:rPr>
-              <a:t>gewissermaßen schon bestraft, ehe man noch wußte, daß man etwas Schlechtes</a:t>
+              <a:t>mich schon seit jeher. Ich bekam vor Dir – Du bist, sobald es um Deine Dinge</a:t>
             </a:r>
             <a:endParaRPr lang="en-US" sz="2000" dirty="0"/>
           </a:p>
@@ -6558,7 +6084,7 @@
                 <a:ea typeface="Cambria" pitchFamily="34" charset="-122"/>
                 <a:cs typeface="Cambria" pitchFamily="34" charset="-120"/>
               </a:rPr>
-              <a:t>getan hatte. Aufreizend waren auch jene Zurechtweisungen, wo man als dritte</a:t>
+              <a:t>geht, ein ausgezeichneter Redner – eine stockende, stotternde Art des</a:t>
             </a:r>
             <a:endParaRPr lang="en-US" sz="2000" dirty="0"/>
           </a:p>
@@ -6636,7 +6162,7 @@
                 <a:ea typeface="Cambria" pitchFamily="34" charset="-122"/>
                 <a:cs typeface="Cambria" pitchFamily="34" charset="-120"/>
               </a:rPr>
-              <a:t>Person behandelt, also nicht einmal des bösen Ansprechens gewürdigt wurde; wo</a:t>
+              <a:t>Sprechens, auch das war Dir noch zu viel, schließlich schwieg ich, zuerst</a:t>
             </a:r>
             <a:endParaRPr lang="en-US" sz="2000" dirty="0"/>
           </a:p>
@@ -6714,7 +6240,7 @@
                 <a:ea typeface="Cambria" pitchFamily="34" charset="-122"/>
                 <a:cs typeface="Cambria" pitchFamily="34" charset="-120"/>
               </a:rPr>
-              <a:t>Du also etwa formell zur Mutter sprachst, aber eigentlich zu mir, der dabei</a:t>
+              <a:t>vielleicht aus Trotz, dann, weil ich vor Dir weder denken noch reden konnte.</a:t>
             </a:r>
             <a:endParaRPr lang="en-US" sz="2000" dirty="0"/>
           </a:p>
@@ -6792,7 +6318,7 @@
                 <a:ea typeface="Cambria" pitchFamily="34" charset="-122"/>
                 <a:cs typeface="Cambria" pitchFamily="34" charset="-120"/>
               </a:rPr>
-              <a:t>saß, zum Beispiel: »Das kann man vom Herrn Sohn natürlich nicht haben« und</a:t>
+              <a:t>[…] Du sagtest: »Kein Wort der Widerrede!« und wolltest damit die Dir</a:t>
             </a:r>
             <a:endParaRPr lang="en-US" sz="2000" dirty="0"/>
           </a:p>
@@ -6870,7 +6396,7 @@
                 <a:ea typeface="Cambria" pitchFamily="34" charset="-122"/>
                 <a:cs typeface="Cambria" pitchFamily="34" charset="-120"/>
               </a:rPr>
-              <a:t>dergleichen. (Das bekam dann sein Gegenspiel darin, daß ich zum Beispiel nicht</a:t>
+              <a:t>unangenehmen Gegenkräfte in mir zum Schweigen bringen, diese Einwirkung war</a:t>
             </a:r>
             <a:endParaRPr lang="en-US" sz="2000" dirty="0"/>
           </a:p>
@@ -6948,7 +6474,7 @@
                 <a:ea typeface="Cambria" pitchFamily="34" charset="-122"/>
                 <a:cs typeface="Cambria" pitchFamily="34" charset="-120"/>
               </a:rPr>
-              <a:t>wagte und später aus Gewohnheit gar nicht mehr daran dachte, Dich direkt zu</a:t>
+              <a:t>aber für mich zu stark, ich war zu folgsam, ich verstummte gänzlich, verkroch</a:t>
             </a:r>
             <a:endParaRPr lang="en-US" sz="2000" dirty="0"/>
           </a:p>
@@ -7026,7 +6552,7 @@
                 <a:ea typeface="Cambria" pitchFamily="34" charset="-122"/>
                 <a:cs typeface="Cambria" pitchFamily="34" charset="-120"/>
               </a:rPr>
-              <a:t>fragen, wenn die Mutter dabei war. Es war dem Kind viel ungefährlicher, die</a:t>
+              <a:t>mich vor Dir und wagte mich erst zu regen, wenn ich so weit von Dir entfernt</a:t>
             </a:r>
             <a:endParaRPr lang="en-US" sz="2000" dirty="0"/>
           </a:p>
@@ -7104,7 +6630,7 @@
                 <a:ea typeface="Cambria" pitchFamily="34" charset="-122"/>
                 <a:cs typeface="Cambria" pitchFamily="34" charset="-120"/>
               </a:rPr>
-              <a:t>neben Dir sitzende Mutter nach Dir auszufragen, man fragte dann die Mutter:</a:t>
+              <a:t>war, daß Deine Macht, wenigstens direkt, nicht mehr hinreichte. Du aber</a:t>
             </a:r>
             <a:endParaRPr lang="en-US" sz="2000" dirty="0"/>
           </a:p>
@@ -7182,7 +6708,7 @@
                 <a:ea typeface="Cambria" pitchFamily="34" charset="-122"/>
                 <a:cs typeface="Cambria" pitchFamily="34" charset="-120"/>
               </a:rPr>
-              <a:t>»Wie geht es dem Vater?« und sicherte sich so vor Überraschungen.)</a:t>
+              <a:t>standst davor, und alles schien Dir wieder »contra« zu sein, während es nur</a:t>
             </a:r>
             <a:endParaRPr lang="en-US" sz="2000" dirty="0"/>
           </a:p>
@@ -7190,14 +6716,92 @@
       </p:sp>
       <p:sp>
         <p:nvSpPr>
-          <p:cNvPr id="35" name="Shape 33"/>
+          <p:cNvPr id="35" name="Text 33"/>
+          <p:cNvSpPr txBox="1"/>
+          <p:nvPr/>
+        </p:nvSpPr>
+        <p:spPr>
+          <a:xfrm>
+            <a:off x="365760" y="6172200"/>
+            <a:ext cx="411480" cy="335280"/>
+          </a:xfrm>
+          <a:prstGeom prst="rect">
+            <a:avLst/>
+          </a:prstGeom>
+          <a:noFill/>
+          <a:ln/>
+        </p:spPr>
+        <p:txBody>
+          <a:bodyPr wrap="square" lIns="0" tIns="0" rIns="0" bIns="0" rtlCol="0" anchor="ctr"/>
+          <a:lstStyle/>
+          <a:p>
+            <a:pPr algn="r" indent="0" marL="0">
+              <a:buNone/>
+            </a:pPr>
+            <a:r>
+              <a:rPr lang="en-US" sz="1500" dirty="0">
+                <a:solidFill>
+                  <a:srgbClr val="5B6B8C"/>
+                </a:solidFill>
+                <a:latin typeface="Calibri" pitchFamily="34" charset="0"/>
+                <a:ea typeface="Calibri" pitchFamily="34" charset="-122"/>
+                <a:cs typeface="Calibri" pitchFamily="34" charset="-120"/>
+              </a:rPr>
+              <a:t>16</a:t>
+            </a:r>
+            <a:endParaRPr lang="en-US" sz="1500" dirty="0"/>
+          </a:p>
+        </p:txBody>
+      </p:sp>
+      <p:sp>
+        <p:nvSpPr>
+          <p:cNvPr id="36" name="Text 34"/>
+          <p:cNvSpPr txBox="1"/>
+          <p:nvPr/>
+        </p:nvSpPr>
+        <p:spPr>
+          <a:xfrm>
+            <a:off x="914400" y="6172200"/>
+            <a:ext cx="10972800" cy="335280"/>
+          </a:xfrm>
+          <a:prstGeom prst="rect">
+            <a:avLst/>
+          </a:prstGeom>
+          <a:noFill/>
+          <a:ln/>
+        </p:spPr>
+        <p:txBody>
+          <a:bodyPr wrap="square" lIns="0" tIns="0" rIns="0" bIns="0" rtlCol="0" anchor="ctr"/>
+          <a:lstStyle/>
+          <a:p>
+            <a:pPr indent="0" marL="0">
+              <a:buNone/>
+            </a:pPr>
+            <a:r>
+              <a:rPr lang="en-US" sz="2000" dirty="0">
+                <a:solidFill>
+                  <a:srgbClr val="1E2761"/>
+                </a:solidFill>
+                <a:latin typeface="Cambria" pitchFamily="34" charset="0"/>
+                <a:ea typeface="Cambria" pitchFamily="34" charset="-122"/>
+                <a:cs typeface="Cambria" pitchFamily="34" charset="-120"/>
+              </a:rPr>
+              <a:t>selbstverständliche Folge Deiner Stärke und meiner Schwäche war.</a:t>
+            </a:r>
+            <a:endParaRPr lang="en-US" sz="2000" dirty="0"/>
+          </a:p>
+        </p:txBody>
+      </p:sp>
+      <p:sp>
+        <p:nvSpPr>
+          <p:cNvPr id="37" name="Shape 35"/>
           <p:cNvSpPr/>
           <p:nvPr/>
         </p:nvSpPr>
         <p:spPr>
           <a:xfrm>
             <a:off x="841248" y="1143000"/>
-            <a:ext cx="0" cy="5029200"/>
+            <a:ext cx="0" cy="5364480"/>
           </a:xfrm>
           <a:prstGeom prst="line">
             <a:avLst/>
@@ -7205,7 +6809,7 @@
           <a:noFill/>
           <a:ln w="25400">
             <a:solidFill>
-              <a:srgbClr val="D9534F"/>
+              <a:srgbClr val="3F7CC4"/>
             </a:solidFill>
             <a:prstDash val="solid"/>
           </a:ln>
@@ -7296,7 +6900,7 @@
                 <a:ea typeface="Calibri" pitchFamily="34" charset="-122"/>
                 <a:cs typeface="Calibri" pitchFamily="34" charset="-120"/>
               </a:rPr>
-              <a:t>THESE PRÜFEN</a:t>
+              <a:t>AUFTRAG 1 · ALLEIN</a:t>
             </a:r>
             <a:endParaRPr lang="en-US" sz="1300" dirty="0"/>
           </a:p>
@@ -7335,7 +6939,7 @@
                 <a:ea typeface="Cambria" pitchFamily="34" charset="-122"/>
                 <a:cs typeface="Cambria" pitchFamily="34" charset="-120"/>
               </a:rPr>
-              <a:t>Stimmt die These?</a:t>
+              <a:t>Untersuche Abschnitt C wie Abschnitt A</a:t>
             </a:r>
             <a:endParaRPr lang="en-US" sz="2700" dirty="0"/>
           </a:p>
@@ -7349,16 +6953,16 @@
         </p:nvSpPr>
         <p:spPr>
           <a:xfrm>
-            <a:off x="548640" y="1280160"/>
-            <a:ext cx="11064240" cy="914400"/>
+            <a:off x="10058400" y="164592"/>
+            <a:ext cx="1737360" cy="640080"/>
           </a:xfrm>
           <a:prstGeom prst="roundRect">
             <a:avLst>
-              <a:gd name="adj" fmla="val 8000"/>
+              <a:gd name="adj" fmla="val 17143"/>
             </a:avLst>
           </a:prstGeom>
           <a:solidFill>
-            <a:srgbClr val="EAF0FA"/>
+            <a:srgbClr val="D9534F"/>
           </a:solidFill>
           <a:ln/>
         </p:spPr>
@@ -7371,8 +6975,8 @@
         </p:nvSpPr>
         <p:spPr>
           <a:xfrm>
-            <a:off x="822960" y="1280160"/>
-            <a:ext cx="10607040" cy="914400"/>
+            <a:off x="10058400" y="164592"/>
+            <a:ext cx="1737360" cy="640080"/>
           </a:xfrm>
           <a:prstGeom prst="rect">
             <a:avLst/>
@@ -7384,34 +6988,417 @@
           <a:bodyPr wrap="square" lIns="0" tIns="0" rIns="0" bIns="0" rtlCol="0" anchor="ctr"/>
           <a:lstStyle/>
           <a:p>
-            <a:pPr indent="0" marL="0">
-              <a:buNone/>
-            </a:pPr>
-            <a:r>
-              <a:rPr lang="en-US" sz="2300" b="1" dirty="0">
+            <a:pPr algn="ctr" indent="0" marL="0">
+              <a:buNone/>
+            </a:pPr>
+            <a:r>
+              <a:rPr lang="en-US" sz="2000" b="1" dirty="0">
+                <a:solidFill>
+                  <a:srgbClr val="FFFFFF"/>
+                </a:solidFill>
+                <a:latin typeface="Calibri" pitchFamily="34" charset="0"/>
+                <a:ea typeface="Calibri" pitchFamily="34" charset="-122"/>
+                <a:cs typeface="Calibri" pitchFamily="34" charset="-120"/>
+              </a:rPr>
+              <a:t>13 Min.</a:t>
+            </a:r>
+            <a:endParaRPr lang="en-US" sz="2000" dirty="0"/>
+          </a:p>
+        </p:txBody>
+      </p:sp>
+      <p:sp>
+        <p:nvSpPr>
+          <p:cNvPr id="7" name="Text 5"/>
+          <p:cNvSpPr txBox="1"/>
+          <p:nvPr/>
+        </p:nvSpPr>
+        <p:spPr>
+          <a:xfrm>
+            <a:off x="548640" y="1234440"/>
+            <a:ext cx="10972800" cy="411480"/>
+          </a:xfrm>
+          <a:prstGeom prst="rect">
+            <a:avLst/>
+          </a:prstGeom>
+          <a:noFill/>
+          <a:ln/>
+        </p:spPr>
+        <p:txBody>
+          <a:bodyPr wrap="square" lIns="0" tIns="0" rIns="0" bIns="0" rtlCol="0" anchor="t"/>
+          <a:lstStyle/>
+          <a:p>
+            <a:pPr indent="0" marL="0">
+              <a:buNone/>
+            </a:pPr>
+            <a:r>
+              <a:rPr lang="en-US" sz="2100" dirty="0">
                 <a:solidFill>
                   <a:srgbClr val="1E2761"/>
+                </a:solidFill>
+                <a:latin typeface="Calibri" pitchFamily="34" charset="0"/>
+                <a:ea typeface="Calibri" pitchFamily="34" charset="-122"/>
+                <a:cs typeface="Calibri" pitchFamily="34" charset="-120"/>
+              </a:rPr>
+              <a:t>Lege in deinem Hefter die Matrix an und fülle sie aus:</a:t>
+            </a:r>
+            <a:endParaRPr lang="en-US" sz="2100" dirty="0"/>
+          </a:p>
+        </p:txBody>
+      </p:sp>
+      <p:sp>
+        <p:nvSpPr>
+          <p:cNvPr id="8" name="Shape 6"/>
+          <p:cNvSpPr/>
+          <p:nvPr/>
+        </p:nvSpPr>
+        <p:spPr>
+          <a:xfrm>
+            <a:off x="548640" y="1783080"/>
+            <a:ext cx="1024128" cy="594360"/>
+          </a:xfrm>
+          <a:prstGeom prst="roundRect">
+            <a:avLst>
+              <a:gd name="adj" fmla="val 6154"/>
+            </a:avLst>
+          </a:prstGeom>
+          <a:solidFill>
+            <a:srgbClr val="1E2761"/>
+          </a:solidFill>
+          <a:ln/>
+        </p:spPr>
+      </p:sp>
+      <p:sp>
+        <p:nvSpPr>
+          <p:cNvPr id="9" name="Text 7"/>
+          <p:cNvSpPr txBox="1"/>
+          <p:nvPr/>
+        </p:nvSpPr>
+        <p:spPr>
+          <a:xfrm>
+            <a:off x="658368" y="1783080"/>
+            <a:ext cx="822960" cy="594360"/>
+          </a:xfrm>
+          <a:prstGeom prst="rect">
+            <a:avLst/>
+          </a:prstGeom>
+          <a:noFill/>
+          <a:ln/>
+        </p:spPr>
+        <p:txBody>
+          <a:bodyPr wrap="square" lIns="0" tIns="0" rIns="0" bIns="0" rtlCol="0" anchor="ctr"/>
+          <a:lstStyle/>
+          <a:p>
+            <a:pPr indent="0" marL="0">
+              <a:buNone/>
+            </a:pPr>
+            <a:r>
+              <a:rPr lang="en-US" sz="1700" b="1" dirty="0">
+                <a:solidFill>
+                  <a:srgbClr val="FFFFFF"/>
+                </a:solidFill>
+                <a:latin typeface="Calibri" pitchFamily="34" charset="0"/>
+                <a:ea typeface="Calibri" pitchFamily="34" charset="-122"/>
+                <a:cs typeface="Calibri" pitchFamily="34" charset="-120"/>
+              </a:rPr>
+              <a:t>Z.</a:t>
+            </a:r>
+            <a:endParaRPr lang="en-US" sz="1700" dirty="0"/>
+          </a:p>
+        </p:txBody>
+      </p:sp>
+      <p:sp>
+        <p:nvSpPr>
+          <p:cNvPr id="10" name="Shape 8"/>
+          <p:cNvSpPr/>
+          <p:nvPr/>
+        </p:nvSpPr>
+        <p:spPr>
+          <a:xfrm>
+            <a:off x="1645920" y="1783080"/>
+            <a:ext cx="3310128" cy="594360"/>
+          </a:xfrm>
+          <a:prstGeom prst="roundRect">
+            <a:avLst>
+              <a:gd name="adj" fmla="val 6154"/>
+            </a:avLst>
+          </a:prstGeom>
+          <a:solidFill>
+            <a:srgbClr val="1E2761"/>
+          </a:solidFill>
+          <a:ln/>
+        </p:spPr>
+      </p:sp>
+      <p:sp>
+        <p:nvSpPr>
+          <p:cNvPr id="11" name="Text 9"/>
+          <p:cNvSpPr txBox="1"/>
+          <p:nvPr/>
+        </p:nvSpPr>
+        <p:spPr>
+          <a:xfrm>
+            <a:off x="1755648" y="1783080"/>
+            <a:ext cx="3108960" cy="594360"/>
+          </a:xfrm>
+          <a:prstGeom prst="rect">
+            <a:avLst/>
+          </a:prstGeom>
+          <a:noFill/>
+          <a:ln/>
+        </p:spPr>
+        <p:txBody>
+          <a:bodyPr wrap="square" lIns="0" tIns="0" rIns="0" bIns="0" rtlCol="0" anchor="ctr"/>
+          <a:lstStyle/>
+          <a:p>
+            <a:pPr indent="0" marL="0">
+              <a:buNone/>
+            </a:pPr>
+            <a:r>
+              <a:rPr lang="en-US" sz="1700" b="1" dirty="0">
+                <a:solidFill>
+                  <a:srgbClr val="FFFFFF"/>
+                </a:solidFill>
+                <a:latin typeface="Calibri" pitchFamily="34" charset="0"/>
+                <a:ea typeface="Calibri" pitchFamily="34" charset="-122"/>
+                <a:cs typeface="Calibri" pitchFamily="34" charset="-120"/>
+              </a:rPr>
+              <a:t>Handlung des Vaters</a:t>
+            </a:r>
+            <a:endParaRPr lang="en-US" sz="1700" dirty="0"/>
+          </a:p>
+        </p:txBody>
+      </p:sp>
+      <p:sp>
+        <p:nvSpPr>
+          <p:cNvPr id="12" name="Shape 10"/>
+          <p:cNvSpPr/>
+          <p:nvPr/>
+        </p:nvSpPr>
+        <p:spPr>
+          <a:xfrm>
+            <a:off x="5029200" y="1783080"/>
+            <a:ext cx="3218688" cy="594360"/>
+          </a:xfrm>
+          <a:prstGeom prst="roundRect">
+            <a:avLst>
+              <a:gd name="adj" fmla="val 6154"/>
+            </a:avLst>
+          </a:prstGeom>
+          <a:solidFill>
+            <a:srgbClr val="1E2761"/>
+          </a:solidFill>
+          <a:ln/>
+        </p:spPr>
+      </p:sp>
+      <p:sp>
+        <p:nvSpPr>
+          <p:cNvPr id="13" name="Text 11"/>
+          <p:cNvSpPr txBox="1"/>
+          <p:nvPr/>
+        </p:nvSpPr>
+        <p:spPr>
+          <a:xfrm>
+            <a:off x="5138928" y="1783080"/>
+            <a:ext cx="3017520" cy="594360"/>
+          </a:xfrm>
+          <a:prstGeom prst="rect">
+            <a:avLst/>
+          </a:prstGeom>
+          <a:noFill/>
+          <a:ln/>
+        </p:spPr>
+        <p:txBody>
+          <a:bodyPr wrap="square" lIns="0" tIns="0" rIns="0" bIns="0" rtlCol="0" anchor="ctr"/>
+          <a:lstStyle/>
+          <a:p>
+            <a:pPr indent="0" marL="0">
+              <a:buNone/>
+            </a:pPr>
+            <a:r>
+              <a:rPr lang="en-US" sz="1700" b="1" dirty="0">
+                <a:solidFill>
+                  <a:srgbClr val="FFFFFF"/>
+                </a:solidFill>
+                <a:latin typeface="Calibri" pitchFamily="34" charset="0"/>
+                <a:ea typeface="Calibri" pitchFamily="34" charset="-122"/>
+                <a:cs typeface="Calibri" pitchFamily="34" charset="-120"/>
+              </a:rPr>
+              <a:t>Modell (Seite / Axiom)</a:t>
+            </a:r>
+            <a:endParaRPr lang="en-US" sz="1700" dirty="0"/>
+          </a:p>
+        </p:txBody>
+      </p:sp>
+      <p:sp>
+        <p:nvSpPr>
+          <p:cNvPr id="14" name="Shape 12"/>
+          <p:cNvSpPr/>
+          <p:nvPr/>
+        </p:nvSpPr>
+        <p:spPr>
+          <a:xfrm>
+            <a:off x="8321040" y="1783080"/>
+            <a:ext cx="3218688" cy="594360"/>
+          </a:xfrm>
+          <a:prstGeom prst="roundRect">
+            <a:avLst>
+              <a:gd name="adj" fmla="val 6154"/>
+            </a:avLst>
+          </a:prstGeom>
+          <a:solidFill>
+            <a:srgbClr val="1E2761"/>
+          </a:solidFill>
+          <a:ln/>
+        </p:spPr>
+      </p:sp>
+      <p:sp>
+        <p:nvSpPr>
+          <p:cNvPr id="15" name="Text 13"/>
+          <p:cNvSpPr txBox="1"/>
+          <p:nvPr/>
+        </p:nvSpPr>
+        <p:spPr>
+          <a:xfrm>
+            <a:off x="8430768" y="1783080"/>
+            <a:ext cx="3017520" cy="594360"/>
+          </a:xfrm>
+          <a:prstGeom prst="rect">
+            <a:avLst/>
+          </a:prstGeom>
+          <a:noFill/>
+          <a:ln/>
+        </p:spPr>
+        <p:txBody>
+          <a:bodyPr wrap="square" lIns="0" tIns="0" rIns="0" bIns="0" rtlCol="0" anchor="ctr"/>
+          <a:lstStyle/>
+          <a:p>
+            <a:pPr indent="0" marL="0">
+              <a:buNone/>
+            </a:pPr>
+            <a:r>
+              <a:rPr lang="en-US" sz="1700" b="1" dirty="0">
+                <a:solidFill>
+                  <a:srgbClr val="FFFFFF"/>
+                </a:solidFill>
+                <a:latin typeface="Calibri" pitchFamily="34" charset="0"/>
+                <a:ea typeface="Calibri" pitchFamily="34" charset="-122"/>
+                <a:cs typeface="Calibri" pitchFamily="34" charset="-120"/>
+              </a:rPr>
+              <a:t>Wirkung auf den Sohn (Zitat)</a:t>
+            </a:r>
+            <a:endParaRPr lang="en-US" sz="1700" dirty="0"/>
+          </a:p>
+        </p:txBody>
+      </p:sp>
+      <p:sp>
+        <p:nvSpPr>
+          <p:cNvPr id="16" name="Text 14"/>
+          <p:cNvSpPr txBox="1"/>
+          <p:nvPr/>
+        </p:nvSpPr>
+        <p:spPr>
+          <a:xfrm>
+            <a:off x="548640" y="2514600"/>
+            <a:ext cx="10972800" cy="411480"/>
+          </a:xfrm>
+          <a:prstGeom prst="rect">
+            <a:avLst/>
+          </a:prstGeom>
+          <a:noFill/>
+          <a:ln/>
+        </p:spPr>
+        <p:txBody>
+          <a:bodyPr wrap="square" lIns="0" tIns="0" rIns="0" bIns="0" rtlCol="0" anchor="t"/>
+          <a:lstStyle/>
+          <a:p>
+            <a:pPr indent="0" marL="0">
+              <a:buNone/>
+            </a:pPr>
+            <a:r>
+              <a:rPr lang="en-US" sz="1900" b="1" dirty="0">
+                <a:solidFill>
+                  <a:srgbClr val="D9534F"/>
+                </a:solidFill>
+                <a:latin typeface="Calibri" pitchFamily="34" charset="0"/>
+                <a:ea typeface="Calibri" pitchFamily="34" charset="-122"/>
+                <a:cs typeface="Calibri" pitchFamily="34" charset="-120"/>
+              </a:rPr>
+              <a:t>mindestens vier Zeilen · jede mit Zitat und Zeilenangabe</a:t>
+            </a:r>
+            <a:endParaRPr lang="en-US" sz="1900" dirty="0"/>
+          </a:p>
+        </p:txBody>
+      </p:sp>
+      <p:sp>
+        <p:nvSpPr>
+          <p:cNvPr id="17" name="Shape 15"/>
+          <p:cNvSpPr/>
+          <p:nvPr/>
+        </p:nvSpPr>
+        <p:spPr>
+          <a:xfrm>
+            <a:off x="548640" y="3200400"/>
+            <a:ext cx="11064240" cy="3246120"/>
+          </a:xfrm>
+          <a:prstGeom prst="roundRect">
+            <a:avLst>
+              <a:gd name="adj" fmla="val 2254"/>
+            </a:avLst>
+          </a:prstGeom>
+          <a:solidFill>
+            <a:srgbClr val="FFF8EC"/>
+          </a:solidFill>
+          <a:ln/>
+        </p:spPr>
+      </p:sp>
+      <p:sp>
+        <p:nvSpPr>
+          <p:cNvPr id="18" name="Text 16"/>
+          <p:cNvSpPr txBox="1"/>
+          <p:nvPr/>
+        </p:nvSpPr>
+        <p:spPr>
+          <a:xfrm>
+            <a:off x="822960" y="3337560"/>
+            <a:ext cx="10058400" cy="411480"/>
+          </a:xfrm>
+          <a:prstGeom prst="rect">
+            <a:avLst/>
+          </a:prstGeom>
+          <a:noFill/>
+          <a:ln/>
+        </p:spPr>
+        <p:txBody>
+          <a:bodyPr wrap="square" lIns="0" tIns="0" rIns="0" bIns="0" rtlCol="0" anchor="t"/>
+          <a:lstStyle/>
+          <a:p>
+            <a:pPr indent="0" marL="0">
+              <a:buNone/>
+            </a:pPr>
+            <a:r>
+              <a:rPr lang="en-US" sz="2000" b="1" dirty="0">
+                <a:solidFill>
+                  <a:srgbClr val="E8A33D"/>
                 </a:solidFill>
                 <a:latin typeface="Cambria" pitchFamily="34" charset="0"/>
                 <a:ea typeface="Cambria" pitchFamily="34" charset="-122"/>
                 <a:cs typeface="Cambria" pitchFamily="34" charset="-120"/>
               </a:rPr>
-              <a:t>These: Kafkas „Furcht“ gründet auf Kommunikationsproblemen.</a:t>
-            </a:r>
-            <a:endParaRPr lang="en-US" sz="2300" dirty="0"/>
-          </a:p>
-        </p:txBody>
-      </p:sp>
-      <p:sp>
-        <p:nvSpPr>
-          <p:cNvPr id="7" name="Text 5"/>
-          <p:cNvSpPr txBox="1"/>
-          <p:nvPr/>
-        </p:nvSpPr>
-        <p:spPr>
-          <a:xfrm>
-            <a:off x="548640" y="2514600"/>
-            <a:ext cx="10972800" cy="411480"/>
+              <a:t>Wenn du nicht weiterkommst</a:t>
+            </a:r>
+            <a:endParaRPr lang="en-US" sz="2000" dirty="0"/>
+          </a:p>
+        </p:txBody>
+      </p:sp>
+      <p:sp>
+        <p:nvSpPr>
+          <p:cNvPr id="19" name="Text 17"/>
+          <p:cNvSpPr txBox="1"/>
+          <p:nvPr/>
+        </p:nvSpPr>
+        <p:spPr>
+          <a:xfrm>
+            <a:off x="822960" y="3840480"/>
+            <a:ext cx="10515600" cy="2468880"/>
           </a:xfrm>
           <a:prstGeom prst="rect">
             <a:avLst/>
@@ -7423,221 +7410,88 @@
           <a:bodyPr wrap="square" lIns="0" tIns="0" rIns="0" bIns="0" rtlCol="0" anchor="t"/>
           <a:lstStyle/>
           <a:p>
-            <a:pPr indent="0" marL="0">
-              <a:buNone/>
-            </a:pPr>
-            <a:r>
-              <a:rPr lang="en-US" sz="2000" b="1" dirty="0">
-                <a:solidFill>
-                  <a:srgbClr val="5B6B8C"/>
+            <a:pPr marL="342900" indent="-342900">
+              <a:spcAft>
+                <a:spcPts val="800"/>
+              </a:spcAft>
+              <a:buSzPct val="100000"/>
+              <a:buChar char="•"/>
+            </a:pPr>
+            <a:r>
+              <a:rPr lang="en-US" sz="1900" dirty="0">
+                <a:solidFill>
+                  <a:srgbClr val="1E2761"/>
                 </a:solidFill>
                 <a:latin typeface="Calibri" pitchFamily="34" charset="0"/>
                 <a:ea typeface="Calibri" pitchFamily="34" charset="-122"/>
                 <a:cs typeface="Calibri" pitchFamily="34" charset="-120"/>
               </a:rPr>
-              <a:t>Kafka schreibt aber auch:</a:t>
-            </a:r>
-            <a:endParaRPr lang="en-US" sz="2000" dirty="0"/>
-          </a:p>
-        </p:txBody>
-      </p:sp>
-      <p:sp>
-        <p:nvSpPr>
-          <p:cNvPr id="8" name="Shape 6"/>
-          <p:cNvSpPr/>
-          <p:nvPr/>
-        </p:nvSpPr>
-        <p:spPr>
-          <a:xfrm>
-            <a:off x="548640" y="3017520"/>
-            <a:ext cx="11064240" cy="1417320"/>
-          </a:xfrm>
-          <a:prstGeom prst="roundRect">
-            <a:avLst>
-              <a:gd name="adj" fmla="val 5161"/>
-            </a:avLst>
-          </a:prstGeom>
-          <a:solidFill>
-            <a:srgbClr val="FBECEB"/>
-          </a:solidFill>
-          <a:ln/>
-        </p:spPr>
-      </p:sp>
-      <p:sp>
-        <p:nvSpPr>
-          <p:cNvPr id="9" name="Text 7"/>
-          <p:cNvSpPr txBox="1"/>
-          <p:nvPr/>
-        </p:nvSpPr>
-        <p:spPr>
-          <a:xfrm>
-            <a:off x="822960" y="3127248"/>
-            <a:ext cx="9418320" cy="1188720"/>
-          </a:xfrm>
-          <a:prstGeom prst="rect">
-            <a:avLst/>
-          </a:prstGeom>
-          <a:noFill/>
-          <a:ln/>
-        </p:spPr>
-        <p:txBody>
-          <a:bodyPr wrap="square" lIns="0" tIns="0" rIns="0" bIns="0" rtlCol="0" anchor="ctr"/>
-          <a:lstStyle/>
-          <a:p>
-            <a:pPr indent="0" marL="0">
-              <a:buNone/>
-            </a:pPr>
-            <a:r>
-              <a:rPr lang="en-US" sz="2100" i="1" dirty="0">
+              <a:t>Wie klingen die Fragen des Vaters – und wie sind sie gemeint? (Z. 3–5)</a:t>
+            </a:r>
+            <a:endParaRPr lang="en-US" sz="1900" dirty="0"/>
+          </a:p>
+          <a:p>
+            <a:pPr marL="342900" indent="-342900">
+              <a:spcAft>
+                <a:spcPts val="800"/>
+              </a:spcAft>
+              <a:buSzPct val="100000"/>
+              <a:buChar char="•"/>
+            </a:pPr>
+            <a:r>
+              <a:rPr lang="en-US" sz="1900" dirty="0">
                 <a:solidFill>
                   <a:srgbClr val="1E2761"/>
-                </a:solidFill>
-                <a:latin typeface="Cambria" pitchFamily="34" charset="0"/>
-                <a:ea typeface="Cambria" pitchFamily="34" charset="-122"/>
-                <a:cs typeface="Cambria" pitchFamily="34" charset="-120"/>
-              </a:rPr>
-              <a:t>„Wieder hüte ich mich zu behaupten, daß ich nur durch Dich so wurde; Du verstärktest nur, was war, aber Du verstärktest es sehr …“</a:t>
-            </a:r>
-            <a:endParaRPr lang="en-US" sz="2100" dirty="0"/>
-          </a:p>
-        </p:txBody>
-      </p:sp>
-      <p:sp>
-        <p:nvSpPr>
-          <p:cNvPr id="10" name="Text 8"/>
-          <p:cNvSpPr txBox="1"/>
-          <p:nvPr/>
-        </p:nvSpPr>
-        <p:spPr>
-          <a:xfrm>
-            <a:off x="10241280" y="3127248"/>
-            <a:ext cx="1188720" cy="1188720"/>
-          </a:xfrm>
-          <a:prstGeom prst="rect">
-            <a:avLst/>
-          </a:prstGeom>
-          <a:noFill/>
-          <a:ln/>
-        </p:spPr>
-        <p:txBody>
-          <a:bodyPr wrap="square" lIns="0" tIns="0" rIns="0" bIns="0" rtlCol="0" anchor="ctr"/>
-          <a:lstStyle/>
-          <a:p>
-            <a:pPr algn="r" indent="0" marL="0">
-              <a:buNone/>
-            </a:pPr>
-            <a:r>
-              <a:rPr lang="en-US" sz="1600" b="1" dirty="0">
-                <a:solidFill>
-                  <a:srgbClr val="D9534F"/>
                 </a:solidFill>
                 <a:latin typeface="Calibri" pitchFamily="34" charset="0"/>
                 <a:ea typeface="Calibri" pitchFamily="34" charset="-122"/>
                 <a:cs typeface="Calibri" pitchFamily="34" charset="-120"/>
               </a:rPr>
-              <a:t>S. 6</a:t>
-            </a:r>
-            <a:endParaRPr lang="en-US" sz="1600" dirty="0"/>
-          </a:p>
-        </p:txBody>
-      </p:sp>
-      <p:sp>
-        <p:nvSpPr>
-          <p:cNvPr id="11" name="Shape 9"/>
-          <p:cNvSpPr/>
-          <p:nvPr/>
-        </p:nvSpPr>
-        <p:spPr>
-          <a:xfrm>
-            <a:off x="548640" y="4617720"/>
-            <a:ext cx="11064240" cy="1417320"/>
-          </a:xfrm>
-          <a:prstGeom prst="roundRect">
-            <a:avLst>
-              <a:gd name="adj" fmla="val 5161"/>
-            </a:avLst>
-          </a:prstGeom>
-          <a:solidFill>
-            <a:srgbClr val="FBECEB"/>
-          </a:solidFill>
-          <a:ln/>
-        </p:spPr>
-      </p:sp>
-      <p:sp>
-        <p:nvSpPr>
-          <p:cNvPr id="12" name="Text 10"/>
-          <p:cNvSpPr txBox="1"/>
-          <p:nvPr/>
-        </p:nvSpPr>
-        <p:spPr>
-          <a:xfrm>
-            <a:off x="822960" y="4727448"/>
-            <a:ext cx="9418320" cy="1188720"/>
-          </a:xfrm>
-          <a:prstGeom prst="rect">
-            <a:avLst/>
-          </a:prstGeom>
-          <a:noFill/>
-          <a:ln/>
-        </p:spPr>
-        <p:txBody>
-          <a:bodyPr wrap="square" lIns="0" tIns="0" rIns="0" bIns="0" rtlCol="0" anchor="ctr"/>
-          <a:lstStyle/>
-          <a:p>
-            <a:pPr indent="0" marL="0">
-              <a:buNone/>
-            </a:pPr>
-            <a:r>
-              <a:rPr lang="en-US" sz="2100" i="1" dirty="0">
+              <a:t>Was sagen Lachen und Gesicht? (Z. 5)</a:t>
+            </a:r>
+            <a:endParaRPr lang="en-US" sz="1900" dirty="0"/>
+          </a:p>
+          <a:p>
+            <a:pPr marL="342900" indent="-342900">
+              <a:spcAft>
+                <a:spcPts val="800"/>
+              </a:spcAft>
+              <a:buSzPct val="100000"/>
+              <a:buChar char="•"/>
+            </a:pPr>
+            <a:r>
+              <a:rPr lang="en-US" sz="1900" dirty="0">
                 <a:solidFill>
                   <a:srgbClr val="1E2761"/>
-                </a:solidFill>
-                <a:latin typeface="Cambria" pitchFamily="34" charset="0"/>
-                <a:ea typeface="Cambria" pitchFamily="34" charset="-122"/>
-                <a:cs typeface="Cambria" pitchFamily="34" charset="-120"/>
-              </a:rPr>
-              <a:t>„… während es nur selbstverständliche Folge Deiner Stärke und meiner Schwäche war.“</a:t>
-            </a:r>
-            <a:endParaRPr lang="en-US" sz="2100" dirty="0"/>
-          </a:p>
-        </p:txBody>
-      </p:sp>
-      <p:sp>
-        <p:nvSpPr>
-          <p:cNvPr id="13" name="Text 11"/>
-          <p:cNvSpPr txBox="1"/>
-          <p:nvPr/>
-        </p:nvSpPr>
-        <p:spPr>
-          <a:xfrm>
-            <a:off x="10241280" y="4727448"/>
-            <a:ext cx="1188720" cy="1188720"/>
-          </a:xfrm>
-          <a:prstGeom prst="rect">
-            <a:avLst/>
-          </a:prstGeom>
-          <a:noFill/>
-          <a:ln/>
-        </p:spPr>
-        <p:txBody>
-          <a:bodyPr wrap="square" lIns="0" tIns="0" rIns="0" bIns="0" rtlCol="0" anchor="ctr"/>
-          <a:lstStyle/>
-          <a:p>
-            <a:pPr algn="r" indent="0" marL="0">
-              <a:buNone/>
-            </a:pPr>
-            <a:r>
-              <a:rPr lang="en-US" sz="1600" b="1" dirty="0">
-                <a:solidFill>
-                  <a:srgbClr val="D9534F"/>
                 </a:solidFill>
                 <a:latin typeface="Calibri" pitchFamily="34" charset="0"/>
                 <a:ea typeface="Calibri" pitchFamily="34" charset="-122"/>
                 <a:cs typeface="Calibri" pitchFamily="34" charset="-120"/>
               </a:rPr>
-              <a:t>A, Z. 16</a:t>
-            </a:r>
-            <a:endParaRPr lang="en-US" sz="1600" dirty="0"/>
+              <a:t>Mit wem spricht der Vater eigentlich? (Z. 9–10)</a:t>
+            </a:r>
+            <a:endParaRPr lang="en-US" sz="1900" dirty="0"/>
+          </a:p>
+          <a:p>
+            <a:pPr marL="342900" indent="-342900">
+              <a:spcAft>
+                <a:spcPts val="800"/>
+              </a:spcAft>
+              <a:buSzPct val="100000"/>
+              <a:buChar char="•"/>
+            </a:pPr>
+            <a:r>
+              <a:rPr lang="en-US" sz="1900" dirty="0">
+                <a:solidFill>
+                  <a:srgbClr val="1E2761"/>
+                </a:solidFill>
+                <a:latin typeface="Calibri" pitchFamily="34" charset="0"/>
+                <a:ea typeface="Calibri" pitchFamily="34" charset="-122"/>
+                <a:cs typeface="Calibri" pitchFamily="34" charset="-120"/>
+              </a:rPr>
+              <a:t>Was macht der Sohn daraus? (Z. 11–15)</a:t>
+            </a:r>
+            <a:endParaRPr lang="en-US" sz="1900" dirty="0"/>
           </a:p>
         </p:txBody>
       </p:sp>
@@ -7726,7 +7580,7 @@
                 <a:ea typeface="Calibri" pitchFamily="34" charset="-122"/>
                 <a:cs typeface="Calibri" pitchFamily="34" charset="-120"/>
               </a:rPr>
-              <a:t>AUFTRAG 2 · ALLEIN</a:t>
+              <a:t>ABSCHNITT C · ZUSAMMENTRAGEN</a:t>
             </a:r>
             <a:endParaRPr lang="en-US" sz="1300" dirty="0"/>
           </a:p>
@@ -7765,7 +7619,7 @@
                 <a:ea typeface="Cambria" pitchFamily="34" charset="-122"/>
                 <a:cs typeface="Cambria" pitchFamily="34" charset="-120"/>
               </a:rPr>
-              <a:t>Vom Tafelbild zum Fließtext</a:t>
+              <a:t>Ironie (S. 6)</a:t>
             </a:r>
             <a:endParaRPr lang="en-US" sz="2700" dirty="0"/>
           </a:p>
@@ -7773,36 +7627,14 @@
       </p:sp>
       <p:sp>
         <p:nvSpPr>
-          <p:cNvPr id="5" name="Shape 3"/>
-          <p:cNvSpPr/>
-          <p:nvPr/>
-        </p:nvSpPr>
-        <p:spPr>
-          <a:xfrm>
-            <a:off x="10058400" y="164592"/>
-            <a:ext cx="1737360" cy="640080"/>
-          </a:xfrm>
-          <a:prstGeom prst="roundRect">
-            <a:avLst>
-              <a:gd name="adj" fmla="val 17143"/>
-            </a:avLst>
-          </a:prstGeom>
-          <a:solidFill>
-            <a:srgbClr val="D9534F"/>
-          </a:solidFill>
-          <a:ln/>
-        </p:spPr>
-      </p:sp>
-      <p:sp>
-        <p:nvSpPr>
-          <p:cNvPr id="6" name="Text 4"/>
-          <p:cNvSpPr txBox="1"/>
-          <p:nvPr/>
-        </p:nvSpPr>
-        <p:spPr>
-          <a:xfrm>
-            <a:off x="10058400" y="164592"/>
-            <a:ext cx="1737360" cy="640080"/>
+          <p:cNvPr id="5" name="Text 3"/>
+          <p:cNvSpPr txBox="1"/>
+          <p:nvPr/>
+        </p:nvSpPr>
+        <p:spPr>
+          <a:xfrm>
+            <a:off x="365760" y="1143000"/>
+            <a:ext cx="411480" cy="335280"/>
           </a:xfrm>
           <a:prstGeom prst="rect">
             <a:avLst/>
@@ -7814,19 +7646,58 @@
           <a:bodyPr wrap="square" lIns="0" tIns="0" rIns="0" bIns="0" rtlCol="0" anchor="ctr"/>
           <a:lstStyle/>
           <a:p>
-            <a:pPr algn="ctr" indent="0" marL="0">
-              <a:buNone/>
-            </a:pPr>
-            <a:r>
-              <a:rPr lang="en-US" sz="2000" b="1" dirty="0">
-                <a:solidFill>
-                  <a:srgbClr val="FFFFFF"/>
+            <a:pPr algn="r" indent="0" marL="0">
+              <a:buNone/>
+            </a:pPr>
+            <a:r>
+              <a:rPr lang="en-US" sz="1500" dirty="0">
+                <a:solidFill>
+                  <a:srgbClr val="5B6B8C"/>
                 </a:solidFill>
                 <a:latin typeface="Calibri" pitchFamily="34" charset="0"/>
                 <a:ea typeface="Calibri" pitchFamily="34" charset="-122"/>
                 <a:cs typeface="Calibri" pitchFamily="34" charset="-120"/>
               </a:rPr>
-              <a:t>15 Min.</a:t>
+              <a:t>1</a:t>
+            </a:r>
+            <a:endParaRPr lang="en-US" sz="1500" dirty="0"/>
+          </a:p>
+        </p:txBody>
+      </p:sp>
+      <p:sp>
+        <p:nvSpPr>
+          <p:cNvPr id="6" name="Text 4"/>
+          <p:cNvSpPr txBox="1"/>
+          <p:nvPr/>
+        </p:nvSpPr>
+        <p:spPr>
+          <a:xfrm>
+            <a:off x="914400" y="1143000"/>
+            <a:ext cx="10972800" cy="335280"/>
+          </a:xfrm>
+          <a:prstGeom prst="rect">
+            <a:avLst/>
+          </a:prstGeom>
+          <a:noFill/>
+          <a:ln/>
+        </p:spPr>
+        <p:txBody>
+          <a:bodyPr wrap="square" lIns="0" tIns="0" rIns="0" bIns="0" rtlCol="0" anchor="ctr"/>
+          <a:lstStyle/>
+          <a:p>
+            <a:pPr indent="0" marL="0">
+              <a:buNone/>
+            </a:pPr>
+            <a:r>
+              <a:rPr lang="en-US" sz="2000" dirty="0">
+                <a:solidFill>
+                  <a:srgbClr val="1E2761"/>
+                </a:solidFill>
+                <a:latin typeface="Cambria" pitchFamily="34" charset="0"/>
+                <a:ea typeface="Cambria" pitchFamily="34" charset="-122"/>
+                <a:cs typeface="Cambria" pitchFamily="34" charset="-120"/>
+              </a:rPr>
+              <a:t>Ein besonderes Vertrauen hattest Du zur Erziehung durch Ironie, sie entsprach</a:t>
             </a:r>
             <a:endParaRPr lang="en-US" sz="2000" dirty="0"/>
           </a:p>
@@ -7840,58 +7711,75 @@
         </p:nvSpPr>
         <p:spPr>
           <a:xfrm>
-            <a:off x="548640" y="1234440"/>
-            <a:ext cx="10972800" cy="685800"/>
-          </a:xfrm>
-          <a:prstGeom prst="rect">
-            <a:avLst/>
-          </a:prstGeom>
-          <a:noFill/>
-          <a:ln/>
-        </p:spPr>
-        <p:txBody>
-          <a:bodyPr wrap="square" lIns="0" tIns="0" rIns="0" bIns="0" rtlCol="0" anchor="t"/>
-          <a:lstStyle/>
-          <a:p>
-            <a:pPr indent="0" marL="0">
-              <a:buNone/>
-            </a:pPr>
-            <a:r>
-              <a:rPr lang="en-US" sz="2100" dirty="0">
-                <a:solidFill>
-                  <a:srgbClr val="1E2761"/>
+            <a:off x="365760" y="1478280"/>
+            <a:ext cx="411480" cy="335280"/>
+          </a:xfrm>
+          <a:prstGeom prst="rect">
+            <a:avLst/>
+          </a:prstGeom>
+          <a:noFill/>
+          <a:ln/>
+        </p:spPr>
+        <p:txBody>
+          <a:bodyPr wrap="square" lIns="0" tIns="0" rIns="0" bIns="0" rtlCol="0" anchor="ctr"/>
+          <a:lstStyle/>
+          <a:p>
+            <a:pPr algn="r" indent="0" marL="0">
+              <a:buNone/>
+            </a:pPr>
+            <a:r>
+              <a:rPr lang="en-US" sz="1500" dirty="0">
+                <a:solidFill>
+                  <a:srgbClr val="5B6B8C"/>
                 </a:solidFill>
                 <a:latin typeface="Calibri" pitchFamily="34" charset="0"/>
                 <a:ea typeface="Calibri" pitchFamily="34" charset="-122"/>
                 <a:cs typeface="Calibri" pitchFamily="34" charset="-120"/>
               </a:rPr>
-              <a:t>Schreibe deine Analyse von A und C als zusammenhängenden Text in deinen Hefter – so wie in der Klausur.</a:t>
-            </a:r>
-            <a:endParaRPr lang="en-US" sz="2100" dirty="0"/>
-          </a:p>
-        </p:txBody>
-      </p:sp>
-      <p:sp>
-        <p:nvSpPr>
-          <p:cNvPr id="8" name="Shape 6"/>
-          <p:cNvSpPr/>
-          <p:nvPr/>
-        </p:nvSpPr>
-        <p:spPr>
-          <a:xfrm>
-            <a:off x="548640" y="2194560"/>
-            <a:ext cx="2011680" cy="402336"/>
-          </a:xfrm>
-          <a:prstGeom prst="roundRect">
-            <a:avLst>
-              <a:gd name="adj" fmla="val 50000"/>
-            </a:avLst>
-          </a:prstGeom>
-          <a:solidFill>
-            <a:srgbClr val="1E2761"/>
-          </a:solidFill>
-          <a:ln/>
-        </p:spPr>
+              <a:t>2</a:t>
+            </a:r>
+            <a:endParaRPr lang="en-US" sz="1500" dirty="0"/>
+          </a:p>
+        </p:txBody>
+      </p:sp>
+      <p:sp>
+        <p:nvSpPr>
+          <p:cNvPr id="8" name="Text 6"/>
+          <p:cNvSpPr txBox="1"/>
+          <p:nvPr/>
+        </p:nvSpPr>
+        <p:spPr>
+          <a:xfrm>
+            <a:off x="914400" y="1478280"/>
+            <a:ext cx="10972800" cy="335280"/>
+          </a:xfrm>
+          <a:prstGeom prst="rect">
+            <a:avLst/>
+          </a:prstGeom>
+          <a:noFill/>
+          <a:ln/>
+        </p:spPr>
+        <p:txBody>
+          <a:bodyPr wrap="square" lIns="0" tIns="0" rIns="0" bIns="0" rtlCol="0" anchor="ctr"/>
+          <a:lstStyle/>
+          <a:p>
+            <a:pPr indent="0" marL="0">
+              <a:buNone/>
+            </a:pPr>
+            <a:r>
+              <a:rPr lang="en-US" sz="2000" dirty="0">
+                <a:solidFill>
+                  <a:srgbClr val="1E2761"/>
+                </a:solidFill>
+                <a:latin typeface="Cambria" pitchFamily="34" charset="0"/>
+                <a:ea typeface="Cambria" pitchFamily="34" charset="-122"/>
+                <a:cs typeface="Cambria" pitchFamily="34" charset="-120"/>
+              </a:rPr>
+              <a:t>auch am besten Deiner Überlegenheit über mich. Eine Ermahnung hatte bei Dir</a:t>
+            </a:r>
+            <a:endParaRPr lang="en-US" sz="2000" dirty="0"/>
+          </a:p>
+        </p:txBody>
       </p:sp>
       <p:sp>
         <p:nvSpPr>
@@ -7901,8 +7789,8 @@
         </p:nvSpPr>
         <p:spPr>
           <a:xfrm>
-            <a:off x="548640" y="2194560"/>
-            <a:ext cx="2011680" cy="402336"/>
+            <a:off x="365760" y="1813560"/>
+            <a:ext cx="411480" cy="335280"/>
           </a:xfrm>
           <a:prstGeom prst="rect">
             <a:avLst/>
@@ -7914,21 +7802,21 @@
           <a:bodyPr wrap="square" lIns="0" tIns="0" rIns="0" bIns="0" rtlCol="0" anchor="ctr"/>
           <a:lstStyle/>
           <a:p>
-            <a:pPr algn="ctr" indent="0" marL="0">
-              <a:buNone/>
-            </a:pPr>
-            <a:r>
-              <a:rPr lang="en-US" sz="1600" b="1" dirty="0">
-                <a:solidFill>
-                  <a:srgbClr val="FFFFFF"/>
+            <a:pPr algn="r" indent="0" marL="0">
+              <a:buNone/>
+            </a:pPr>
+            <a:r>
+              <a:rPr lang="en-US" sz="1500" dirty="0">
+                <a:solidFill>
+                  <a:srgbClr val="5B6B8C"/>
                 </a:solidFill>
                 <a:latin typeface="Calibri" pitchFamily="34" charset="0"/>
                 <a:ea typeface="Calibri" pitchFamily="34" charset="-122"/>
                 <a:cs typeface="Calibri" pitchFamily="34" charset="-120"/>
               </a:rPr>
-              <a:t>Einleitung</a:t>
-            </a:r>
-            <a:endParaRPr lang="en-US" sz="1600" dirty="0"/>
+              <a:t>3</a:t>
+            </a:r>
+            <a:endParaRPr lang="en-US" sz="1500" dirty="0"/>
           </a:p>
         </p:txBody>
       </p:sp>
@@ -7940,8 +7828,8 @@
         </p:nvSpPr>
         <p:spPr>
           <a:xfrm>
-            <a:off x="2788920" y="2103120"/>
-            <a:ext cx="8778240" cy="594360"/>
+            <a:off x="914400" y="1813560"/>
+            <a:ext cx="10972800" cy="335280"/>
           </a:xfrm>
           <a:prstGeom prst="rect">
             <a:avLst/>
@@ -7957,41 +7845,58 @@
               <a:buNone/>
             </a:pPr>
             <a:r>
-              <a:rPr lang="en-US" sz="1900" dirty="0">
+              <a:rPr lang="en-US" sz="2000" dirty="0">
                 <a:solidFill>
                   <a:srgbClr val="1E2761"/>
+                </a:solidFill>
+                <a:latin typeface="Cambria" pitchFamily="34" charset="0"/>
+                <a:ea typeface="Cambria" pitchFamily="34" charset="-122"/>
+                <a:cs typeface="Cambria" pitchFamily="34" charset="-120"/>
+              </a:rPr>
+              <a:t>gewöhnlich diese Form: »Kannst Du das nicht so und so machen? Das ist Dir wohl</a:t>
+            </a:r>
+            <a:endParaRPr lang="en-US" sz="2000" dirty="0"/>
+          </a:p>
+        </p:txBody>
+      </p:sp>
+      <p:sp>
+        <p:nvSpPr>
+          <p:cNvPr id="11" name="Text 9"/>
+          <p:cNvSpPr txBox="1"/>
+          <p:nvPr/>
+        </p:nvSpPr>
+        <p:spPr>
+          <a:xfrm>
+            <a:off x="365760" y="2148840"/>
+            <a:ext cx="411480" cy="335280"/>
+          </a:xfrm>
+          <a:prstGeom prst="rect">
+            <a:avLst/>
+          </a:prstGeom>
+          <a:noFill/>
+          <a:ln/>
+        </p:spPr>
+        <p:txBody>
+          <a:bodyPr wrap="square" lIns="0" tIns="0" rIns="0" bIns="0" rtlCol="0" anchor="ctr"/>
+          <a:lstStyle/>
+          <a:p>
+            <a:pPr algn="r" indent="0" marL="0">
+              <a:buNone/>
+            </a:pPr>
+            <a:r>
+              <a:rPr lang="en-US" sz="1500" dirty="0">
+                <a:solidFill>
+                  <a:srgbClr val="5B6B8C"/>
                 </a:solidFill>
                 <a:latin typeface="Calibri" pitchFamily="34" charset="0"/>
                 <a:ea typeface="Calibri" pitchFamily="34" charset="-122"/>
                 <a:cs typeface="Calibri" pitchFamily="34" charset="-120"/>
               </a:rPr>
-              <a:t>Wer schreibt an wen, wann, worüber?</a:t>
-            </a:r>
-            <a:endParaRPr lang="en-US" sz="1900" dirty="0"/>
-          </a:p>
-        </p:txBody>
-      </p:sp>
-      <p:sp>
-        <p:nvSpPr>
-          <p:cNvPr id="11" name="Shape 9"/>
-          <p:cNvSpPr/>
-          <p:nvPr/>
-        </p:nvSpPr>
-        <p:spPr>
-          <a:xfrm>
-            <a:off x="548640" y="2926080"/>
-            <a:ext cx="2011680" cy="402336"/>
-          </a:xfrm>
-          <a:prstGeom prst="roundRect">
-            <a:avLst>
-              <a:gd name="adj" fmla="val 50000"/>
-            </a:avLst>
-          </a:prstGeom>
-          <a:solidFill>
-            <a:srgbClr val="1E2761"/>
-          </a:solidFill>
-          <a:ln/>
-        </p:spPr>
+              <a:t>4</a:t>
+            </a:r>
+            <a:endParaRPr lang="en-US" sz="1500" dirty="0"/>
+          </a:p>
+        </p:txBody>
       </p:sp>
       <p:sp>
         <p:nvSpPr>
@@ -8001,8 +7906,8 @@
         </p:nvSpPr>
         <p:spPr>
           <a:xfrm>
-            <a:off x="548640" y="2926080"/>
-            <a:ext cx="2011680" cy="402336"/>
+            <a:off x="914400" y="2148840"/>
+            <a:ext cx="10972800" cy="335280"/>
           </a:xfrm>
           <a:prstGeom prst="rect">
             <a:avLst/>
@@ -8014,34 +7919,73 @@
           <a:bodyPr wrap="square" lIns="0" tIns="0" rIns="0" bIns="0" rtlCol="0" anchor="ctr"/>
           <a:lstStyle/>
           <a:p>
-            <a:pPr algn="ctr" indent="0" marL="0">
-              <a:buNone/>
-            </a:pPr>
-            <a:r>
-              <a:rPr lang="en-US" sz="1600" b="1" dirty="0">
-                <a:solidFill>
-                  <a:srgbClr val="FFFFFF"/>
+            <a:pPr indent="0" marL="0">
+              <a:buNone/>
+            </a:pPr>
+            <a:r>
+              <a:rPr lang="en-US" sz="2000" dirty="0">
+                <a:solidFill>
+                  <a:srgbClr val="1E2761"/>
+                </a:solidFill>
+                <a:latin typeface="Cambria" pitchFamily="34" charset="0"/>
+                <a:ea typeface="Cambria" pitchFamily="34" charset="-122"/>
+                <a:cs typeface="Cambria" pitchFamily="34" charset="-120"/>
+              </a:rPr>
+              <a:t>schon zu viel? Dazu hast Du natürlich keine Zeit?« und ähnlich. Dabei jede</a:t>
+            </a:r>
+            <a:endParaRPr lang="en-US" sz="2000" dirty="0"/>
+          </a:p>
+        </p:txBody>
+      </p:sp>
+      <p:sp>
+        <p:nvSpPr>
+          <p:cNvPr id="13" name="Text 11"/>
+          <p:cNvSpPr txBox="1"/>
+          <p:nvPr/>
+        </p:nvSpPr>
+        <p:spPr>
+          <a:xfrm>
+            <a:off x="365760" y="2484120"/>
+            <a:ext cx="411480" cy="335280"/>
+          </a:xfrm>
+          <a:prstGeom prst="rect">
+            <a:avLst/>
+          </a:prstGeom>
+          <a:noFill/>
+          <a:ln/>
+        </p:spPr>
+        <p:txBody>
+          <a:bodyPr wrap="square" lIns="0" tIns="0" rIns="0" bIns="0" rtlCol="0" anchor="ctr"/>
+          <a:lstStyle/>
+          <a:p>
+            <a:pPr algn="r" indent="0" marL="0">
+              <a:buNone/>
+            </a:pPr>
+            <a:r>
+              <a:rPr lang="en-US" sz="1500" dirty="0">
+                <a:solidFill>
+                  <a:srgbClr val="5B6B8C"/>
                 </a:solidFill>
                 <a:latin typeface="Calibri" pitchFamily="34" charset="0"/>
                 <a:ea typeface="Calibri" pitchFamily="34" charset="-122"/>
                 <a:cs typeface="Calibri" pitchFamily="34" charset="-120"/>
               </a:rPr>
-              <a:t>Hauptteil</a:t>
-            </a:r>
-            <a:endParaRPr lang="en-US" sz="1600" dirty="0"/>
-          </a:p>
-        </p:txBody>
-      </p:sp>
-      <p:sp>
-        <p:nvSpPr>
-          <p:cNvPr id="13" name="Text 11"/>
-          <p:cNvSpPr txBox="1"/>
-          <p:nvPr/>
-        </p:nvSpPr>
-        <p:spPr>
-          <a:xfrm>
-            <a:off x="2788920" y="2834640"/>
-            <a:ext cx="8778240" cy="594360"/>
+              <a:t>5</a:t>
+            </a:r>
+            <a:endParaRPr lang="en-US" sz="1500" dirty="0"/>
+          </a:p>
+        </p:txBody>
+      </p:sp>
+      <p:sp>
+        <p:nvSpPr>
+          <p:cNvPr id="14" name="Text 12"/>
+          <p:cNvSpPr txBox="1"/>
+          <p:nvPr/>
+        </p:nvSpPr>
+        <p:spPr>
+          <a:xfrm>
+            <a:off x="914400" y="2484120"/>
+            <a:ext cx="10972800" cy="335280"/>
           </a:xfrm>
           <a:prstGeom prst="rect">
             <a:avLst/>
@@ -8057,52 +8001,69 @@
               <a:buNone/>
             </a:pPr>
             <a:r>
-              <a:rPr lang="en-US" sz="1900" dirty="0">
+              <a:rPr lang="en-US" sz="2000" dirty="0">
                 <a:solidFill>
                   <a:srgbClr val="1E2761"/>
+                </a:solidFill>
+                <a:latin typeface="Cambria" pitchFamily="34" charset="0"/>
+                <a:ea typeface="Cambria" pitchFamily="34" charset="-122"/>
+                <a:cs typeface="Cambria" pitchFamily="34" charset="-120"/>
+              </a:rPr>
+              <a:t>solche Frage begleitet von bösem Lachen und bösem Gesicht. Man wurde</a:t>
+            </a:r>
+            <a:endParaRPr lang="en-US" sz="2000" dirty="0"/>
+          </a:p>
+        </p:txBody>
+      </p:sp>
+      <p:sp>
+        <p:nvSpPr>
+          <p:cNvPr id="15" name="Text 13"/>
+          <p:cNvSpPr txBox="1"/>
+          <p:nvPr/>
+        </p:nvSpPr>
+        <p:spPr>
+          <a:xfrm>
+            <a:off x="365760" y="2819400"/>
+            <a:ext cx="411480" cy="335280"/>
+          </a:xfrm>
+          <a:prstGeom prst="rect">
+            <a:avLst/>
+          </a:prstGeom>
+          <a:noFill/>
+          <a:ln/>
+        </p:spPr>
+        <p:txBody>
+          <a:bodyPr wrap="square" lIns="0" tIns="0" rIns="0" bIns="0" rtlCol="0" anchor="ctr"/>
+          <a:lstStyle/>
+          <a:p>
+            <a:pPr algn="r" indent="0" marL="0">
+              <a:buNone/>
+            </a:pPr>
+            <a:r>
+              <a:rPr lang="en-US" sz="1500" dirty="0">
+                <a:solidFill>
+                  <a:srgbClr val="5B6B8C"/>
                 </a:solidFill>
                 <a:latin typeface="Calibri" pitchFamily="34" charset="0"/>
                 <a:ea typeface="Calibri" pitchFamily="34" charset="-122"/>
                 <a:cs typeface="Calibri" pitchFamily="34" charset="-120"/>
               </a:rPr>
-              <a:t>je Zeile der Matrix: Behauptung → Beleg (Zitat + Z.) → Erklärung · erst A, dann C</a:t>
-            </a:r>
-            <a:endParaRPr lang="en-US" sz="1900" dirty="0"/>
-          </a:p>
-        </p:txBody>
-      </p:sp>
-      <p:sp>
-        <p:nvSpPr>
-          <p:cNvPr id="14" name="Shape 12"/>
-          <p:cNvSpPr/>
-          <p:nvPr/>
-        </p:nvSpPr>
-        <p:spPr>
-          <a:xfrm>
-            <a:off x="548640" y="3657600"/>
-            <a:ext cx="2011680" cy="402336"/>
-          </a:xfrm>
-          <a:prstGeom prst="roundRect">
-            <a:avLst>
-              <a:gd name="adj" fmla="val 50000"/>
-            </a:avLst>
-          </a:prstGeom>
-          <a:solidFill>
-            <a:srgbClr val="1E2761"/>
-          </a:solidFill>
-          <a:ln/>
-        </p:spPr>
-      </p:sp>
-      <p:sp>
-        <p:nvSpPr>
-          <p:cNvPr id="15" name="Text 13"/>
-          <p:cNvSpPr txBox="1"/>
-          <p:nvPr/>
-        </p:nvSpPr>
-        <p:spPr>
-          <a:xfrm>
-            <a:off x="548640" y="3657600"/>
-            <a:ext cx="2011680" cy="402336"/>
+              <a:t>6</a:t>
+            </a:r>
+            <a:endParaRPr lang="en-US" sz="1500" dirty="0"/>
+          </a:p>
+        </p:txBody>
+      </p:sp>
+      <p:sp>
+        <p:nvSpPr>
+          <p:cNvPr id="16" name="Text 14"/>
+          <p:cNvSpPr txBox="1"/>
+          <p:nvPr/>
+        </p:nvSpPr>
+        <p:spPr>
+          <a:xfrm>
+            <a:off x="914400" y="2819400"/>
+            <a:ext cx="10972800" cy="335280"/>
           </a:xfrm>
           <a:prstGeom prst="rect">
             <a:avLst/>
@@ -8114,34 +8075,73 @@
           <a:bodyPr wrap="square" lIns="0" tIns="0" rIns="0" bIns="0" rtlCol="0" anchor="ctr"/>
           <a:lstStyle/>
           <a:p>
-            <a:pPr algn="ctr" indent="0" marL="0">
-              <a:buNone/>
-            </a:pPr>
-            <a:r>
-              <a:rPr lang="en-US" sz="1600" b="1" dirty="0">
-                <a:solidFill>
-                  <a:srgbClr val="FFFFFF"/>
+            <a:pPr indent="0" marL="0">
+              <a:buNone/>
+            </a:pPr>
+            <a:r>
+              <a:rPr lang="en-US" sz="2000" dirty="0">
+                <a:solidFill>
+                  <a:srgbClr val="1E2761"/>
+                </a:solidFill>
+                <a:latin typeface="Cambria" pitchFamily="34" charset="0"/>
+                <a:ea typeface="Cambria" pitchFamily="34" charset="-122"/>
+                <a:cs typeface="Cambria" pitchFamily="34" charset="-120"/>
+              </a:rPr>
+              <a:t>gewissermaßen schon bestraft, ehe man noch wußte, daß man etwas Schlechtes</a:t>
+            </a:r>
+            <a:endParaRPr lang="en-US" sz="2000" dirty="0"/>
+          </a:p>
+        </p:txBody>
+      </p:sp>
+      <p:sp>
+        <p:nvSpPr>
+          <p:cNvPr id="17" name="Text 15"/>
+          <p:cNvSpPr txBox="1"/>
+          <p:nvPr/>
+        </p:nvSpPr>
+        <p:spPr>
+          <a:xfrm>
+            <a:off x="365760" y="3154680"/>
+            <a:ext cx="411480" cy="335280"/>
+          </a:xfrm>
+          <a:prstGeom prst="rect">
+            <a:avLst/>
+          </a:prstGeom>
+          <a:noFill/>
+          <a:ln/>
+        </p:spPr>
+        <p:txBody>
+          <a:bodyPr wrap="square" lIns="0" tIns="0" rIns="0" bIns="0" rtlCol="0" anchor="ctr"/>
+          <a:lstStyle/>
+          <a:p>
+            <a:pPr algn="r" indent="0" marL="0">
+              <a:buNone/>
+            </a:pPr>
+            <a:r>
+              <a:rPr lang="en-US" sz="1500" dirty="0">
+                <a:solidFill>
+                  <a:srgbClr val="5B6B8C"/>
                 </a:solidFill>
                 <a:latin typeface="Calibri" pitchFamily="34" charset="0"/>
                 <a:ea typeface="Calibri" pitchFamily="34" charset="-122"/>
                 <a:cs typeface="Calibri" pitchFamily="34" charset="-120"/>
               </a:rPr>
-              <a:t>Schluss</a:t>
-            </a:r>
-            <a:endParaRPr lang="en-US" sz="1600" dirty="0"/>
-          </a:p>
-        </p:txBody>
-      </p:sp>
-      <p:sp>
-        <p:nvSpPr>
-          <p:cNvPr id="16" name="Text 14"/>
-          <p:cNvSpPr txBox="1"/>
-          <p:nvPr/>
-        </p:nvSpPr>
-        <p:spPr>
-          <a:xfrm>
-            <a:off x="2788920" y="3566160"/>
-            <a:ext cx="8778240" cy="594360"/>
+              <a:t>7</a:t>
+            </a:r>
+            <a:endParaRPr lang="en-US" sz="1500" dirty="0"/>
+          </a:p>
+        </p:txBody>
+      </p:sp>
+      <p:sp>
+        <p:nvSpPr>
+          <p:cNvPr id="18" name="Text 16"/>
+          <p:cNvSpPr txBox="1"/>
+          <p:nvPr/>
+        </p:nvSpPr>
+        <p:spPr>
+          <a:xfrm>
+            <a:off x="914400" y="3154680"/>
+            <a:ext cx="10972800" cy="335280"/>
           </a:xfrm>
           <a:prstGeom prst="rect">
             <a:avLst/>
@@ -8157,76 +8157,93 @@
               <a:buNone/>
             </a:pPr>
             <a:r>
-              <a:rPr lang="en-US" sz="1900" dirty="0">
+              <a:rPr lang="en-US" sz="2000" dirty="0">
                 <a:solidFill>
                   <a:srgbClr val="1E2761"/>
+                </a:solidFill>
+                <a:latin typeface="Cambria" pitchFamily="34" charset="0"/>
+                <a:ea typeface="Cambria" pitchFamily="34" charset="-122"/>
+                <a:cs typeface="Cambria" pitchFamily="34" charset="-120"/>
+              </a:rPr>
+              <a:t>getan hatte. Aufreizend waren auch jene Zurechtweisungen, wo man als dritte</a:t>
+            </a:r>
+            <a:endParaRPr lang="en-US" sz="2000" dirty="0"/>
+          </a:p>
+        </p:txBody>
+      </p:sp>
+      <p:sp>
+        <p:nvSpPr>
+          <p:cNvPr id="19" name="Text 17"/>
+          <p:cNvSpPr txBox="1"/>
+          <p:nvPr/>
+        </p:nvSpPr>
+        <p:spPr>
+          <a:xfrm>
+            <a:off x="365760" y="3489960"/>
+            <a:ext cx="411480" cy="335280"/>
+          </a:xfrm>
+          <a:prstGeom prst="rect">
+            <a:avLst/>
+          </a:prstGeom>
+          <a:noFill/>
+          <a:ln/>
+        </p:spPr>
+        <p:txBody>
+          <a:bodyPr wrap="square" lIns="0" tIns="0" rIns="0" bIns="0" rtlCol="0" anchor="ctr"/>
+          <a:lstStyle/>
+          <a:p>
+            <a:pPr algn="r" indent="0" marL="0">
+              <a:buNone/>
+            </a:pPr>
+            <a:r>
+              <a:rPr lang="en-US" sz="1500" dirty="0">
+                <a:solidFill>
+                  <a:srgbClr val="5B6B8C"/>
                 </a:solidFill>
                 <a:latin typeface="Calibri" pitchFamily="34" charset="0"/>
                 <a:ea typeface="Calibri" pitchFamily="34" charset="-122"/>
                 <a:cs typeface="Calibri" pitchFamily="34" charset="-120"/>
               </a:rPr>
-              <a:t>Stützen die Stellen die These? Was muss man ergänzen?</a:t>
-            </a:r>
-            <a:endParaRPr lang="en-US" sz="1900" dirty="0"/>
-          </a:p>
-        </p:txBody>
-      </p:sp>
-      <p:sp>
-        <p:nvSpPr>
-          <p:cNvPr id="17" name="Shape 15"/>
-          <p:cNvSpPr/>
-          <p:nvPr/>
-        </p:nvSpPr>
-        <p:spPr>
-          <a:xfrm>
-            <a:off x="548640" y="4434840"/>
-            <a:ext cx="11064240" cy="2057400"/>
-          </a:xfrm>
-          <a:prstGeom prst="roundRect">
-            <a:avLst>
-              <a:gd name="adj" fmla="val 3556"/>
-            </a:avLst>
-          </a:prstGeom>
-          <a:solidFill>
-            <a:srgbClr val="FFF8EC"/>
-          </a:solidFill>
-          <a:ln/>
-        </p:spPr>
-      </p:sp>
-      <p:sp>
-        <p:nvSpPr>
-          <p:cNvPr id="18" name="Text 16"/>
-          <p:cNvSpPr txBox="1"/>
-          <p:nvPr/>
-        </p:nvSpPr>
-        <p:spPr>
-          <a:xfrm>
-            <a:off x="822960" y="4553712"/>
-            <a:ext cx="5486400" cy="411480"/>
-          </a:xfrm>
-          <a:prstGeom prst="rect">
-            <a:avLst/>
-          </a:prstGeom>
-          <a:noFill/>
-          <a:ln/>
-        </p:spPr>
-        <p:txBody>
-          <a:bodyPr wrap="square" lIns="0" tIns="0" rIns="0" bIns="0" rtlCol="0" anchor="t"/>
-          <a:lstStyle/>
-          <a:p>
-            <a:pPr indent="0" marL="0">
-              <a:buNone/>
-            </a:pPr>
-            <a:r>
-              <a:rPr lang="en-US" sz="2000" b="1" dirty="0">
-                <a:solidFill>
-                  <a:srgbClr val="E8A33D"/>
+              <a:t>8</a:t>
+            </a:r>
+            <a:endParaRPr lang="en-US" sz="1500" dirty="0"/>
+          </a:p>
+        </p:txBody>
+      </p:sp>
+      <p:sp>
+        <p:nvSpPr>
+          <p:cNvPr id="20" name="Text 18"/>
+          <p:cNvSpPr txBox="1"/>
+          <p:nvPr/>
+        </p:nvSpPr>
+        <p:spPr>
+          <a:xfrm>
+            <a:off x="914400" y="3489960"/>
+            <a:ext cx="10972800" cy="335280"/>
+          </a:xfrm>
+          <a:prstGeom prst="rect">
+            <a:avLst/>
+          </a:prstGeom>
+          <a:noFill/>
+          <a:ln/>
+        </p:spPr>
+        <p:txBody>
+          <a:bodyPr wrap="square" lIns="0" tIns="0" rIns="0" bIns="0" rtlCol="0" anchor="ctr"/>
+          <a:lstStyle/>
+          <a:p>
+            <a:pPr indent="0" marL="0">
+              <a:buNone/>
+            </a:pPr>
+            <a:r>
+              <a:rPr lang="en-US" sz="2000" dirty="0">
+                <a:solidFill>
+                  <a:srgbClr val="1E2761"/>
                 </a:solidFill>
                 <a:latin typeface="Cambria" pitchFamily="34" charset="0"/>
                 <a:ea typeface="Cambria" pitchFamily="34" charset="-122"/>
                 <a:cs typeface="Cambria" pitchFamily="34" charset="-120"/>
               </a:rPr>
-              <a:t>Satzbausteine</a:t>
+              <a:t>Person behandelt, also nicht einmal des bösen Ansprechens gewürdigt wurde; wo</a:t>
             </a:r>
             <a:endParaRPr lang="en-US" sz="2000" dirty="0"/>
           </a:p>
@@ -8234,45 +8251,572 @@
       </p:sp>
       <p:sp>
         <p:nvSpPr>
-          <p:cNvPr id="19" name="Text 17"/>
-          <p:cNvSpPr txBox="1"/>
-          <p:nvPr/>
-        </p:nvSpPr>
-        <p:spPr>
-          <a:xfrm>
-            <a:off x="822960" y="5029200"/>
-            <a:ext cx="10515600" cy="1371600"/>
-          </a:xfrm>
-          <a:prstGeom prst="rect">
-            <a:avLst/>
-          </a:prstGeom>
-          <a:noFill/>
-          <a:ln/>
-        </p:spPr>
-        <p:txBody>
-          <a:bodyPr wrap="square" lIns="0" tIns="0" rIns="0" bIns="0" rtlCol="0" anchor="t"/>
-          <a:lstStyle/>
-          <a:p>
-            <a:pPr indent="0" marL="0">
-              <a:spcAft>
-                <a:spcPts val="400"/>
-              </a:spcAft>
-              <a:buNone/>
-            </a:pPr>
-            <a:r>
-              <a:rPr lang="en-US" sz="1800" i="1" dirty="0">
-                <a:solidFill>
-                  <a:srgbClr val="1E2761"/>
+          <p:cNvPr id="21" name="Text 19"/>
+          <p:cNvSpPr txBox="1"/>
+          <p:nvPr/>
+        </p:nvSpPr>
+        <p:spPr>
+          <a:xfrm>
+            <a:off x="365760" y="3825240"/>
+            <a:ext cx="411480" cy="335280"/>
+          </a:xfrm>
+          <a:prstGeom prst="rect">
+            <a:avLst/>
+          </a:prstGeom>
+          <a:noFill/>
+          <a:ln/>
+        </p:spPr>
+        <p:txBody>
+          <a:bodyPr wrap="square" lIns="0" tIns="0" rIns="0" bIns="0" rtlCol="0" anchor="ctr"/>
+          <a:lstStyle/>
+          <a:p>
+            <a:pPr algn="r" indent="0" marL="0">
+              <a:buNone/>
+            </a:pPr>
+            <a:r>
+              <a:rPr lang="en-US" sz="1500" dirty="0">
+                <a:solidFill>
+                  <a:srgbClr val="5B6B8C"/>
                 </a:solidFill>
                 <a:latin typeface="Calibri" pitchFamily="34" charset="0"/>
                 <a:ea typeface="Calibri" pitchFamily="34" charset="-122"/>
                 <a:cs typeface="Calibri" pitchFamily="34" charset="-120"/>
               </a:rPr>
-              <a:t>In seinem „Brief an den Vater“ (1919) …  ·  Indem der Vater …, sendet er …  ·  Dies zeigt sich in … (Z. …)  ·  Hinzu kommt, dass …  ·  Die Folge ist …  ·  Besonders deutlich wird dies, wenn …  ·  Insgesamt stützt die Stelle die These, weil …  ·  Allerdings …</a:t>
-            </a:r>
-            <a:endParaRPr lang="en-US" sz="1800" dirty="0"/>
-          </a:p>
-        </p:txBody>
+              <a:t>9</a:t>
+            </a:r>
+            <a:endParaRPr lang="en-US" sz="1500" dirty="0"/>
+          </a:p>
+        </p:txBody>
+      </p:sp>
+      <p:sp>
+        <p:nvSpPr>
+          <p:cNvPr id="22" name="Text 20"/>
+          <p:cNvSpPr txBox="1"/>
+          <p:nvPr/>
+        </p:nvSpPr>
+        <p:spPr>
+          <a:xfrm>
+            <a:off x="914400" y="3825240"/>
+            <a:ext cx="10972800" cy="335280"/>
+          </a:xfrm>
+          <a:prstGeom prst="rect">
+            <a:avLst/>
+          </a:prstGeom>
+          <a:noFill/>
+          <a:ln/>
+        </p:spPr>
+        <p:txBody>
+          <a:bodyPr wrap="square" lIns="0" tIns="0" rIns="0" bIns="0" rtlCol="0" anchor="ctr"/>
+          <a:lstStyle/>
+          <a:p>
+            <a:pPr indent="0" marL="0">
+              <a:buNone/>
+            </a:pPr>
+            <a:r>
+              <a:rPr lang="en-US" sz="2000" dirty="0">
+                <a:solidFill>
+                  <a:srgbClr val="1E2761"/>
+                </a:solidFill>
+                <a:latin typeface="Cambria" pitchFamily="34" charset="0"/>
+                <a:ea typeface="Cambria" pitchFamily="34" charset="-122"/>
+                <a:cs typeface="Cambria" pitchFamily="34" charset="-120"/>
+              </a:rPr>
+              <a:t>Du also etwa formell zur Mutter sprachst, aber eigentlich zu mir, der dabei</a:t>
+            </a:r>
+            <a:endParaRPr lang="en-US" sz="2000" dirty="0"/>
+          </a:p>
+        </p:txBody>
+      </p:sp>
+      <p:sp>
+        <p:nvSpPr>
+          <p:cNvPr id="23" name="Text 21"/>
+          <p:cNvSpPr txBox="1"/>
+          <p:nvPr/>
+        </p:nvSpPr>
+        <p:spPr>
+          <a:xfrm>
+            <a:off x="365760" y="4160520"/>
+            <a:ext cx="411480" cy="335280"/>
+          </a:xfrm>
+          <a:prstGeom prst="rect">
+            <a:avLst/>
+          </a:prstGeom>
+          <a:noFill/>
+          <a:ln/>
+        </p:spPr>
+        <p:txBody>
+          <a:bodyPr wrap="square" lIns="0" tIns="0" rIns="0" bIns="0" rtlCol="0" anchor="ctr"/>
+          <a:lstStyle/>
+          <a:p>
+            <a:pPr algn="r" indent="0" marL="0">
+              <a:buNone/>
+            </a:pPr>
+            <a:r>
+              <a:rPr lang="en-US" sz="1500" dirty="0">
+                <a:solidFill>
+                  <a:srgbClr val="5B6B8C"/>
+                </a:solidFill>
+                <a:latin typeface="Calibri" pitchFamily="34" charset="0"/>
+                <a:ea typeface="Calibri" pitchFamily="34" charset="-122"/>
+                <a:cs typeface="Calibri" pitchFamily="34" charset="-120"/>
+              </a:rPr>
+              <a:t>10</a:t>
+            </a:r>
+            <a:endParaRPr lang="en-US" sz="1500" dirty="0"/>
+          </a:p>
+        </p:txBody>
+      </p:sp>
+      <p:sp>
+        <p:nvSpPr>
+          <p:cNvPr id="24" name="Text 22"/>
+          <p:cNvSpPr txBox="1"/>
+          <p:nvPr/>
+        </p:nvSpPr>
+        <p:spPr>
+          <a:xfrm>
+            <a:off x="914400" y="4160520"/>
+            <a:ext cx="10972800" cy="335280"/>
+          </a:xfrm>
+          <a:prstGeom prst="rect">
+            <a:avLst/>
+          </a:prstGeom>
+          <a:noFill/>
+          <a:ln/>
+        </p:spPr>
+        <p:txBody>
+          <a:bodyPr wrap="square" lIns="0" tIns="0" rIns="0" bIns="0" rtlCol="0" anchor="ctr"/>
+          <a:lstStyle/>
+          <a:p>
+            <a:pPr indent="0" marL="0">
+              <a:buNone/>
+            </a:pPr>
+            <a:r>
+              <a:rPr lang="en-US" sz="2000" dirty="0">
+                <a:solidFill>
+                  <a:srgbClr val="1E2761"/>
+                </a:solidFill>
+                <a:latin typeface="Cambria" pitchFamily="34" charset="0"/>
+                <a:ea typeface="Cambria" pitchFamily="34" charset="-122"/>
+                <a:cs typeface="Cambria" pitchFamily="34" charset="-120"/>
+              </a:rPr>
+              <a:t>saß, zum Beispiel: »Das kann man vom Herrn Sohn natürlich nicht haben« und</a:t>
+            </a:r>
+            <a:endParaRPr lang="en-US" sz="2000" dirty="0"/>
+          </a:p>
+        </p:txBody>
+      </p:sp>
+      <p:sp>
+        <p:nvSpPr>
+          <p:cNvPr id="25" name="Text 23"/>
+          <p:cNvSpPr txBox="1"/>
+          <p:nvPr/>
+        </p:nvSpPr>
+        <p:spPr>
+          <a:xfrm>
+            <a:off x="365760" y="4495800"/>
+            <a:ext cx="411480" cy="335280"/>
+          </a:xfrm>
+          <a:prstGeom prst="rect">
+            <a:avLst/>
+          </a:prstGeom>
+          <a:noFill/>
+          <a:ln/>
+        </p:spPr>
+        <p:txBody>
+          <a:bodyPr wrap="square" lIns="0" tIns="0" rIns="0" bIns="0" rtlCol="0" anchor="ctr"/>
+          <a:lstStyle/>
+          <a:p>
+            <a:pPr algn="r" indent="0" marL="0">
+              <a:buNone/>
+            </a:pPr>
+            <a:r>
+              <a:rPr lang="en-US" sz="1500" dirty="0">
+                <a:solidFill>
+                  <a:srgbClr val="5B6B8C"/>
+                </a:solidFill>
+                <a:latin typeface="Calibri" pitchFamily="34" charset="0"/>
+                <a:ea typeface="Calibri" pitchFamily="34" charset="-122"/>
+                <a:cs typeface="Calibri" pitchFamily="34" charset="-120"/>
+              </a:rPr>
+              <a:t>11</a:t>
+            </a:r>
+            <a:endParaRPr lang="en-US" sz="1500" dirty="0"/>
+          </a:p>
+        </p:txBody>
+      </p:sp>
+      <p:sp>
+        <p:nvSpPr>
+          <p:cNvPr id="26" name="Text 24"/>
+          <p:cNvSpPr txBox="1"/>
+          <p:nvPr/>
+        </p:nvSpPr>
+        <p:spPr>
+          <a:xfrm>
+            <a:off x="914400" y="4495800"/>
+            <a:ext cx="10972800" cy="335280"/>
+          </a:xfrm>
+          <a:prstGeom prst="rect">
+            <a:avLst/>
+          </a:prstGeom>
+          <a:noFill/>
+          <a:ln/>
+        </p:spPr>
+        <p:txBody>
+          <a:bodyPr wrap="square" lIns="0" tIns="0" rIns="0" bIns="0" rtlCol="0" anchor="ctr"/>
+          <a:lstStyle/>
+          <a:p>
+            <a:pPr indent="0" marL="0">
+              <a:buNone/>
+            </a:pPr>
+            <a:r>
+              <a:rPr lang="en-US" sz="2000" dirty="0">
+                <a:solidFill>
+                  <a:srgbClr val="1E2761"/>
+                </a:solidFill>
+                <a:latin typeface="Cambria" pitchFamily="34" charset="0"/>
+                <a:ea typeface="Cambria" pitchFamily="34" charset="-122"/>
+                <a:cs typeface="Cambria" pitchFamily="34" charset="-120"/>
+              </a:rPr>
+              <a:t>dergleichen. (Das bekam dann sein Gegenspiel darin, daß ich zum Beispiel nicht</a:t>
+            </a:r>
+            <a:endParaRPr lang="en-US" sz="2000" dirty="0"/>
+          </a:p>
+        </p:txBody>
+      </p:sp>
+      <p:sp>
+        <p:nvSpPr>
+          <p:cNvPr id="27" name="Text 25"/>
+          <p:cNvSpPr txBox="1"/>
+          <p:nvPr/>
+        </p:nvSpPr>
+        <p:spPr>
+          <a:xfrm>
+            <a:off x="365760" y="4831080"/>
+            <a:ext cx="411480" cy="335280"/>
+          </a:xfrm>
+          <a:prstGeom prst="rect">
+            <a:avLst/>
+          </a:prstGeom>
+          <a:noFill/>
+          <a:ln/>
+        </p:spPr>
+        <p:txBody>
+          <a:bodyPr wrap="square" lIns="0" tIns="0" rIns="0" bIns="0" rtlCol="0" anchor="ctr"/>
+          <a:lstStyle/>
+          <a:p>
+            <a:pPr algn="r" indent="0" marL="0">
+              <a:buNone/>
+            </a:pPr>
+            <a:r>
+              <a:rPr lang="en-US" sz="1500" dirty="0">
+                <a:solidFill>
+                  <a:srgbClr val="5B6B8C"/>
+                </a:solidFill>
+                <a:latin typeface="Calibri" pitchFamily="34" charset="0"/>
+                <a:ea typeface="Calibri" pitchFamily="34" charset="-122"/>
+                <a:cs typeface="Calibri" pitchFamily="34" charset="-120"/>
+              </a:rPr>
+              <a:t>12</a:t>
+            </a:r>
+            <a:endParaRPr lang="en-US" sz="1500" dirty="0"/>
+          </a:p>
+        </p:txBody>
+      </p:sp>
+      <p:sp>
+        <p:nvSpPr>
+          <p:cNvPr id="28" name="Text 26"/>
+          <p:cNvSpPr txBox="1"/>
+          <p:nvPr/>
+        </p:nvSpPr>
+        <p:spPr>
+          <a:xfrm>
+            <a:off x="914400" y="4831080"/>
+            <a:ext cx="10972800" cy="335280"/>
+          </a:xfrm>
+          <a:prstGeom prst="rect">
+            <a:avLst/>
+          </a:prstGeom>
+          <a:noFill/>
+          <a:ln/>
+        </p:spPr>
+        <p:txBody>
+          <a:bodyPr wrap="square" lIns="0" tIns="0" rIns="0" bIns="0" rtlCol="0" anchor="ctr"/>
+          <a:lstStyle/>
+          <a:p>
+            <a:pPr indent="0" marL="0">
+              <a:buNone/>
+            </a:pPr>
+            <a:r>
+              <a:rPr lang="en-US" sz="2000" dirty="0">
+                <a:solidFill>
+                  <a:srgbClr val="1E2761"/>
+                </a:solidFill>
+                <a:latin typeface="Cambria" pitchFamily="34" charset="0"/>
+                <a:ea typeface="Cambria" pitchFamily="34" charset="-122"/>
+                <a:cs typeface="Cambria" pitchFamily="34" charset="-120"/>
+              </a:rPr>
+              <a:t>wagte und später aus Gewohnheit gar nicht mehr daran dachte, Dich direkt zu</a:t>
+            </a:r>
+            <a:endParaRPr lang="en-US" sz="2000" dirty="0"/>
+          </a:p>
+        </p:txBody>
+      </p:sp>
+      <p:sp>
+        <p:nvSpPr>
+          <p:cNvPr id="29" name="Text 27"/>
+          <p:cNvSpPr txBox="1"/>
+          <p:nvPr/>
+        </p:nvSpPr>
+        <p:spPr>
+          <a:xfrm>
+            <a:off x="365760" y="5166360"/>
+            <a:ext cx="411480" cy="335280"/>
+          </a:xfrm>
+          <a:prstGeom prst="rect">
+            <a:avLst/>
+          </a:prstGeom>
+          <a:noFill/>
+          <a:ln/>
+        </p:spPr>
+        <p:txBody>
+          <a:bodyPr wrap="square" lIns="0" tIns="0" rIns="0" bIns="0" rtlCol="0" anchor="ctr"/>
+          <a:lstStyle/>
+          <a:p>
+            <a:pPr algn="r" indent="0" marL="0">
+              <a:buNone/>
+            </a:pPr>
+            <a:r>
+              <a:rPr lang="en-US" sz="1500" dirty="0">
+                <a:solidFill>
+                  <a:srgbClr val="5B6B8C"/>
+                </a:solidFill>
+                <a:latin typeface="Calibri" pitchFamily="34" charset="0"/>
+                <a:ea typeface="Calibri" pitchFamily="34" charset="-122"/>
+                <a:cs typeface="Calibri" pitchFamily="34" charset="-120"/>
+              </a:rPr>
+              <a:t>13</a:t>
+            </a:r>
+            <a:endParaRPr lang="en-US" sz="1500" dirty="0"/>
+          </a:p>
+        </p:txBody>
+      </p:sp>
+      <p:sp>
+        <p:nvSpPr>
+          <p:cNvPr id="30" name="Text 28"/>
+          <p:cNvSpPr txBox="1"/>
+          <p:nvPr/>
+        </p:nvSpPr>
+        <p:spPr>
+          <a:xfrm>
+            <a:off x="914400" y="5166360"/>
+            <a:ext cx="10972800" cy="335280"/>
+          </a:xfrm>
+          <a:prstGeom prst="rect">
+            <a:avLst/>
+          </a:prstGeom>
+          <a:noFill/>
+          <a:ln/>
+        </p:spPr>
+        <p:txBody>
+          <a:bodyPr wrap="square" lIns="0" tIns="0" rIns="0" bIns="0" rtlCol="0" anchor="ctr"/>
+          <a:lstStyle/>
+          <a:p>
+            <a:pPr indent="0" marL="0">
+              <a:buNone/>
+            </a:pPr>
+            <a:r>
+              <a:rPr lang="en-US" sz="2000" dirty="0">
+                <a:solidFill>
+                  <a:srgbClr val="1E2761"/>
+                </a:solidFill>
+                <a:latin typeface="Cambria" pitchFamily="34" charset="0"/>
+                <a:ea typeface="Cambria" pitchFamily="34" charset="-122"/>
+                <a:cs typeface="Cambria" pitchFamily="34" charset="-120"/>
+              </a:rPr>
+              <a:t>fragen, wenn die Mutter dabei war. Es war dem Kind viel ungefährlicher, die</a:t>
+            </a:r>
+            <a:endParaRPr lang="en-US" sz="2000" dirty="0"/>
+          </a:p>
+        </p:txBody>
+      </p:sp>
+      <p:sp>
+        <p:nvSpPr>
+          <p:cNvPr id="31" name="Text 29"/>
+          <p:cNvSpPr txBox="1"/>
+          <p:nvPr/>
+        </p:nvSpPr>
+        <p:spPr>
+          <a:xfrm>
+            <a:off x="365760" y="5501640"/>
+            <a:ext cx="411480" cy="335280"/>
+          </a:xfrm>
+          <a:prstGeom prst="rect">
+            <a:avLst/>
+          </a:prstGeom>
+          <a:noFill/>
+          <a:ln/>
+        </p:spPr>
+        <p:txBody>
+          <a:bodyPr wrap="square" lIns="0" tIns="0" rIns="0" bIns="0" rtlCol="0" anchor="ctr"/>
+          <a:lstStyle/>
+          <a:p>
+            <a:pPr algn="r" indent="0" marL="0">
+              <a:buNone/>
+            </a:pPr>
+            <a:r>
+              <a:rPr lang="en-US" sz="1500" dirty="0">
+                <a:solidFill>
+                  <a:srgbClr val="5B6B8C"/>
+                </a:solidFill>
+                <a:latin typeface="Calibri" pitchFamily="34" charset="0"/>
+                <a:ea typeface="Calibri" pitchFamily="34" charset="-122"/>
+                <a:cs typeface="Calibri" pitchFamily="34" charset="-120"/>
+              </a:rPr>
+              <a:t>14</a:t>
+            </a:r>
+            <a:endParaRPr lang="en-US" sz="1500" dirty="0"/>
+          </a:p>
+        </p:txBody>
+      </p:sp>
+      <p:sp>
+        <p:nvSpPr>
+          <p:cNvPr id="32" name="Text 30"/>
+          <p:cNvSpPr txBox="1"/>
+          <p:nvPr/>
+        </p:nvSpPr>
+        <p:spPr>
+          <a:xfrm>
+            <a:off x="914400" y="5501640"/>
+            <a:ext cx="10972800" cy="335280"/>
+          </a:xfrm>
+          <a:prstGeom prst="rect">
+            <a:avLst/>
+          </a:prstGeom>
+          <a:noFill/>
+          <a:ln/>
+        </p:spPr>
+        <p:txBody>
+          <a:bodyPr wrap="square" lIns="0" tIns="0" rIns="0" bIns="0" rtlCol="0" anchor="ctr"/>
+          <a:lstStyle/>
+          <a:p>
+            <a:pPr indent="0" marL="0">
+              <a:buNone/>
+            </a:pPr>
+            <a:r>
+              <a:rPr lang="en-US" sz="2000" dirty="0">
+                <a:solidFill>
+                  <a:srgbClr val="1E2761"/>
+                </a:solidFill>
+                <a:latin typeface="Cambria" pitchFamily="34" charset="0"/>
+                <a:ea typeface="Cambria" pitchFamily="34" charset="-122"/>
+                <a:cs typeface="Cambria" pitchFamily="34" charset="-120"/>
+              </a:rPr>
+              <a:t>neben Dir sitzende Mutter nach Dir auszufragen, man fragte dann die Mutter:</a:t>
+            </a:r>
+            <a:endParaRPr lang="en-US" sz="2000" dirty="0"/>
+          </a:p>
+        </p:txBody>
+      </p:sp>
+      <p:sp>
+        <p:nvSpPr>
+          <p:cNvPr id="33" name="Text 31"/>
+          <p:cNvSpPr txBox="1"/>
+          <p:nvPr/>
+        </p:nvSpPr>
+        <p:spPr>
+          <a:xfrm>
+            <a:off x="365760" y="5836920"/>
+            <a:ext cx="411480" cy="335280"/>
+          </a:xfrm>
+          <a:prstGeom prst="rect">
+            <a:avLst/>
+          </a:prstGeom>
+          <a:noFill/>
+          <a:ln/>
+        </p:spPr>
+        <p:txBody>
+          <a:bodyPr wrap="square" lIns="0" tIns="0" rIns="0" bIns="0" rtlCol="0" anchor="ctr"/>
+          <a:lstStyle/>
+          <a:p>
+            <a:pPr algn="r" indent="0" marL="0">
+              <a:buNone/>
+            </a:pPr>
+            <a:r>
+              <a:rPr lang="en-US" sz="1500" dirty="0">
+                <a:solidFill>
+                  <a:srgbClr val="5B6B8C"/>
+                </a:solidFill>
+                <a:latin typeface="Calibri" pitchFamily="34" charset="0"/>
+                <a:ea typeface="Calibri" pitchFamily="34" charset="-122"/>
+                <a:cs typeface="Calibri" pitchFamily="34" charset="-120"/>
+              </a:rPr>
+              <a:t>15</a:t>
+            </a:r>
+            <a:endParaRPr lang="en-US" sz="1500" dirty="0"/>
+          </a:p>
+        </p:txBody>
+      </p:sp>
+      <p:sp>
+        <p:nvSpPr>
+          <p:cNvPr id="34" name="Text 32"/>
+          <p:cNvSpPr txBox="1"/>
+          <p:nvPr/>
+        </p:nvSpPr>
+        <p:spPr>
+          <a:xfrm>
+            <a:off x="914400" y="5836920"/>
+            <a:ext cx="10972800" cy="335280"/>
+          </a:xfrm>
+          <a:prstGeom prst="rect">
+            <a:avLst/>
+          </a:prstGeom>
+          <a:noFill/>
+          <a:ln/>
+        </p:spPr>
+        <p:txBody>
+          <a:bodyPr wrap="square" lIns="0" tIns="0" rIns="0" bIns="0" rtlCol="0" anchor="ctr"/>
+          <a:lstStyle/>
+          <a:p>
+            <a:pPr indent="0" marL="0">
+              <a:buNone/>
+            </a:pPr>
+            <a:r>
+              <a:rPr lang="en-US" sz="2000" dirty="0">
+                <a:solidFill>
+                  <a:srgbClr val="1E2761"/>
+                </a:solidFill>
+                <a:latin typeface="Cambria" pitchFamily="34" charset="0"/>
+                <a:ea typeface="Cambria" pitchFamily="34" charset="-122"/>
+                <a:cs typeface="Cambria" pitchFamily="34" charset="-120"/>
+              </a:rPr>
+              <a:t>»Wie geht es dem Vater?« und sicherte sich so vor Überraschungen.)</a:t>
+            </a:r>
+            <a:endParaRPr lang="en-US" sz="2000" dirty="0"/>
+          </a:p>
+        </p:txBody>
+      </p:sp>
+      <p:sp>
+        <p:nvSpPr>
+          <p:cNvPr id="35" name="Shape 33"/>
+          <p:cNvSpPr/>
+          <p:nvPr/>
+        </p:nvSpPr>
+        <p:spPr>
+          <a:xfrm>
+            <a:off x="841248" y="1143000"/>
+            <a:ext cx="0" cy="5029200"/>
+          </a:xfrm>
+          <a:prstGeom prst="line">
+            <a:avLst/>
+          </a:prstGeom>
+          <a:noFill/>
+          <a:ln w="25400">
+            <a:solidFill>
+              <a:srgbClr val="D9534F"/>
+            </a:solidFill>
+            <a:prstDash val="solid"/>
+          </a:ln>
+        </p:spPr>
       </p:sp>
     </p:spTree>
   </p:cSld>

--- a/Deutsch_11/Kafka_Brief_an_den_Vater/Praesentation_Kafka_Brief_an_den_Vater.pptx
+++ b/Deutsch_11/Kafka_Brief_an_den_Vater/Praesentation_Kafka_Brief_an_den_Vater.pptx
@@ -690,7 +690,7 @@
           <a:p>
             <a:r>
               <a:rPr lang="en-US" dirty="0"/>
-              <a:t>Timer 15 Minuten. Wer nach 5 Minuten keinen Anfang hat: nächste Folie (Musteranfang). Wer nicht fertig wird, schreibt zu Beginn der nächsten Stunde weiter – keine Hausaufgabe.</a:t>
+              <a:t>Operatoren kurz klären: Analysiere = untersuchen und geordnet, belegt darstellen; unter Berücksichtigung der Modelle = Fachbegriffe zur Erklärung nutzen; Beurteile abschließend, inwieweit = begründetes Urteil, auch „ja, aber“ ist möglich. Timer 15 Minuten. Wer nach 5 Minuten keinen Anfang hat: nächste Folie (Musteranfang). Wer nicht fertig wird, schreibt zu Beginn der nächsten Stunde weiter – keine Hausaufgabe.</a:t>
             </a:r>
             <a:endParaRPr lang="en-US" dirty="0"/>
           </a:p>
@@ -2771,14 +2771,129 @@
       </p:sp>
       <p:sp>
         <p:nvSpPr>
-          <p:cNvPr id="7" name="Text 5"/>
-          <p:cNvSpPr txBox="1"/>
-          <p:nvPr/>
-        </p:nvSpPr>
-        <p:spPr>
-          <a:xfrm>
-            <a:off x="548640" y="1234440"/>
-            <a:ext cx="10972800" cy="685800"/>
+          <p:cNvPr id="7" name="Shape 5"/>
+          <p:cNvSpPr/>
+          <p:nvPr/>
+        </p:nvSpPr>
+        <p:spPr>
+          <a:xfrm>
+            <a:off x="548640" y="1188720"/>
+            <a:ext cx="11064240" cy="1600200"/>
+          </a:xfrm>
+          <a:prstGeom prst="roundRect">
+            <a:avLst>
+              <a:gd name="adj" fmla="val 4571"/>
+            </a:avLst>
+          </a:prstGeom>
+          <a:solidFill>
+            <a:srgbClr val="F4F7FD"/>
+          </a:solidFill>
+          <a:ln/>
+        </p:spPr>
+      </p:sp>
+      <p:sp>
+        <p:nvSpPr>
+          <p:cNvPr id="8" name="Text 6"/>
+          <p:cNvSpPr txBox="1"/>
+          <p:nvPr/>
+        </p:nvSpPr>
+        <p:spPr>
+          <a:xfrm>
+            <a:off x="777240" y="1261872"/>
+            <a:ext cx="10607040" cy="1463040"/>
+          </a:xfrm>
+          <a:prstGeom prst="rect">
+            <a:avLst/>
+          </a:prstGeom>
+          <a:noFill/>
+          <a:ln/>
+        </p:spPr>
+        <p:txBody>
+          <a:bodyPr wrap="square" lIns="0" tIns="0" rIns="0" bIns="0" rtlCol="0" anchor="ctr"/>
+          <a:lstStyle/>
+          <a:p>
+            <a:pPr indent="0" marL="0">
+              <a:lnSpc>
+                <a:spcPct val="110000"/>
+              </a:lnSpc>
+              <a:buNone/>
+            </a:pPr>
+            <a:r>
+              <a:rPr lang="en-US" sz="1900" b="1" dirty="0">
+                <a:solidFill>
+                  <a:srgbClr val="D9534F"/>
+                </a:solidFill>
+                <a:latin typeface="Cambria" pitchFamily="34" charset="0"/>
+                <a:ea typeface="Cambria" pitchFamily="34" charset="-122"/>
+                <a:cs typeface="Cambria" pitchFamily="34" charset="-120"/>
+              </a:rPr>
+              <a:t>Analysiere</a:t>
+            </a:r>
+            <a:pPr indent="0" marL="0">
+              <a:lnSpc>
+                <a:spcPct val="110000"/>
+              </a:lnSpc>
+              <a:buNone/>
+            </a:pPr>
+            <a:r>
+              <a:rPr lang="en-US" sz="1900" dirty="0">
+                <a:solidFill>
+                  <a:srgbClr val="1E2761"/>
+                </a:solidFill>
+                <a:latin typeface="Cambria" pitchFamily="34" charset="0"/>
+                <a:ea typeface="Cambria" pitchFamily="34" charset="-122"/>
+                <a:cs typeface="Cambria" pitchFamily="34" charset="-120"/>
+              </a:rPr>
+              <a:t> die Kommunikation zwischen Vater und Sohn in den Abschnitten A und C aus Franz Kafkas „Brief an den Vater“ (1919) unter Berücksichtigung der Kommunikationsmodelle von Schulz von Thun und Watzlawick. </a:t>
+            </a:r>
+            <a:pPr indent="0" marL="0">
+              <a:lnSpc>
+                <a:spcPct val="110000"/>
+              </a:lnSpc>
+              <a:buNone/>
+            </a:pPr>
+            <a:r>
+              <a:rPr lang="en-US" sz="1900" b="1" dirty="0">
+                <a:solidFill>
+                  <a:srgbClr val="D9534F"/>
+                </a:solidFill>
+                <a:latin typeface="Cambria" pitchFamily="34" charset="0"/>
+                <a:ea typeface="Cambria" pitchFamily="34" charset="-122"/>
+                <a:cs typeface="Cambria" pitchFamily="34" charset="-120"/>
+              </a:rPr>
+              <a:t>Beurteile</a:t>
+            </a:r>
+            <a:pPr indent="0" marL="0">
+              <a:lnSpc>
+                <a:spcPct val="110000"/>
+              </a:lnSpc>
+              <a:buNone/>
+            </a:pPr>
+            <a:r>
+              <a:rPr lang="en-US" sz="1900" dirty="0">
+                <a:solidFill>
+                  <a:srgbClr val="1E2761"/>
+                </a:solidFill>
+                <a:latin typeface="Cambria" pitchFamily="34" charset="0"/>
+                <a:ea typeface="Cambria" pitchFamily="34" charset="-122"/>
+                <a:cs typeface="Cambria" pitchFamily="34" charset="-120"/>
+              </a:rPr>
+              <a:t> abschließend, inwieweit die These zutrifft, dass Kafkas „Furcht“ auf Kommunikationsproblemen gründet.</a:t>
+            </a:r>
+            <a:endParaRPr lang="en-US" sz="1900" dirty="0"/>
+          </a:p>
+        </p:txBody>
+      </p:sp>
+      <p:sp>
+        <p:nvSpPr>
+          <p:cNvPr id="9" name="Text 7"/>
+          <p:cNvSpPr txBox="1"/>
+          <p:nvPr/>
+        </p:nvSpPr>
+        <p:spPr>
+          <a:xfrm>
+            <a:off x="548640" y="2971800"/>
+            <a:ext cx="5486400" cy="411480"/>
           </a:xfrm>
           <a:prstGeom prst="rect">
             <a:avLst/>
@@ -2794,30 +2909,30 @@
               <a:buNone/>
             </a:pPr>
             <a:r>
-              <a:rPr lang="en-US" sz="2100" dirty="0">
+              <a:rPr lang="en-US" sz="1900" b="1" dirty="0">
                 <a:solidFill>
                   <a:srgbClr val="1E2761"/>
                 </a:solidFill>
-                <a:latin typeface="Calibri" pitchFamily="34" charset="0"/>
-                <a:ea typeface="Calibri" pitchFamily="34" charset="-122"/>
-                <a:cs typeface="Calibri" pitchFamily="34" charset="-120"/>
-              </a:rPr>
-              <a:t>Schreibe deine Analyse von A und C als zusammenhängenden Text in deinen Hefter – so wie in der Klausur.</a:t>
-            </a:r>
-            <a:endParaRPr lang="en-US" sz="2100" dirty="0"/>
-          </a:p>
-        </p:txBody>
-      </p:sp>
-      <p:sp>
-        <p:nvSpPr>
-          <p:cNvPr id="8" name="Shape 6"/>
+                <a:latin typeface="Cambria" pitchFamily="34" charset="0"/>
+                <a:ea typeface="Cambria" pitchFamily="34" charset="-122"/>
+                <a:cs typeface="Cambria" pitchFamily="34" charset="-120"/>
+              </a:rPr>
+              <a:t>So gehst du vor</a:t>
+            </a:r>
+            <a:endParaRPr lang="en-US" sz="1900" dirty="0"/>
+          </a:p>
+        </p:txBody>
+      </p:sp>
+      <p:sp>
+        <p:nvSpPr>
+          <p:cNvPr id="10" name="Shape 8"/>
           <p:cNvSpPr/>
           <p:nvPr/>
         </p:nvSpPr>
         <p:spPr>
           <a:xfrm>
-            <a:off x="548640" y="2194560"/>
-            <a:ext cx="2011680" cy="402336"/>
+            <a:off x="548640" y="3547872"/>
+            <a:ext cx="1600200" cy="402336"/>
           </a:xfrm>
           <a:prstGeom prst="roundRect">
             <a:avLst>
@@ -2832,14 +2947,14 @@
       </p:sp>
       <p:sp>
         <p:nvSpPr>
-          <p:cNvPr id="9" name="Text 7"/>
-          <p:cNvSpPr txBox="1"/>
-          <p:nvPr/>
-        </p:nvSpPr>
-        <p:spPr>
-          <a:xfrm>
-            <a:off x="548640" y="2194560"/>
-            <a:ext cx="2011680" cy="402336"/>
+          <p:cNvPr id="11" name="Text 9"/>
+          <p:cNvSpPr txBox="1"/>
+          <p:nvPr/>
+        </p:nvSpPr>
+        <p:spPr>
+          <a:xfrm>
+            <a:off x="548640" y="3547872"/>
+            <a:ext cx="1600200" cy="402336"/>
           </a:xfrm>
           <a:prstGeom prst="rect">
             <a:avLst/>
@@ -2855,7 +2970,7 @@
               <a:buNone/>
             </a:pPr>
             <a:r>
-              <a:rPr lang="en-US" sz="1600" b="1" dirty="0">
+              <a:rPr lang="en-US" sz="1400" b="1" dirty="0">
                 <a:solidFill>
                   <a:srgbClr val="FFFFFF"/>
                 </a:solidFill>
@@ -2865,20 +2980,20 @@
               </a:rPr>
               <a:t>Einleitung</a:t>
             </a:r>
-            <a:endParaRPr lang="en-US" sz="1600" dirty="0"/>
-          </a:p>
-        </p:txBody>
-      </p:sp>
-      <p:sp>
-        <p:nvSpPr>
-          <p:cNvPr id="10" name="Text 8"/>
-          <p:cNvSpPr txBox="1"/>
-          <p:nvPr/>
-        </p:nvSpPr>
-        <p:spPr>
-          <a:xfrm>
-            <a:off x="2788920" y="2103120"/>
-            <a:ext cx="8778240" cy="594360"/>
+            <a:endParaRPr lang="en-US" sz="1400" dirty="0"/>
+          </a:p>
+        </p:txBody>
+      </p:sp>
+      <p:sp>
+        <p:nvSpPr>
+          <p:cNvPr id="12" name="Text 10"/>
+          <p:cNvSpPr txBox="1"/>
+          <p:nvPr/>
+        </p:nvSpPr>
+        <p:spPr>
+          <a:xfrm>
+            <a:off x="2286000" y="3474720"/>
+            <a:ext cx="3749040" cy="566928"/>
           </a:xfrm>
           <a:prstGeom prst="rect">
             <a:avLst/>
@@ -2894,7 +3009,7 @@
               <a:buNone/>
             </a:pPr>
             <a:r>
-              <a:rPr lang="en-US" sz="1900" dirty="0">
+              <a:rPr lang="en-US" sz="1500" dirty="0">
                 <a:solidFill>
                   <a:srgbClr val="1E2761"/>
                 </a:solidFill>
@@ -2902,22 +3017,22 @@
                 <a:ea typeface="Calibri" pitchFamily="34" charset="-122"/>
                 <a:cs typeface="Calibri" pitchFamily="34" charset="-120"/>
               </a:rPr>
-              <a:t>Wer schreibt an wen, wann, worüber?</a:t>
-            </a:r>
-            <a:endParaRPr lang="en-US" sz="1900" dirty="0"/>
-          </a:p>
-        </p:txBody>
-      </p:sp>
-      <p:sp>
-        <p:nvSpPr>
-          <p:cNvPr id="11" name="Shape 9"/>
+              <a:t>Autor, Titel, Entstehungsjahr, Thema</a:t>
+            </a:r>
+            <a:endParaRPr lang="en-US" sz="1500" dirty="0"/>
+          </a:p>
+        </p:txBody>
+      </p:sp>
+      <p:sp>
+        <p:nvSpPr>
+          <p:cNvPr id="13" name="Shape 11"/>
           <p:cNvSpPr/>
           <p:nvPr/>
         </p:nvSpPr>
         <p:spPr>
           <a:xfrm>
-            <a:off x="548640" y="2926080"/>
-            <a:ext cx="2011680" cy="402336"/>
+            <a:off x="548640" y="4206240"/>
+            <a:ext cx="1600200" cy="402336"/>
           </a:xfrm>
           <a:prstGeom prst="roundRect">
             <a:avLst>
@@ -2932,14 +3047,14 @@
       </p:sp>
       <p:sp>
         <p:nvSpPr>
-          <p:cNvPr id="12" name="Text 10"/>
-          <p:cNvSpPr txBox="1"/>
-          <p:nvPr/>
-        </p:nvSpPr>
-        <p:spPr>
-          <a:xfrm>
-            <a:off x="548640" y="2926080"/>
-            <a:ext cx="2011680" cy="402336"/>
+          <p:cNvPr id="14" name="Text 12"/>
+          <p:cNvSpPr txBox="1"/>
+          <p:nvPr/>
+        </p:nvSpPr>
+        <p:spPr>
+          <a:xfrm>
+            <a:off x="548640" y="4206240"/>
+            <a:ext cx="1600200" cy="402336"/>
           </a:xfrm>
           <a:prstGeom prst="rect">
             <a:avLst/>
@@ -2955,7 +3070,7 @@
               <a:buNone/>
             </a:pPr>
             <a:r>
-              <a:rPr lang="en-US" sz="1600" b="1" dirty="0">
+              <a:rPr lang="en-US" sz="1400" b="1" dirty="0">
                 <a:solidFill>
                   <a:srgbClr val="FFFFFF"/>
                 </a:solidFill>
@@ -2965,20 +3080,20 @@
               </a:rPr>
               <a:t>Hauptteil</a:t>
             </a:r>
-            <a:endParaRPr lang="en-US" sz="1600" dirty="0"/>
-          </a:p>
-        </p:txBody>
-      </p:sp>
-      <p:sp>
-        <p:nvSpPr>
-          <p:cNvPr id="13" name="Text 11"/>
-          <p:cNvSpPr txBox="1"/>
-          <p:nvPr/>
-        </p:nvSpPr>
-        <p:spPr>
-          <a:xfrm>
-            <a:off x="2788920" y="2834640"/>
-            <a:ext cx="8778240" cy="594360"/>
+            <a:endParaRPr lang="en-US" sz="1400" dirty="0"/>
+          </a:p>
+        </p:txBody>
+      </p:sp>
+      <p:sp>
+        <p:nvSpPr>
+          <p:cNvPr id="15" name="Text 13"/>
+          <p:cNvSpPr txBox="1"/>
+          <p:nvPr/>
+        </p:nvSpPr>
+        <p:spPr>
+          <a:xfrm>
+            <a:off x="2286000" y="4133088"/>
+            <a:ext cx="3749040" cy="566928"/>
           </a:xfrm>
           <a:prstGeom prst="rect">
             <a:avLst/>
@@ -2994,7 +3109,7 @@
               <a:buNone/>
             </a:pPr>
             <a:r>
-              <a:rPr lang="en-US" sz="1900" dirty="0">
+              <a:rPr lang="en-US" sz="1500" dirty="0">
                 <a:solidFill>
                   <a:srgbClr val="1E2761"/>
                 </a:solidFill>
@@ -3002,22 +3117,22 @@
                 <a:ea typeface="Calibri" pitchFamily="34" charset="-122"/>
                 <a:cs typeface="Calibri" pitchFamily="34" charset="-120"/>
               </a:rPr>
-              <a:t>je Zeile der Matrix: Behauptung → Beleg (Zitat + Z.) → Erklärung · erst A, dann C</a:t>
-            </a:r>
-            <a:endParaRPr lang="en-US" sz="1900" dirty="0"/>
-          </a:p>
-        </p:txBody>
-      </p:sp>
-      <p:sp>
-        <p:nvSpPr>
-          <p:cNvPr id="14" name="Shape 12"/>
+              <a:t>je Zeile der Matrix: Behauptung → Beleg → Erklärung · erst A, dann C</a:t>
+            </a:r>
+            <a:endParaRPr lang="en-US" sz="1500" dirty="0"/>
+          </a:p>
+        </p:txBody>
+      </p:sp>
+      <p:sp>
+        <p:nvSpPr>
+          <p:cNvPr id="16" name="Shape 14"/>
           <p:cNvSpPr/>
           <p:nvPr/>
         </p:nvSpPr>
         <p:spPr>
           <a:xfrm>
-            <a:off x="548640" y="3657600"/>
-            <a:ext cx="2011680" cy="402336"/>
+            <a:off x="548640" y="4864608"/>
+            <a:ext cx="1600200" cy="402336"/>
           </a:xfrm>
           <a:prstGeom prst="roundRect">
             <a:avLst>
@@ -3032,14 +3147,14 @@
       </p:sp>
       <p:sp>
         <p:nvSpPr>
-          <p:cNvPr id="15" name="Text 13"/>
-          <p:cNvSpPr txBox="1"/>
-          <p:nvPr/>
-        </p:nvSpPr>
-        <p:spPr>
-          <a:xfrm>
-            <a:off x="548640" y="3657600"/>
-            <a:ext cx="2011680" cy="402336"/>
+          <p:cNvPr id="17" name="Text 15"/>
+          <p:cNvSpPr txBox="1"/>
+          <p:nvPr/>
+        </p:nvSpPr>
+        <p:spPr>
+          <a:xfrm>
+            <a:off x="548640" y="4864608"/>
+            <a:ext cx="1600200" cy="402336"/>
           </a:xfrm>
           <a:prstGeom prst="rect">
             <a:avLst/>
@@ -3055,7 +3170,7 @@
               <a:buNone/>
             </a:pPr>
             <a:r>
-              <a:rPr lang="en-US" sz="1600" b="1" dirty="0">
+              <a:rPr lang="en-US" sz="1400" b="1" dirty="0">
                 <a:solidFill>
                   <a:srgbClr val="FFFFFF"/>
                 </a:solidFill>
@@ -3065,20 +3180,20 @@
               </a:rPr>
               <a:t>Schluss</a:t>
             </a:r>
-            <a:endParaRPr lang="en-US" sz="1600" dirty="0"/>
-          </a:p>
-        </p:txBody>
-      </p:sp>
-      <p:sp>
-        <p:nvSpPr>
-          <p:cNvPr id="16" name="Text 14"/>
-          <p:cNvSpPr txBox="1"/>
-          <p:nvPr/>
-        </p:nvSpPr>
-        <p:spPr>
-          <a:xfrm>
-            <a:off x="2788920" y="3566160"/>
-            <a:ext cx="8778240" cy="594360"/>
+            <a:endParaRPr lang="en-US" sz="1400" dirty="0"/>
+          </a:p>
+        </p:txBody>
+      </p:sp>
+      <p:sp>
+        <p:nvSpPr>
+          <p:cNvPr id="18" name="Text 16"/>
+          <p:cNvSpPr txBox="1"/>
+          <p:nvPr/>
+        </p:nvSpPr>
+        <p:spPr>
+          <a:xfrm>
+            <a:off x="2286000" y="4791456"/>
+            <a:ext cx="3749040" cy="566928"/>
           </a:xfrm>
           <a:prstGeom prst="rect">
             <a:avLst/>
@@ -3094,7 +3209,7 @@
               <a:buNone/>
             </a:pPr>
             <a:r>
-              <a:rPr lang="en-US" sz="1900" dirty="0">
+              <a:rPr lang="en-US" sz="1500" dirty="0">
                 <a:solidFill>
                   <a:srgbClr val="1E2761"/>
                 </a:solidFill>
@@ -3102,26 +3217,65 @@
                 <a:ea typeface="Calibri" pitchFamily="34" charset="-122"/>
                 <a:cs typeface="Calibri" pitchFamily="34" charset="-120"/>
               </a:rPr>
-              <a:t>Stützen die Stellen die These? Was muss man ergänzen?</a:t>
-            </a:r>
-            <a:endParaRPr lang="en-US" sz="1900" dirty="0"/>
-          </a:p>
-        </p:txBody>
-      </p:sp>
-      <p:sp>
-        <p:nvSpPr>
-          <p:cNvPr id="17" name="Shape 15"/>
+              <a:t>begründetes Urteil zur These (auch „ja, aber …“)</a:t>
+            </a:r>
+            <a:endParaRPr lang="en-US" sz="1500" dirty="0"/>
+          </a:p>
+        </p:txBody>
+      </p:sp>
+      <p:sp>
+        <p:nvSpPr>
+          <p:cNvPr id="19" name="Text 17"/>
+          <p:cNvSpPr txBox="1"/>
+          <p:nvPr/>
+        </p:nvSpPr>
+        <p:spPr>
+          <a:xfrm>
+            <a:off x="548640" y="5486400"/>
+            <a:ext cx="5486400" cy="868680"/>
+          </a:xfrm>
+          <a:prstGeom prst="rect">
+            <a:avLst/>
+          </a:prstGeom>
+          <a:noFill/>
+          <a:ln/>
+        </p:spPr>
+        <p:txBody>
+          <a:bodyPr wrap="square" lIns="0" tIns="0" rIns="0" bIns="0" rtlCol="0" anchor="t"/>
+          <a:lstStyle/>
+          <a:p>
+            <a:pPr indent="0" marL="0">
+              <a:buNone/>
+            </a:pPr>
+            <a:r>
+              <a:rPr lang="en-US" sz="1500" i="1" dirty="0">
+                <a:solidFill>
+                  <a:srgbClr val="5B6B8C"/>
+                </a:solidFill>
+                <a:latin typeface="Calibri" pitchFamily="34" charset="0"/>
+                <a:ea typeface="Calibri" pitchFamily="34" charset="-122"/>
+                <a:cs typeface="Calibri" pitchFamily="34" charset="-120"/>
+              </a:rPr>
+              <a:t>Belege jede Aussage mit Zitat und Zeile (A, Z. … bzw. C, Z. …). Grundlage ist deine Matrix im Hefter.</a:t>
+            </a:r>
+            <a:endParaRPr lang="en-US" sz="1500" dirty="0"/>
+          </a:p>
+        </p:txBody>
+      </p:sp>
+      <p:sp>
+        <p:nvSpPr>
+          <p:cNvPr id="20" name="Shape 18"/>
           <p:cNvSpPr/>
           <p:nvPr/>
         </p:nvSpPr>
         <p:spPr>
           <a:xfrm>
-            <a:off x="548640" y="4434840"/>
-            <a:ext cx="11064240" cy="2057400"/>
+            <a:off x="6309360" y="2971800"/>
+            <a:ext cx="5303520" cy="3429000"/>
           </a:xfrm>
           <a:prstGeom prst="roundRect">
             <a:avLst>
-              <a:gd name="adj" fmla="val 3556"/>
+              <a:gd name="adj" fmla="val 2133"/>
             </a:avLst>
           </a:prstGeom>
           <a:solidFill>
@@ -3132,14 +3286,14 @@
       </p:sp>
       <p:sp>
         <p:nvSpPr>
-          <p:cNvPr id="18" name="Text 16"/>
-          <p:cNvSpPr txBox="1"/>
-          <p:nvPr/>
-        </p:nvSpPr>
-        <p:spPr>
-          <a:xfrm>
-            <a:off x="822960" y="4553712"/>
-            <a:ext cx="5486400" cy="411480"/>
+          <p:cNvPr id="21" name="Text 19"/>
+          <p:cNvSpPr txBox="1"/>
+          <p:nvPr/>
+        </p:nvSpPr>
+        <p:spPr>
+          <a:xfrm>
+            <a:off x="6537960" y="3063240"/>
+            <a:ext cx="4572000" cy="411480"/>
           </a:xfrm>
           <a:prstGeom prst="rect">
             <a:avLst/>
@@ -3155,7 +3309,7 @@
               <a:buNone/>
             </a:pPr>
             <a:r>
-              <a:rPr lang="en-US" sz="2000" b="1" dirty="0">
+              <a:rPr lang="en-US" sz="1900" b="1" dirty="0">
                 <a:solidFill>
                   <a:srgbClr val="E8A33D"/>
                 </a:solidFill>
@@ -3165,20 +3319,20 @@
               </a:rPr>
               <a:t>Satzbausteine</a:t>
             </a:r>
-            <a:endParaRPr lang="en-US" sz="2000" dirty="0"/>
-          </a:p>
-        </p:txBody>
-      </p:sp>
-      <p:sp>
-        <p:nvSpPr>
-          <p:cNvPr id="19" name="Text 17"/>
-          <p:cNvSpPr txBox="1"/>
-          <p:nvPr/>
-        </p:nvSpPr>
-        <p:spPr>
-          <a:xfrm>
-            <a:off x="822960" y="5029200"/>
-            <a:ext cx="10515600" cy="1371600"/>
+            <a:endParaRPr lang="en-US" sz="1900" dirty="0"/>
+          </a:p>
+        </p:txBody>
+      </p:sp>
+      <p:sp>
+        <p:nvSpPr>
+          <p:cNvPr id="22" name="Text 20"/>
+          <p:cNvSpPr txBox="1"/>
+          <p:nvPr/>
+        </p:nvSpPr>
+        <p:spPr>
+          <a:xfrm>
+            <a:off x="6537960" y="3520440"/>
+            <a:ext cx="4937760" cy="2788920"/>
           </a:xfrm>
           <a:prstGeom prst="rect">
             <a:avLst/>
@@ -3192,12 +3346,12 @@
           <a:p>
             <a:pPr indent="0" marL="0">
               <a:spcAft>
-                <a:spcPts val="400"/>
+                <a:spcPts val="300"/>
               </a:spcAft>
               <a:buNone/>
             </a:pPr>
             <a:r>
-              <a:rPr lang="en-US" sz="1800" i="1" dirty="0">
+              <a:rPr lang="en-US" sz="1500" i="1" dirty="0">
                 <a:solidFill>
                   <a:srgbClr val="1E2761"/>
                 </a:solidFill>
@@ -3205,9 +3359,129 @@
                 <a:ea typeface="Calibri" pitchFamily="34" charset="-122"/>
                 <a:cs typeface="Calibri" pitchFamily="34" charset="-120"/>
               </a:rPr>
-              <a:t>In seinem „Brief an den Vater“ (1919) …  ·  Indem der Vater …, sendet er …  ·  Dies zeigt sich in … (Z. …)  ·  Hinzu kommt, dass …  ·  Die Folge ist …  ·  Besonders deutlich wird dies, wenn …  ·  Insgesamt stützt die Stelle die These, weil …  ·  Allerdings …</a:t>
-            </a:r>
-            <a:endParaRPr lang="en-US" sz="1800" dirty="0"/>
+              <a:t>In seinem „Brief an den Vater“ (1919) …</a:t>
+            </a:r>
+            <a:endParaRPr lang="en-US" sz="1500" dirty="0"/>
+          </a:p>
+          <a:p>
+            <a:pPr indent="0" marL="0">
+              <a:spcAft>
+                <a:spcPts val="300"/>
+              </a:spcAft>
+              <a:buNone/>
+            </a:pPr>
+            <a:r>
+              <a:rPr lang="en-US" sz="1500" i="1" dirty="0">
+                <a:solidFill>
+                  <a:srgbClr val="1E2761"/>
+                </a:solidFill>
+                <a:latin typeface="Calibri" pitchFamily="34" charset="0"/>
+                <a:ea typeface="Calibri" pitchFamily="34" charset="-122"/>
+                <a:cs typeface="Calibri" pitchFamily="34" charset="-120"/>
+              </a:rPr>
+              <a:t>Indem der Vater …, sendet er …</a:t>
+            </a:r>
+            <a:endParaRPr lang="en-US" sz="1500" dirty="0"/>
+          </a:p>
+          <a:p>
+            <a:pPr indent="0" marL="0">
+              <a:spcAft>
+                <a:spcPts val="300"/>
+              </a:spcAft>
+              <a:buNone/>
+            </a:pPr>
+            <a:r>
+              <a:rPr lang="en-US" sz="1500" i="1" dirty="0">
+                <a:solidFill>
+                  <a:srgbClr val="1E2761"/>
+                </a:solidFill>
+                <a:latin typeface="Calibri" pitchFamily="34" charset="0"/>
+                <a:ea typeface="Calibri" pitchFamily="34" charset="-122"/>
+                <a:cs typeface="Calibri" pitchFamily="34" charset="-120"/>
+              </a:rPr>
+              <a:t>Dies zeigt sich in … (Z. …)</a:t>
+            </a:r>
+            <a:endParaRPr lang="en-US" sz="1500" dirty="0"/>
+          </a:p>
+          <a:p>
+            <a:pPr indent="0" marL="0">
+              <a:spcAft>
+                <a:spcPts val="300"/>
+              </a:spcAft>
+              <a:buNone/>
+            </a:pPr>
+            <a:r>
+              <a:rPr lang="en-US" sz="1500" i="1" dirty="0">
+                <a:solidFill>
+                  <a:srgbClr val="1E2761"/>
+                </a:solidFill>
+                <a:latin typeface="Calibri" pitchFamily="34" charset="0"/>
+                <a:ea typeface="Calibri" pitchFamily="34" charset="-122"/>
+                <a:cs typeface="Calibri" pitchFamily="34" charset="-120"/>
+              </a:rPr>
+              <a:t>Hinzu kommt, dass …  ·  Die Folge ist …</a:t>
+            </a:r>
+            <a:endParaRPr lang="en-US" sz="1500" dirty="0"/>
+          </a:p>
+          <a:p>
+            <a:pPr indent="0" marL="0">
+              <a:spcAft>
+                <a:spcPts val="300"/>
+              </a:spcAft>
+              <a:buNone/>
+            </a:pPr>
+            <a:r>
+              <a:rPr lang="en-US" sz="1500" i="1" dirty="0">
+                <a:solidFill>
+                  <a:srgbClr val="1E2761"/>
+                </a:solidFill>
+                <a:latin typeface="Calibri" pitchFamily="34" charset="0"/>
+                <a:ea typeface="Calibri" pitchFamily="34" charset="-122"/>
+                <a:cs typeface="Calibri" pitchFamily="34" charset="-120"/>
+              </a:rPr>
+              <a:t>Besonders deutlich wird dies, wenn …</a:t>
+            </a:r>
+            <a:endParaRPr lang="en-US" sz="1500" dirty="0"/>
+          </a:p>
+          <a:p>
+            <a:pPr indent="0" marL="0">
+              <a:spcAft>
+                <a:spcPts val="300"/>
+              </a:spcAft>
+              <a:buNone/>
+            </a:pPr>
+            <a:r>
+              <a:rPr lang="en-US" sz="1500" i="1" dirty="0">
+                <a:solidFill>
+                  <a:srgbClr val="1E2761"/>
+                </a:solidFill>
+                <a:latin typeface="Calibri" pitchFamily="34" charset="0"/>
+                <a:ea typeface="Calibri" pitchFamily="34" charset="-122"/>
+                <a:cs typeface="Calibri" pitchFamily="34" charset="-120"/>
+              </a:rPr>
+              <a:t>Insgesamt stützt die Stelle die These, weil …</a:t>
+            </a:r>
+            <a:endParaRPr lang="en-US" sz="1500" dirty="0"/>
+          </a:p>
+          <a:p>
+            <a:pPr indent="0" marL="0">
+              <a:spcAft>
+                <a:spcPts val="300"/>
+              </a:spcAft>
+              <a:buNone/>
+            </a:pPr>
+            <a:r>
+              <a:rPr lang="en-US" sz="1500" i="1" dirty="0">
+                <a:solidFill>
+                  <a:srgbClr val="1E2761"/>
+                </a:solidFill>
+                <a:latin typeface="Calibri" pitchFamily="34" charset="0"/>
+                <a:ea typeface="Calibri" pitchFamily="34" charset="-122"/>
+                <a:cs typeface="Calibri" pitchFamily="34" charset="-120"/>
+              </a:rPr>
+              <a:t>Allerdings …</a:t>
+            </a:r>
+            <a:endParaRPr lang="en-US" sz="1500" dirty="0"/>
           </a:p>
         </p:txBody>
       </p:sp>
